--- a/Common/独自ミラー/ミラー研究.pptx
+++ b/Common/独自ミラー/ミラー研究.pptx
@@ -616,7 +616,7 @@
           <a:p>
             <a:fld id="{397CD09E-04E5-4F16-B704-58289DD0F48F}" type="datetimeFigureOut">
               <a:rPr kumimoji="1" lang="ja-JP" altLang="en-US" smtClean="0"/>
-              <a:t>2026/3/3</a:t>
+              <a:t>2026/10/16</a:t>
             </a:fld>
             <a:endParaRPr kumimoji="1" lang="ja-JP" altLang="en-US"/>
           </a:p>
@@ -846,7 +846,7 @@
           <a:p>
             <a:fld id="{397CD09E-04E5-4F16-B704-58289DD0F48F}" type="datetimeFigureOut">
               <a:rPr kumimoji="1" lang="ja-JP" altLang="en-US" smtClean="0"/>
-              <a:t>2026/3/3</a:t>
+              <a:t>2026/10/16</a:t>
             </a:fld>
             <a:endParaRPr kumimoji="1" lang="ja-JP" altLang="en-US"/>
           </a:p>
@@ -1086,7 +1086,7 @@
           <a:p>
             <a:fld id="{397CD09E-04E5-4F16-B704-58289DD0F48F}" type="datetimeFigureOut">
               <a:rPr kumimoji="1" lang="ja-JP" altLang="en-US" smtClean="0"/>
-              <a:t>2026/3/3</a:t>
+              <a:t>2026/10/16</a:t>
             </a:fld>
             <a:endParaRPr kumimoji="1" lang="ja-JP" altLang="en-US"/>
           </a:p>
@@ -1316,7 +1316,7 @@
           <a:p>
             <a:fld id="{397CD09E-04E5-4F16-B704-58289DD0F48F}" type="datetimeFigureOut">
               <a:rPr kumimoji="1" lang="ja-JP" altLang="en-US" smtClean="0"/>
-              <a:t>2026/3/3</a:t>
+              <a:t>2026/10/16</a:t>
             </a:fld>
             <a:endParaRPr kumimoji="1" lang="ja-JP" altLang="en-US"/>
           </a:p>
@@ -1591,7 +1591,7 @@
           <a:p>
             <a:fld id="{397CD09E-04E5-4F16-B704-58289DD0F48F}" type="datetimeFigureOut">
               <a:rPr kumimoji="1" lang="ja-JP" altLang="en-US" smtClean="0"/>
-              <a:t>2026/3/3</a:t>
+              <a:t>2026/10/16</a:t>
             </a:fld>
             <a:endParaRPr kumimoji="1" lang="ja-JP" altLang="en-US"/>
           </a:p>
@@ -1920,7 +1920,7 @@
           <a:p>
             <a:fld id="{397CD09E-04E5-4F16-B704-58289DD0F48F}" type="datetimeFigureOut">
               <a:rPr kumimoji="1" lang="ja-JP" altLang="en-US" smtClean="0"/>
-              <a:t>2026/3/3</a:t>
+              <a:t>2026/10/16</a:t>
             </a:fld>
             <a:endParaRPr kumimoji="1" lang="ja-JP" altLang="en-US"/>
           </a:p>
@@ -2396,7 +2396,7 @@
           <a:p>
             <a:fld id="{397CD09E-04E5-4F16-B704-58289DD0F48F}" type="datetimeFigureOut">
               <a:rPr kumimoji="1" lang="ja-JP" altLang="en-US" smtClean="0"/>
-              <a:t>2026/3/3</a:t>
+              <a:t>2026/10/16</a:t>
             </a:fld>
             <a:endParaRPr kumimoji="1" lang="ja-JP" altLang="en-US"/>
           </a:p>
@@ -2537,7 +2537,7 @@
           <a:p>
             <a:fld id="{397CD09E-04E5-4F16-B704-58289DD0F48F}" type="datetimeFigureOut">
               <a:rPr kumimoji="1" lang="ja-JP" altLang="en-US" smtClean="0"/>
-              <a:t>2026/3/3</a:t>
+              <a:t>2026/10/16</a:t>
             </a:fld>
             <a:endParaRPr kumimoji="1" lang="ja-JP" altLang="en-US"/>
           </a:p>
@@ -2650,7 +2650,7 @@
           <a:p>
             <a:fld id="{397CD09E-04E5-4F16-B704-58289DD0F48F}" type="datetimeFigureOut">
               <a:rPr kumimoji="1" lang="ja-JP" altLang="en-US" smtClean="0"/>
-              <a:t>2026/3/3</a:t>
+              <a:t>2026/10/16</a:t>
             </a:fld>
             <a:endParaRPr kumimoji="1" lang="ja-JP" altLang="en-US"/>
           </a:p>
@@ -2993,7 +2993,7 @@
           <a:p>
             <a:fld id="{397CD09E-04E5-4F16-B704-58289DD0F48F}" type="datetimeFigureOut">
               <a:rPr kumimoji="1" lang="ja-JP" altLang="en-US" smtClean="0"/>
-              <a:t>2026/3/3</a:t>
+              <a:t>2026/10/16</a:t>
             </a:fld>
             <a:endParaRPr kumimoji="1" lang="ja-JP" altLang="en-US"/>
           </a:p>
@@ -3281,7 +3281,7 @@
           <a:p>
             <a:fld id="{397CD09E-04E5-4F16-B704-58289DD0F48F}" type="datetimeFigureOut">
               <a:rPr kumimoji="1" lang="ja-JP" altLang="en-US" smtClean="0"/>
-              <a:t>2026/3/3</a:t>
+              <a:t>2026/10/16</a:t>
             </a:fld>
             <a:endParaRPr kumimoji="1" lang="ja-JP" altLang="en-US"/>
           </a:p>
@@ -3554,7 +3554,7 @@
           <a:p>
             <a:fld id="{397CD09E-04E5-4F16-B704-58289DD0F48F}" type="datetimeFigureOut">
               <a:rPr kumimoji="1" lang="ja-JP" altLang="en-US" smtClean="0"/>
-              <a:t>2026/3/3</a:t>
+              <a:t>2026/10/16</a:t>
             </a:fld>
             <a:endParaRPr kumimoji="1" lang="ja-JP" altLang="en-US"/>
           </a:p>
@@ -3971,6 +3971,96 @@
           <a:chExt cx="0" cy="0"/>
         </a:xfrm>
       </p:grpSpPr>
+      <p:cxnSp>
+        <p:nvCxnSpPr>
+          <p:cNvPr id="221" name="直線矢印コネクタ 220">
+            <a:extLst>
+              <a:ext uri="{FF2B5EF4-FFF2-40B4-BE49-F238E27FC236}">
+                <a16:creationId xmlns:a16="http://schemas.microsoft.com/office/drawing/2014/main" id="{E70CD504-C896-13D1-C194-55B69EF334F8}"/>
+              </a:ext>
+            </a:extLst>
+          </p:cNvPr>
+          <p:cNvCxnSpPr>
+            <a:cxnSpLocks/>
+          </p:cNvCxnSpPr>
+          <p:nvPr/>
+        </p:nvCxnSpPr>
+        <p:spPr>
+          <a:xfrm>
+            <a:off x="5527573" y="1919182"/>
+            <a:ext cx="2714727" cy="592631"/>
+          </a:xfrm>
+          <a:prstGeom prst="straightConnector1">
+            <a:avLst/>
+          </a:prstGeom>
+          <a:ln w="28575">
+            <a:solidFill>
+              <a:schemeClr val="accent4">
+                <a:lumMod val="60000"/>
+                <a:lumOff val="40000"/>
+              </a:schemeClr>
+            </a:solidFill>
+            <a:tailEnd type="triangle"/>
+          </a:ln>
+        </p:spPr>
+        <p:style>
+          <a:lnRef idx="1">
+            <a:schemeClr val="accent1"/>
+          </a:lnRef>
+          <a:fillRef idx="0">
+            <a:schemeClr val="accent1"/>
+          </a:fillRef>
+          <a:effectRef idx="0">
+            <a:schemeClr val="accent1"/>
+          </a:effectRef>
+          <a:fontRef idx="minor">
+            <a:schemeClr val="tx1"/>
+          </a:fontRef>
+        </p:style>
+      </p:cxnSp>
+      <p:cxnSp>
+        <p:nvCxnSpPr>
+          <p:cNvPr id="226" name="直線コネクタ 225">
+            <a:extLst>
+              <a:ext uri="{FF2B5EF4-FFF2-40B4-BE49-F238E27FC236}">
+                <a16:creationId xmlns:a16="http://schemas.microsoft.com/office/drawing/2014/main" id="{F81B2A62-4369-CA51-3695-7FC85ABBE063}"/>
+              </a:ext>
+            </a:extLst>
+          </p:cNvPr>
+          <p:cNvCxnSpPr>
+            <a:cxnSpLocks/>
+          </p:cNvCxnSpPr>
+          <p:nvPr/>
+        </p:nvCxnSpPr>
+        <p:spPr>
+          <a:xfrm flipV="1">
+            <a:off x="5608103" y="1905000"/>
+            <a:ext cx="824140" cy="204788"/>
+          </a:xfrm>
+          <a:prstGeom prst="line">
+            <a:avLst/>
+          </a:prstGeom>
+          <a:ln w="19050">
+            <a:solidFill>
+              <a:srgbClr val="FF0000"/>
+            </a:solidFill>
+          </a:ln>
+        </p:spPr>
+        <p:style>
+          <a:lnRef idx="1">
+            <a:schemeClr val="accent1"/>
+          </a:lnRef>
+          <a:fillRef idx="0">
+            <a:schemeClr val="accent1"/>
+          </a:fillRef>
+          <a:effectRef idx="0">
+            <a:schemeClr val="accent1"/>
+          </a:effectRef>
+          <a:fontRef idx="minor">
+            <a:schemeClr val="tx1"/>
+          </a:fontRef>
+        </p:style>
+      </p:cxnSp>
       <p:sp>
         <p:nvSpPr>
           <p:cNvPr id="4" name="テキスト ボックス 3">
@@ -5494,1563 +5584,5008 @@
           </p:txBody>
         </p:sp>
       </p:grpSp>
-      <p:grpSp>
-        <p:nvGrpSpPr>
-          <p:cNvPr id="48" name="グループ化 47">
-            <a:extLst>
-              <a:ext uri="{FF2B5EF4-FFF2-40B4-BE49-F238E27FC236}">
-                <a16:creationId xmlns:a16="http://schemas.microsoft.com/office/drawing/2014/main" id="{89687166-9F9F-5812-798B-6EB3AC4ACCF7}"/>
-              </a:ext>
-            </a:extLst>
-          </p:cNvPr>
-          <p:cNvGrpSpPr/>
+      <p:sp>
+        <p:nvSpPr>
+          <p:cNvPr id="46" name="円弧 45">
+            <a:extLst>
+              <a:ext uri="{FF2B5EF4-FFF2-40B4-BE49-F238E27FC236}">
+                <a16:creationId xmlns:a16="http://schemas.microsoft.com/office/drawing/2014/main" id="{CDFAAA52-066E-B9A3-51F4-19238CF1FEEE}"/>
+              </a:ext>
+            </a:extLst>
+          </p:cNvPr>
+          <p:cNvSpPr/>
           <p:nvPr/>
-        </p:nvGrpSpPr>
-        <p:grpSpPr>
+        </p:nvSpPr>
+        <p:spPr>
+          <a:xfrm rot="2959031">
+            <a:off x="2658879" y="578968"/>
+            <a:ext cx="224568" cy="106317"/>
+          </a:xfrm>
+          <a:prstGeom prst="arc">
+            <a:avLst/>
+          </a:prstGeom>
+          <a:ln w="12700">
+            <a:solidFill>
+              <a:schemeClr val="tx1"/>
+            </a:solidFill>
+          </a:ln>
+        </p:spPr>
+        <p:style>
+          <a:lnRef idx="1">
+            <a:schemeClr val="accent1"/>
+          </a:lnRef>
+          <a:fillRef idx="0">
+            <a:schemeClr val="accent1"/>
+          </a:fillRef>
+          <a:effectRef idx="0">
+            <a:schemeClr val="accent1"/>
+          </a:effectRef>
+          <a:fontRef idx="minor">
+            <a:schemeClr val="tx1"/>
+          </a:fontRef>
+        </p:style>
+        <p:txBody>
+          <a:bodyPr rtlCol="0" anchor="ctr"/>
+          <a:lstStyle/>
+          <a:p>
+            <a:pPr algn="ctr"/>
+            <a:endParaRPr kumimoji="1" lang="ja-JP" altLang="en-US"/>
+          </a:p>
+        </p:txBody>
+      </p:sp>
+      <p:cxnSp>
+        <p:nvCxnSpPr>
+          <p:cNvPr id="198" name="直線コネクタ 197">
+            <a:extLst>
+              <a:ext uri="{FF2B5EF4-FFF2-40B4-BE49-F238E27FC236}">
+                <a16:creationId xmlns:a16="http://schemas.microsoft.com/office/drawing/2014/main" id="{12A5AE85-41A3-23AE-CACD-F192BA112E45}"/>
+              </a:ext>
+            </a:extLst>
+          </p:cNvPr>
+          <p:cNvCxnSpPr>
+            <a:cxnSpLocks/>
+            <a:stCxn id="194" idx="0"/>
+            <a:endCxn id="102" idx="2"/>
+          </p:cNvCxnSpPr>
+          <p:nvPr/>
+        </p:nvCxnSpPr>
+        <p:spPr>
+          <a:xfrm flipV="1">
+            <a:off x="873688" y="714274"/>
+            <a:ext cx="635588" cy="5903"/>
+          </a:xfrm>
+          <a:prstGeom prst="line">
+            <a:avLst/>
+          </a:prstGeom>
+          <a:ln w="19050">
+            <a:solidFill>
+              <a:srgbClr val="8FAADC"/>
+            </a:solidFill>
+          </a:ln>
+        </p:spPr>
+        <p:style>
+          <a:lnRef idx="1">
+            <a:schemeClr val="accent1"/>
+          </a:lnRef>
+          <a:fillRef idx="0">
+            <a:schemeClr val="accent1"/>
+          </a:fillRef>
+          <a:effectRef idx="0">
+            <a:schemeClr val="accent1"/>
+          </a:effectRef>
+          <a:fontRef idx="minor">
+            <a:schemeClr val="tx1"/>
+          </a:fontRef>
+        </p:style>
+      </p:cxnSp>
+      <p:cxnSp>
+        <p:nvCxnSpPr>
+          <p:cNvPr id="200" name="直線コネクタ 199">
+            <a:extLst>
+              <a:ext uri="{FF2B5EF4-FFF2-40B4-BE49-F238E27FC236}">
+                <a16:creationId xmlns:a16="http://schemas.microsoft.com/office/drawing/2014/main" id="{181237A6-AEBB-97CC-5BF2-A15C22B168F3}"/>
+              </a:ext>
+            </a:extLst>
+          </p:cNvPr>
+          <p:cNvCxnSpPr>
+            <a:cxnSpLocks/>
+            <a:endCxn id="102" idx="6"/>
+          </p:cNvCxnSpPr>
+          <p:nvPr/>
+        </p:nvCxnSpPr>
+        <p:spPr>
+          <a:xfrm flipH="1" flipV="1">
+            <a:off x="1575807" y="714274"/>
+            <a:ext cx="638141" cy="3567"/>
+          </a:xfrm>
+          <a:prstGeom prst="line">
+            <a:avLst/>
+          </a:prstGeom>
+          <a:ln w="19050">
+            <a:solidFill>
+              <a:srgbClr val="8FAADC"/>
+            </a:solidFill>
+          </a:ln>
+        </p:spPr>
+        <p:style>
+          <a:lnRef idx="1">
+            <a:schemeClr val="accent1"/>
+          </a:lnRef>
+          <a:fillRef idx="0">
+            <a:schemeClr val="accent1"/>
+          </a:fillRef>
+          <a:effectRef idx="0">
+            <a:schemeClr val="accent1"/>
+          </a:effectRef>
+          <a:fontRef idx="minor">
+            <a:schemeClr val="tx1"/>
+          </a:fontRef>
+        </p:style>
+      </p:cxnSp>
+      <p:sp>
+        <p:nvSpPr>
+          <p:cNvPr id="180" name="円弧 179">
+            <a:extLst>
+              <a:ext uri="{FF2B5EF4-FFF2-40B4-BE49-F238E27FC236}">
+                <a16:creationId xmlns:a16="http://schemas.microsoft.com/office/drawing/2014/main" id="{4C1D95AC-4EA8-5B50-3AF6-CCE381440845}"/>
+              </a:ext>
+            </a:extLst>
+          </p:cNvPr>
+          <p:cNvSpPr/>
+          <p:nvPr/>
+        </p:nvSpPr>
+        <p:spPr>
+          <a:xfrm rot="7642928">
+            <a:off x="1498360" y="689874"/>
+            <a:ext cx="224568" cy="106317"/>
+          </a:xfrm>
+          <a:prstGeom prst="arc">
+            <a:avLst/>
+          </a:prstGeom>
+          <a:ln w="12700">
+            <a:solidFill>
+              <a:schemeClr val="tx1"/>
+            </a:solidFill>
+          </a:ln>
+        </p:spPr>
+        <p:style>
+          <a:lnRef idx="1">
+            <a:schemeClr val="accent1"/>
+          </a:lnRef>
+          <a:fillRef idx="0">
+            <a:schemeClr val="accent1"/>
+          </a:fillRef>
+          <a:effectRef idx="0">
+            <a:schemeClr val="accent1"/>
+          </a:effectRef>
+          <a:fontRef idx="minor">
+            <a:schemeClr val="tx1"/>
+          </a:fontRef>
+        </p:style>
+        <p:txBody>
+          <a:bodyPr rtlCol="0" anchor="ctr"/>
+          <a:lstStyle/>
+          <a:p>
+            <a:pPr algn="ctr"/>
+            <a:endParaRPr kumimoji="1" lang="ja-JP" altLang="en-US"/>
+          </a:p>
+        </p:txBody>
+      </p:sp>
+      <p:sp>
+        <p:nvSpPr>
+          <p:cNvPr id="127" name="正方形/長方形 126">
+            <a:extLst>
+              <a:ext uri="{FF2B5EF4-FFF2-40B4-BE49-F238E27FC236}">
+                <a16:creationId xmlns:a16="http://schemas.microsoft.com/office/drawing/2014/main" id="{F7C105EC-963A-CE80-4A5E-248C8602BF5C}"/>
+              </a:ext>
+            </a:extLst>
+          </p:cNvPr>
+          <p:cNvSpPr/>
+          <p:nvPr/>
+        </p:nvSpPr>
+        <p:spPr>
           <a:xfrm>
-            <a:off x="777184" y="-14890"/>
-            <a:ext cx="4184438" cy="2565597"/>
-            <a:chOff x="777184" y="-14890"/>
-            <a:chExt cx="4184438" cy="2565597"/>
-          </a:xfrm>
-        </p:grpSpPr>
-        <p:sp>
-          <p:nvSpPr>
-            <p:cNvPr id="46" name="円弧 45">
-              <a:extLst>
-                <a:ext uri="{FF2B5EF4-FFF2-40B4-BE49-F238E27FC236}">
-                  <a16:creationId xmlns:a16="http://schemas.microsoft.com/office/drawing/2014/main" id="{CDFAAA52-066E-B9A3-51F4-19238CF1FEEE}"/>
-                </a:ext>
-              </a:extLst>
-            </p:cNvPr>
-            <p:cNvSpPr/>
-            <p:nvPr/>
-          </p:nvSpPr>
-          <p:spPr>
-            <a:xfrm rot="2959031">
-              <a:off x="2658879" y="578968"/>
-              <a:ext cx="224568" cy="106317"/>
-            </a:xfrm>
-            <a:prstGeom prst="arc">
-              <a:avLst/>
-            </a:prstGeom>
-            <a:ln w="12700">
+            <a:off x="1583796" y="963707"/>
+            <a:ext cx="168146" cy="82550"/>
+          </a:xfrm>
+          <a:prstGeom prst="rect">
+            <a:avLst/>
+          </a:prstGeom>
+          <a:solidFill>
+            <a:schemeClr val="bg1"/>
+          </a:solidFill>
+          <a:ln>
+            <a:noFill/>
+          </a:ln>
+        </p:spPr>
+        <p:style>
+          <a:lnRef idx="2">
+            <a:schemeClr val="accent1">
+              <a:shade val="15000"/>
+            </a:schemeClr>
+          </a:lnRef>
+          <a:fillRef idx="1">
+            <a:schemeClr val="accent1"/>
+          </a:fillRef>
+          <a:effectRef idx="0">
+            <a:schemeClr val="accent1"/>
+          </a:effectRef>
+          <a:fontRef idx="minor">
+            <a:schemeClr val="lt1"/>
+          </a:fontRef>
+        </p:style>
+        <p:txBody>
+          <a:bodyPr rtlCol="0" anchor="ctr"/>
+          <a:lstStyle/>
+          <a:p>
+            <a:pPr algn="ctr"/>
+            <a:endParaRPr kumimoji="1" lang="ja-JP" altLang="en-US"/>
+          </a:p>
+        </p:txBody>
+      </p:sp>
+      <p:sp>
+        <p:nvSpPr>
+          <p:cNvPr id="119" name="テキスト ボックス 118">
+            <a:extLst>
+              <a:ext uri="{FF2B5EF4-FFF2-40B4-BE49-F238E27FC236}">
+                <a16:creationId xmlns:a16="http://schemas.microsoft.com/office/drawing/2014/main" id="{46BB6CC3-E9FF-34E4-D1FC-C00F676976C9}"/>
+              </a:ext>
+            </a:extLst>
+          </p:cNvPr>
+          <p:cNvSpPr txBox="1"/>
+          <p:nvPr/>
+        </p:nvSpPr>
+        <p:spPr>
+          <a:xfrm>
+            <a:off x="1476038" y="1418117"/>
+            <a:ext cx="312906" cy="369332"/>
+          </a:xfrm>
+          <a:prstGeom prst="rect">
+            <a:avLst/>
+          </a:prstGeom>
+          <a:noFill/>
+        </p:spPr>
+        <p:txBody>
+          <a:bodyPr wrap="none" rtlCol="0">
+            <a:spAutoFit/>
+          </a:bodyPr>
+          <a:lstStyle/>
+          <a:p>
+            <a:r>
+              <a:rPr kumimoji="1" lang="en-US" altLang="ja-JP" dirty="0"/>
+              <a:t>a</a:t>
+            </a:r>
+            <a:endParaRPr kumimoji="1" lang="ja-JP" altLang="en-US" dirty="0"/>
+          </a:p>
+        </p:txBody>
+      </p:sp>
+      <p:sp>
+        <p:nvSpPr>
+          <p:cNvPr id="118" name="円弧 117">
+            <a:extLst>
+              <a:ext uri="{FF2B5EF4-FFF2-40B4-BE49-F238E27FC236}">
+                <a16:creationId xmlns:a16="http://schemas.microsoft.com/office/drawing/2014/main" id="{4F279B67-CC55-07E3-CC54-638BDCAE0989}"/>
+              </a:ext>
+            </a:extLst>
+          </p:cNvPr>
+          <p:cNvSpPr/>
+          <p:nvPr/>
+        </p:nvSpPr>
+        <p:spPr>
+          <a:xfrm rot="20753738">
+            <a:off x="1439186" y="1737951"/>
+            <a:ext cx="224568" cy="106317"/>
+          </a:xfrm>
+          <a:prstGeom prst="arc">
+            <a:avLst/>
+          </a:prstGeom>
+          <a:ln w="12700">
+            <a:solidFill>
+              <a:schemeClr val="tx1"/>
+            </a:solidFill>
+          </a:ln>
+        </p:spPr>
+        <p:style>
+          <a:lnRef idx="1">
+            <a:schemeClr val="accent1"/>
+          </a:lnRef>
+          <a:fillRef idx="0">
+            <a:schemeClr val="accent1"/>
+          </a:fillRef>
+          <a:effectRef idx="0">
+            <a:schemeClr val="accent1"/>
+          </a:effectRef>
+          <a:fontRef idx="minor">
+            <a:schemeClr val="tx1"/>
+          </a:fontRef>
+        </p:style>
+        <p:txBody>
+          <a:bodyPr rtlCol="0" anchor="ctr"/>
+          <a:lstStyle/>
+          <a:p>
+            <a:pPr algn="ctr"/>
+            <a:endParaRPr kumimoji="1" lang="ja-JP" altLang="en-US"/>
+          </a:p>
+        </p:txBody>
+      </p:sp>
+      <p:cxnSp>
+        <p:nvCxnSpPr>
+          <p:cNvPr id="109" name="直線コネクタ 108">
+            <a:extLst>
+              <a:ext uri="{FF2B5EF4-FFF2-40B4-BE49-F238E27FC236}">
+                <a16:creationId xmlns:a16="http://schemas.microsoft.com/office/drawing/2014/main" id="{EC026B41-78D0-411D-79C7-97EE0C90911C}"/>
+              </a:ext>
+            </a:extLst>
+          </p:cNvPr>
+          <p:cNvCxnSpPr>
+            <a:cxnSpLocks/>
+            <a:endCxn id="103" idx="2"/>
+          </p:cNvCxnSpPr>
+          <p:nvPr/>
+        </p:nvCxnSpPr>
+        <p:spPr>
+          <a:xfrm>
+            <a:off x="996640" y="2054395"/>
+            <a:ext cx="512636" cy="1"/>
+          </a:xfrm>
+          <a:prstGeom prst="line">
+            <a:avLst/>
+          </a:prstGeom>
+          <a:ln w="38100">
+            <a:solidFill>
+              <a:schemeClr val="tx1"/>
+            </a:solidFill>
+          </a:ln>
+        </p:spPr>
+        <p:style>
+          <a:lnRef idx="1">
+            <a:schemeClr val="accent1"/>
+          </a:lnRef>
+          <a:fillRef idx="0">
+            <a:schemeClr val="accent1"/>
+          </a:fillRef>
+          <a:effectRef idx="0">
+            <a:schemeClr val="accent1"/>
+          </a:effectRef>
+          <a:fontRef idx="minor">
+            <a:schemeClr val="tx1"/>
+          </a:fontRef>
+        </p:style>
+      </p:cxnSp>
+      <p:cxnSp>
+        <p:nvCxnSpPr>
+          <p:cNvPr id="39" name="直線矢印コネクタ 38">
+            <a:extLst>
+              <a:ext uri="{FF2B5EF4-FFF2-40B4-BE49-F238E27FC236}">
+                <a16:creationId xmlns:a16="http://schemas.microsoft.com/office/drawing/2014/main" id="{C10FB7F5-95DB-4091-9F86-07289FDE7BFE}"/>
+              </a:ext>
+            </a:extLst>
+          </p:cNvPr>
+          <p:cNvCxnSpPr>
+            <a:cxnSpLocks/>
+          </p:cNvCxnSpPr>
+          <p:nvPr/>
+        </p:nvCxnSpPr>
+        <p:spPr>
+          <a:xfrm>
+            <a:off x="1542553" y="2054398"/>
+            <a:ext cx="3255493" cy="0"/>
+          </a:xfrm>
+          <a:prstGeom prst="straightConnector1">
+            <a:avLst/>
+          </a:prstGeom>
+          <a:ln w="38100">
+            <a:solidFill>
+              <a:schemeClr val="tx1"/>
+            </a:solidFill>
+            <a:tailEnd type="triangle"/>
+          </a:ln>
+        </p:spPr>
+        <p:style>
+          <a:lnRef idx="1">
+            <a:schemeClr val="accent1"/>
+          </a:lnRef>
+          <a:fillRef idx="0">
+            <a:schemeClr val="accent1"/>
+          </a:fillRef>
+          <a:effectRef idx="0">
+            <a:schemeClr val="accent1"/>
+          </a:effectRef>
+          <a:fontRef idx="minor">
+            <a:schemeClr val="tx1"/>
+          </a:fontRef>
+        </p:style>
+      </p:cxnSp>
+      <p:cxnSp>
+        <p:nvCxnSpPr>
+          <p:cNvPr id="37" name="直線矢印コネクタ 36">
+            <a:extLst>
+              <a:ext uri="{FF2B5EF4-FFF2-40B4-BE49-F238E27FC236}">
+                <a16:creationId xmlns:a16="http://schemas.microsoft.com/office/drawing/2014/main" id="{CAAFC54A-973B-3C3F-BA22-0BBA53A6CDB7}"/>
+              </a:ext>
+            </a:extLst>
+          </p:cNvPr>
+          <p:cNvCxnSpPr>
+            <a:cxnSpLocks/>
+            <a:stCxn id="57" idx="0"/>
+          </p:cNvCxnSpPr>
+          <p:nvPr/>
+        </p:nvCxnSpPr>
+        <p:spPr>
+          <a:xfrm flipV="1">
+            <a:off x="1542545" y="127000"/>
+            <a:ext cx="8" cy="2156612"/>
+          </a:xfrm>
+          <a:prstGeom prst="straightConnector1">
+            <a:avLst/>
+          </a:prstGeom>
+          <a:ln w="38100">
+            <a:solidFill>
+              <a:schemeClr val="tx1"/>
+            </a:solidFill>
+            <a:tailEnd type="triangle"/>
+          </a:ln>
+        </p:spPr>
+        <p:style>
+          <a:lnRef idx="1">
+            <a:schemeClr val="accent1"/>
+          </a:lnRef>
+          <a:fillRef idx="0">
+            <a:schemeClr val="accent1"/>
+          </a:fillRef>
+          <a:effectRef idx="0">
+            <a:schemeClr val="accent1"/>
+          </a:effectRef>
+          <a:fontRef idx="minor">
+            <a:schemeClr val="tx1"/>
+          </a:fontRef>
+        </p:style>
+      </p:cxnSp>
+      <p:sp>
+        <p:nvSpPr>
+          <p:cNvPr id="103" name="楕円 102">
+            <a:extLst>
+              <a:ext uri="{FF2B5EF4-FFF2-40B4-BE49-F238E27FC236}">
+                <a16:creationId xmlns:a16="http://schemas.microsoft.com/office/drawing/2014/main" id="{B9161C5D-EBFA-BBC0-F39B-28A1AEDA1AD0}"/>
+              </a:ext>
+            </a:extLst>
+          </p:cNvPr>
+          <p:cNvSpPr/>
+          <p:nvPr/>
+        </p:nvSpPr>
+        <p:spPr>
+          <a:xfrm>
+            <a:off x="1509276" y="2020166"/>
+            <a:ext cx="66531" cy="68459"/>
+          </a:xfrm>
+          <a:prstGeom prst="ellipse">
+            <a:avLst/>
+          </a:prstGeom>
+          <a:solidFill>
+            <a:schemeClr val="tx1"/>
+          </a:solidFill>
+          <a:ln>
+            <a:solidFill>
+              <a:schemeClr val="bg1">
+                <a:lumMod val="65000"/>
+              </a:schemeClr>
+            </a:solidFill>
+          </a:ln>
+        </p:spPr>
+        <p:style>
+          <a:lnRef idx="2">
+            <a:schemeClr val="accent1">
+              <a:shade val="15000"/>
+            </a:schemeClr>
+          </a:lnRef>
+          <a:fillRef idx="1">
+            <a:schemeClr val="accent1"/>
+          </a:fillRef>
+          <a:effectRef idx="0">
+            <a:schemeClr val="accent1"/>
+          </a:effectRef>
+          <a:fontRef idx="minor">
+            <a:schemeClr val="lt1"/>
+          </a:fontRef>
+        </p:style>
+        <p:txBody>
+          <a:bodyPr rtlCol="0" anchor="ctr"/>
+          <a:lstStyle/>
+          <a:p>
+            <a:pPr algn="ctr"/>
+            <a:endParaRPr kumimoji="1" lang="ja-JP" altLang="en-US" dirty="0">
               <a:solidFill>
                 <a:schemeClr val="tx1"/>
               </a:solidFill>
-            </a:ln>
-          </p:spPr>
-          <p:style>
-            <a:lnRef idx="1">
-              <a:schemeClr val="accent1"/>
-            </a:lnRef>
-            <a:fillRef idx="0">
-              <a:schemeClr val="accent1"/>
-            </a:fillRef>
-            <a:effectRef idx="0">
-              <a:schemeClr val="accent1"/>
-            </a:effectRef>
-            <a:fontRef idx="minor">
-              <a:schemeClr val="tx1"/>
-            </a:fontRef>
-          </p:style>
-          <p:txBody>
-            <a:bodyPr rtlCol="0" anchor="ctr"/>
-            <a:lstStyle/>
-            <a:p>
-              <a:pPr algn="ctr"/>
-              <a:endParaRPr kumimoji="1" lang="ja-JP" altLang="en-US"/>
-            </a:p>
-          </p:txBody>
-        </p:sp>
-        <p:cxnSp>
-          <p:nvCxnSpPr>
-            <p:cNvPr id="198" name="直線コネクタ 197">
-              <a:extLst>
-                <a:ext uri="{FF2B5EF4-FFF2-40B4-BE49-F238E27FC236}">
-                  <a16:creationId xmlns:a16="http://schemas.microsoft.com/office/drawing/2014/main" id="{12A5AE85-41A3-23AE-CACD-F192BA112E45}"/>
-                </a:ext>
-              </a:extLst>
-            </p:cNvPr>
-            <p:cNvCxnSpPr>
-              <a:cxnSpLocks/>
-              <a:stCxn id="194" idx="0"/>
-              <a:endCxn id="102" idx="2"/>
-            </p:cNvCxnSpPr>
-            <p:nvPr/>
-          </p:nvCxnSpPr>
-          <p:spPr>
-            <a:xfrm flipV="1">
-              <a:off x="873688" y="714274"/>
-              <a:ext cx="635588" cy="5903"/>
-            </a:xfrm>
-            <a:prstGeom prst="line">
-              <a:avLst/>
-            </a:prstGeom>
-            <a:ln w="19050">
-              <a:solidFill>
-                <a:srgbClr val="8FAADC"/>
-              </a:solidFill>
-            </a:ln>
-          </p:spPr>
-          <p:style>
-            <a:lnRef idx="1">
-              <a:schemeClr val="accent1"/>
-            </a:lnRef>
-            <a:fillRef idx="0">
-              <a:schemeClr val="accent1"/>
-            </a:fillRef>
-            <a:effectRef idx="0">
-              <a:schemeClr val="accent1"/>
-            </a:effectRef>
-            <a:fontRef idx="minor">
-              <a:schemeClr val="tx1"/>
-            </a:fontRef>
-          </p:style>
-        </p:cxnSp>
-        <p:cxnSp>
-          <p:nvCxnSpPr>
-            <p:cNvPr id="200" name="直線コネクタ 199">
-              <a:extLst>
-                <a:ext uri="{FF2B5EF4-FFF2-40B4-BE49-F238E27FC236}">
-                  <a16:creationId xmlns:a16="http://schemas.microsoft.com/office/drawing/2014/main" id="{181237A6-AEBB-97CC-5BF2-A15C22B168F3}"/>
-                </a:ext>
-              </a:extLst>
-            </p:cNvPr>
-            <p:cNvCxnSpPr>
-              <a:cxnSpLocks/>
-              <a:endCxn id="102" idx="6"/>
-            </p:cNvCxnSpPr>
-            <p:nvPr/>
-          </p:nvCxnSpPr>
-          <p:spPr>
-            <a:xfrm flipH="1" flipV="1">
-              <a:off x="1575807" y="714274"/>
-              <a:ext cx="638141" cy="3567"/>
-            </a:xfrm>
-            <a:prstGeom prst="line">
-              <a:avLst/>
-            </a:prstGeom>
-            <a:ln w="19050">
-              <a:solidFill>
-                <a:srgbClr val="8FAADC"/>
-              </a:solidFill>
-            </a:ln>
-          </p:spPr>
-          <p:style>
-            <a:lnRef idx="1">
-              <a:schemeClr val="accent1"/>
-            </a:lnRef>
-            <a:fillRef idx="0">
-              <a:schemeClr val="accent1"/>
-            </a:fillRef>
-            <a:effectRef idx="0">
-              <a:schemeClr val="accent1"/>
-            </a:effectRef>
-            <a:fontRef idx="minor">
-              <a:schemeClr val="tx1"/>
-            </a:fontRef>
-          </p:style>
-        </p:cxnSp>
-        <p:sp>
-          <p:nvSpPr>
-            <p:cNvPr id="180" name="円弧 179">
-              <a:extLst>
-                <a:ext uri="{FF2B5EF4-FFF2-40B4-BE49-F238E27FC236}">
-                  <a16:creationId xmlns:a16="http://schemas.microsoft.com/office/drawing/2014/main" id="{4C1D95AC-4EA8-5B50-3AF6-CCE381440845}"/>
-                </a:ext>
-              </a:extLst>
-            </p:cNvPr>
-            <p:cNvSpPr/>
-            <p:nvPr/>
-          </p:nvSpPr>
-          <p:spPr>
-            <a:xfrm rot="7642928">
-              <a:off x="1498360" y="689874"/>
-              <a:ext cx="224568" cy="106317"/>
-            </a:xfrm>
-            <a:prstGeom prst="arc">
-              <a:avLst/>
-            </a:prstGeom>
-            <a:ln w="12700">
-              <a:solidFill>
-                <a:schemeClr val="tx1"/>
-              </a:solidFill>
-            </a:ln>
-          </p:spPr>
-          <p:style>
-            <a:lnRef idx="1">
-              <a:schemeClr val="accent1"/>
-            </a:lnRef>
-            <a:fillRef idx="0">
-              <a:schemeClr val="accent1"/>
-            </a:fillRef>
-            <a:effectRef idx="0">
-              <a:schemeClr val="accent1"/>
-            </a:effectRef>
-            <a:fontRef idx="minor">
-              <a:schemeClr val="tx1"/>
-            </a:fontRef>
-          </p:style>
-          <p:txBody>
-            <a:bodyPr rtlCol="0" anchor="ctr"/>
-            <a:lstStyle/>
-            <a:p>
-              <a:pPr algn="ctr"/>
-              <a:endParaRPr kumimoji="1" lang="ja-JP" altLang="en-US"/>
-            </a:p>
-          </p:txBody>
-        </p:sp>
-        <p:sp>
-          <p:nvSpPr>
-            <p:cNvPr id="127" name="正方形/長方形 126">
-              <a:extLst>
-                <a:ext uri="{FF2B5EF4-FFF2-40B4-BE49-F238E27FC236}">
-                  <a16:creationId xmlns:a16="http://schemas.microsoft.com/office/drawing/2014/main" id="{F7C105EC-963A-CE80-4A5E-248C8602BF5C}"/>
-                </a:ext>
-              </a:extLst>
-            </p:cNvPr>
-            <p:cNvSpPr/>
-            <p:nvPr/>
-          </p:nvSpPr>
-          <p:spPr>
-            <a:xfrm>
-              <a:off x="1583796" y="963707"/>
-              <a:ext cx="168146" cy="82550"/>
-            </a:xfrm>
-            <a:prstGeom prst="rect">
-              <a:avLst/>
-            </a:prstGeom>
-            <a:solidFill>
-              <a:schemeClr val="bg1"/>
-            </a:solidFill>
-            <a:ln>
-              <a:noFill/>
-            </a:ln>
-          </p:spPr>
-          <p:style>
-            <a:lnRef idx="2">
-              <a:schemeClr val="accent1">
-                <a:shade val="15000"/>
-              </a:schemeClr>
-            </a:lnRef>
-            <a:fillRef idx="1">
-              <a:schemeClr val="accent1"/>
-            </a:fillRef>
-            <a:effectRef idx="0">
-              <a:schemeClr val="accent1"/>
-            </a:effectRef>
-            <a:fontRef idx="minor">
-              <a:schemeClr val="lt1"/>
-            </a:fontRef>
-          </p:style>
-          <p:txBody>
-            <a:bodyPr rtlCol="0" anchor="ctr"/>
-            <a:lstStyle/>
-            <a:p>
-              <a:pPr algn="ctr"/>
-              <a:endParaRPr kumimoji="1" lang="ja-JP" altLang="en-US"/>
-            </a:p>
-          </p:txBody>
-        </p:sp>
-        <p:sp>
-          <p:nvSpPr>
-            <p:cNvPr id="119" name="テキスト ボックス 118">
-              <a:extLst>
-                <a:ext uri="{FF2B5EF4-FFF2-40B4-BE49-F238E27FC236}">
-                  <a16:creationId xmlns:a16="http://schemas.microsoft.com/office/drawing/2014/main" id="{46BB6CC3-E9FF-34E4-D1FC-C00F676976C9}"/>
-                </a:ext>
-              </a:extLst>
-            </p:cNvPr>
-            <p:cNvSpPr txBox="1"/>
-            <p:nvPr/>
-          </p:nvSpPr>
-          <p:spPr>
-            <a:xfrm>
-              <a:off x="1476038" y="1418117"/>
-              <a:ext cx="312906" cy="369332"/>
-            </a:xfrm>
-            <a:prstGeom prst="rect">
-              <a:avLst/>
-            </a:prstGeom>
-            <a:noFill/>
-          </p:spPr>
-          <p:txBody>
-            <a:bodyPr wrap="none" rtlCol="0">
-              <a:spAutoFit/>
-            </a:bodyPr>
-            <a:lstStyle/>
-            <a:p>
-              <a:r>
-                <a:rPr kumimoji="1" lang="en-US" altLang="ja-JP" dirty="0"/>
-                <a:t>a</a:t>
-              </a:r>
-              <a:endParaRPr kumimoji="1" lang="ja-JP" altLang="en-US" dirty="0"/>
-            </a:p>
-          </p:txBody>
-        </p:sp>
-        <p:sp>
-          <p:nvSpPr>
-            <p:cNvPr id="118" name="円弧 117">
-              <a:extLst>
-                <a:ext uri="{FF2B5EF4-FFF2-40B4-BE49-F238E27FC236}">
-                  <a16:creationId xmlns:a16="http://schemas.microsoft.com/office/drawing/2014/main" id="{4F279B67-CC55-07E3-CC54-638BDCAE0989}"/>
-                </a:ext>
-              </a:extLst>
-            </p:cNvPr>
-            <p:cNvSpPr/>
-            <p:nvPr/>
-          </p:nvSpPr>
-          <p:spPr>
-            <a:xfrm rot="20753738">
-              <a:off x="1439186" y="1737951"/>
-              <a:ext cx="224568" cy="106317"/>
-            </a:xfrm>
-            <a:prstGeom prst="arc">
-              <a:avLst/>
-            </a:prstGeom>
-            <a:ln w="12700">
-              <a:solidFill>
-                <a:schemeClr val="tx1"/>
-              </a:solidFill>
-            </a:ln>
-          </p:spPr>
-          <p:style>
-            <a:lnRef idx="1">
-              <a:schemeClr val="accent1"/>
-            </a:lnRef>
-            <a:fillRef idx="0">
-              <a:schemeClr val="accent1"/>
-            </a:fillRef>
-            <a:effectRef idx="0">
-              <a:schemeClr val="accent1"/>
-            </a:effectRef>
-            <a:fontRef idx="minor">
-              <a:schemeClr val="tx1"/>
-            </a:fontRef>
-          </p:style>
-          <p:txBody>
-            <a:bodyPr rtlCol="0" anchor="ctr"/>
-            <a:lstStyle/>
-            <a:p>
-              <a:pPr algn="ctr"/>
-              <a:endParaRPr kumimoji="1" lang="ja-JP" altLang="en-US"/>
-            </a:p>
-          </p:txBody>
-        </p:sp>
-        <p:cxnSp>
-          <p:nvCxnSpPr>
-            <p:cNvPr id="109" name="直線コネクタ 108">
-              <a:extLst>
-                <a:ext uri="{FF2B5EF4-FFF2-40B4-BE49-F238E27FC236}">
-                  <a16:creationId xmlns:a16="http://schemas.microsoft.com/office/drawing/2014/main" id="{EC026B41-78D0-411D-79C7-97EE0C90911C}"/>
-                </a:ext>
-              </a:extLst>
-            </p:cNvPr>
-            <p:cNvCxnSpPr>
-              <a:cxnSpLocks/>
-              <a:endCxn id="103" idx="2"/>
-            </p:cNvCxnSpPr>
-            <p:nvPr/>
-          </p:nvCxnSpPr>
-          <p:spPr>
-            <a:xfrm>
-              <a:off x="996640" y="2054395"/>
-              <a:ext cx="512636" cy="1"/>
-            </a:xfrm>
-            <a:prstGeom prst="line">
-              <a:avLst/>
-            </a:prstGeom>
-            <a:ln w="38100">
-              <a:solidFill>
-                <a:schemeClr val="tx1"/>
-              </a:solidFill>
-            </a:ln>
-          </p:spPr>
-          <p:style>
-            <a:lnRef idx="1">
-              <a:schemeClr val="accent1"/>
-            </a:lnRef>
-            <a:fillRef idx="0">
-              <a:schemeClr val="accent1"/>
-            </a:fillRef>
-            <a:effectRef idx="0">
-              <a:schemeClr val="accent1"/>
-            </a:effectRef>
-            <a:fontRef idx="minor">
-              <a:schemeClr val="tx1"/>
-            </a:fontRef>
-          </p:style>
-        </p:cxnSp>
-        <p:cxnSp>
-          <p:nvCxnSpPr>
-            <p:cNvPr id="39" name="直線矢印コネクタ 38">
-              <a:extLst>
-                <a:ext uri="{FF2B5EF4-FFF2-40B4-BE49-F238E27FC236}">
-                  <a16:creationId xmlns:a16="http://schemas.microsoft.com/office/drawing/2014/main" id="{C10FB7F5-95DB-4091-9F86-07289FDE7BFE}"/>
-                </a:ext>
-              </a:extLst>
-            </p:cNvPr>
-            <p:cNvCxnSpPr>
-              <a:cxnSpLocks/>
-            </p:cNvCxnSpPr>
-            <p:nvPr/>
-          </p:nvCxnSpPr>
-          <p:spPr>
-            <a:xfrm>
-              <a:off x="1542553" y="2054398"/>
-              <a:ext cx="3255493" cy="0"/>
-            </a:xfrm>
-            <a:prstGeom prst="straightConnector1">
-              <a:avLst/>
-            </a:prstGeom>
-            <a:ln w="38100">
-              <a:solidFill>
-                <a:schemeClr val="tx1"/>
-              </a:solidFill>
-              <a:tailEnd type="triangle"/>
-            </a:ln>
-          </p:spPr>
-          <p:style>
-            <a:lnRef idx="1">
-              <a:schemeClr val="accent1"/>
-            </a:lnRef>
-            <a:fillRef idx="0">
-              <a:schemeClr val="accent1"/>
-            </a:fillRef>
-            <a:effectRef idx="0">
-              <a:schemeClr val="accent1"/>
-            </a:effectRef>
-            <a:fontRef idx="minor">
-              <a:schemeClr val="tx1"/>
-            </a:fontRef>
-          </p:style>
-        </p:cxnSp>
-        <p:cxnSp>
-          <p:nvCxnSpPr>
-            <p:cNvPr id="37" name="直線矢印コネクタ 36">
-              <a:extLst>
-                <a:ext uri="{FF2B5EF4-FFF2-40B4-BE49-F238E27FC236}">
-                  <a16:creationId xmlns:a16="http://schemas.microsoft.com/office/drawing/2014/main" id="{CAAFC54A-973B-3C3F-BA22-0BBA53A6CDB7}"/>
-                </a:ext>
-              </a:extLst>
-            </p:cNvPr>
-            <p:cNvCxnSpPr>
-              <a:cxnSpLocks/>
-              <a:stCxn id="57" idx="0"/>
-            </p:cNvCxnSpPr>
-            <p:nvPr/>
-          </p:nvCxnSpPr>
-          <p:spPr>
-            <a:xfrm flipV="1">
-              <a:off x="1542545" y="127000"/>
-              <a:ext cx="8" cy="2156612"/>
-            </a:xfrm>
-            <a:prstGeom prst="straightConnector1">
-              <a:avLst/>
-            </a:prstGeom>
-            <a:ln w="38100">
-              <a:solidFill>
-                <a:schemeClr val="tx1"/>
-              </a:solidFill>
-              <a:tailEnd type="triangle"/>
-            </a:ln>
-          </p:spPr>
-          <p:style>
-            <a:lnRef idx="1">
-              <a:schemeClr val="accent1"/>
-            </a:lnRef>
-            <a:fillRef idx="0">
-              <a:schemeClr val="accent1"/>
-            </a:fillRef>
-            <a:effectRef idx="0">
-              <a:schemeClr val="accent1"/>
-            </a:effectRef>
-            <a:fontRef idx="minor">
-              <a:schemeClr val="tx1"/>
-            </a:fontRef>
-          </p:style>
-        </p:cxnSp>
-        <p:sp>
-          <p:nvSpPr>
-            <p:cNvPr id="103" name="楕円 102">
-              <a:extLst>
-                <a:ext uri="{FF2B5EF4-FFF2-40B4-BE49-F238E27FC236}">
-                  <a16:creationId xmlns:a16="http://schemas.microsoft.com/office/drawing/2014/main" id="{B9161C5D-EBFA-BBC0-F39B-28A1AEDA1AD0}"/>
-                </a:ext>
-              </a:extLst>
-            </p:cNvPr>
-            <p:cNvSpPr/>
-            <p:nvPr/>
-          </p:nvSpPr>
-          <p:spPr>
-            <a:xfrm>
-              <a:off x="1509276" y="2020166"/>
-              <a:ext cx="66531" cy="68459"/>
-            </a:xfrm>
-            <a:prstGeom prst="ellipse">
-              <a:avLst/>
-            </a:prstGeom>
-            <a:solidFill>
-              <a:schemeClr val="tx1"/>
-            </a:solidFill>
-            <a:ln>
-              <a:solidFill>
-                <a:schemeClr val="bg1">
-                  <a:lumMod val="65000"/>
-                </a:schemeClr>
-              </a:solidFill>
-            </a:ln>
-          </p:spPr>
-          <p:style>
-            <a:lnRef idx="2">
-              <a:schemeClr val="accent1">
-                <a:shade val="15000"/>
-              </a:schemeClr>
-            </a:lnRef>
-            <a:fillRef idx="1">
-              <a:schemeClr val="accent1"/>
-            </a:fillRef>
-            <a:effectRef idx="0">
-              <a:schemeClr val="accent1"/>
-            </a:effectRef>
-            <a:fontRef idx="minor">
-              <a:schemeClr val="lt1"/>
-            </a:fontRef>
-          </p:style>
-          <p:txBody>
-            <a:bodyPr rtlCol="0" anchor="ctr"/>
-            <a:lstStyle/>
-            <a:p>
-              <a:pPr algn="ctr"/>
-              <a:endParaRPr kumimoji="1" lang="ja-JP" altLang="en-US" dirty="0">
-                <a:solidFill>
-                  <a:schemeClr val="tx1"/>
-                </a:solidFill>
-              </a:endParaRPr>
-            </a:p>
-          </p:txBody>
-        </p:sp>
-        <p:sp>
-          <p:nvSpPr>
-            <p:cNvPr id="41" name="テキスト ボックス 40">
-              <a:extLst>
-                <a:ext uri="{FF2B5EF4-FFF2-40B4-BE49-F238E27FC236}">
-                  <a16:creationId xmlns:a16="http://schemas.microsoft.com/office/drawing/2014/main" id="{AB5A65E5-D1CE-5AD5-25E5-9B8A399E8B12}"/>
-                </a:ext>
-              </a:extLst>
-            </p:cNvPr>
-            <p:cNvSpPr txBox="1"/>
-            <p:nvPr/>
-          </p:nvSpPr>
-          <p:spPr>
-            <a:xfrm>
-              <a:off x="4653524" y="2007265"/>
-              <a:ext cx="308098" cy="369332"/>
-            </a:xfrm>
-            <a:prstGeom prst="rect">
-              <a:avLst/>
-            </a:prstGeom>
-            <a:noFill/>
-          </p:spPr>
-          <p:txBody>
-            <a:bodyPr wrap="none" rtlCol="0">
-              <a:spAutoFit/>
-            </a:bodyPr>
-            <a:lstStyle/>
-            <a:p>
-              <a:r>
-                <a:rPr kumimoji="1" lang="en-US" altLang="ja-JP" b="1" dirty="0"/>
-                <a:t>x</a:t>
-              </a:r>
-              <a:endParaRPr kumimoji="1" lang="ja-JP" altLang="en-US" b="1" dirty="0"/>
-            </a:p>
-          </p:txBody>
-        </p:sp>
-        <p:sp>
-          <p:nvSpPr>
-            <p:cNvPr id="42" name="テキスト ボックス 41">
-              <a:extLst>
-                <a:ext uri="{FF2B5EF4-FFF2-40B4-BE49-F238E27FC236}">
-                  <a16:creationId xmlns:a16="http://schemas.microsoft.com/office/drawing/2014/main" id="{10A2D836-8E21-CB8C-E746-F8FC169A1428}"/>
-                </a:ext>
-              </a:extLst>
-            </p:cNvPr>
-            <p:cNvSpPr txBox="1"/>
-            <p:nvPr/>
-          </p:nvSpPr>
-          <p:spPr>
-            <a:xfrm>
-              <a:off x="1234454" y="-14890"/>
-              <a:ext cx="308098" cy="369332"/>
-            </a:xfrm>
-            <a:prstGeom prst="rect">
-              <a:avLst/>
-            </a:prstGeom>
-            <a:noFill/>
-          </p:spPr>
-          <p:txBody>
-            <a:bodyPr wrap="none" rtlCol="0">
-              <a:spAutoFit/>
-            </a:bodyPr>
-            <a:lstStyle/>
-            <a:p>
-              <a:r>
-                <a:rPr lang="en-US" altLang="ja-JP" b="1" dirty="0"/>
-                <a:t>y</a:t>
-              </a:r>
-              <a:endParaRPr kumimoji="1" lang="ja-JP" altLang="en-US" b="1" dirty="0"/>
-            </a:p>
-          </p:txBody>
-        </p:sp>
-        <p:sp>
-          <p:nvSpPr>
-            <p:cNvPr id="56" name="テキスト ボックス 55">
-              <a:extLst>
-                <a:ext uri="{FF2B5EF4-FFF2-40B4-BE49-F238E27FC236}">
-                  <a16:creationId xmlns:a16="http://schemas.microsoft.com/office/drawing/2014/main" id="{C95CBEB4-8C09-A3AF-5942-4FD4FA916502}"/>
-                </a:ext>
-              </a:extLst>
-            </p:cNvPr>
-            <p:cNvSpPr txBox="1"/>
-            <p:nvPr/>
-          </p:nvSpPr>
-          <p:spPr>
-            <a:xfrm>
-              <a:off x="3311123" y="249077"/>
-              <a:ext cx="1119217" cy="461665"/>
-            </a:xfrm>
-            <a:prstGeom prst="rect">
-              <a:avLst/>
-            </a:prstGeom>
-            <a:noFill/>
-          </p:spPr>
-          <p:txBody>
-            <a:bodyPr wrap="none" rtlCol="0">
-              <a:spAutoFit/>
-            </a:bodyPr>
-            <a:lstStyle/>
-            <a:p>
-              <a:r>
-                <a:rPr kumimoji="1" lang="ja-JP" altLang="en-US" sz="1200" dirty="0">
-                  <a:solidFill>
-                    <a:schemeClr val="bg1"/>
-                  </a:solidFill>
-                  <a:highlight>
-                    <a:srgbClr val="FF0000"/>
-                  </a:highlight>
-                </a:rPr>
-                <a:t>接線</a:t>
-              </a:r>
-              <a:endParaRPr kumimoji="1" lang="en-US" altLang="ja-JP" sz="1200" dirty="0">
+            </a:endParaRPr>
+          </a:p>
+        </p:txBody>
+      </p:sp>
+      <p:sp>
+        <p:nvSpPr>
+          <p:cNvPr id="41" name="テキスト ボックス 40">
+            <a:extLst>
+              <a:ext uri="{FF2B5EF4-FFF2-40B4-BE49-F238E27FC236}">
+                <a16:creationId xmlns:a16="http://schemas.microsoft.com/office/drawing/2014/main" id="{AB5A65E5-D1CE-5AD5-25E5-9B8A399E8B12}"/>
+              </a:ext>
+            </a:extLst>
+          </p:cNvPr>
+          <p:cNvSpPr txBox="1"/>
+          <p:nvPr/>
+        </p:nvSpPr>
+        <p:spPr>
+          <a:xfrm>
+            <a:off x="4653524" y="2007265"/>
+            <a:ext cx="308098" cy="369332"/>
+          </a:xfrm>
+          <a:prstGeom prst="rect">
+            <a:avLst/>
+          </a:prstGeom>
+          <a:noFill/>
+        </p:spPr>
+        <p:txBody>
+          <a:bodyPr wrap="none" rtlCol="0">
+            <a:spAutoFit/>
+          </a:bodyPr>
+          <a:lstStyle/>
+          <a:p>
+            <a:r>
+              <a:rPr kumimoji="1" lang="en-US" altLang="ja-JP" b="1" dirty="0"/>
+              <a:t>x</a:t>
+            </a:r>
+            <a:endParaRPr kumimoji="1" lang="ja-JP" altLang="en-US" b="1" dirty="0"/>
+          </a:p>
+        </p:txBody>
+      </p:sp>
+      <p:sp>
+        <p:nvSpPr>
+          <p:cNvPr id="42" name="テキスト ボックス 41">
+            <a:extLst>
+              <a:ext uri="{FF2B5EF4-FFF2-40B4-BE49-F238E27FC236}">
+                <a16:creationId xmlns:a16="http://schemas.microsoft.com/office/drawing/2014/main" id="{10A2D836-8E21-CB8C-E746-F8FC169A1428}"/>
+              </a:ext>
+            </a:extLst>
+          </p:cNvPr>
+          <p:cNvSpPr txBox="1"/>
+          <p:nvPr/>
+        </p:nvSpPr>
+        <p:spPr>
+          <a:xfrm>
+            <a:off x="1234454" y="-14890"/>
+            <a:ext cx="308098" cy="369332"/>
+          </a:xfrm>
+          <a:prstGeom prst="rect">
+            <a:avLst/>
+          </a:prstGeom>
+          <a:noFill/>
+        </p:spPr>
+        <p:txBody>
+          <a:bodyPr wrap="none" rtlCol="0">
+            <a:spAutoFit/>
+          </a:bodyPr>
+          <a:lstStyle/>
+          <a:p>
+            <a:r>
+              <a:rPr lang="en-US" altLang="ja-JP" b="1" dirty="0"/>
+              <a:t>y</a:t>
+            </a:r>
+            <a:endParaRPr kumimoji="1" lang="ja-JP" altLang="en-US" b="1" dirty="0"/>
+          </a:p>
+        </p:txBody>
+      </p:sp>
+      <p:sp>
+        <p:nvSpPr>
+          <p:cNvPr id="56" name="テキスト ボックス 55">
+            <a:extLst>
+              <a:ext uri="{FF2B5EF4-FFF2-40B4-BE49-F238E27FC236}">
+                <a16:creationId xmlns:a16="http://schemas.microsoft.com/office/drawing/2014/main" id="{C95CBEB4-8C09-A3AF-5942-4FD4FA916502}"/>
+              </a:ext>
+            </a:extLst>
+          </p:cNvPr>
+          <p:cNvSpPr txBox="1"/>
+          <p:nvPr/>
+        </p:nvSpPr>
+        <p:spPr>
+          <a:xfrm>
+            <a:off x="3311123" y="249077"/>
+            <a:ext cx="1119217" cy="461665"/>
+          </a:xfrm>
+          <a:prstGeom prst="rect">
+            <a:avLst/>
+          </a:prstGeom>
+          <a:noFill/>
+        </p:spPr>
+        <p:txBody>
+          <a:bodyPr wrap="none" rtlCol="0">
+            <a:spAutoFit/>
+          </a:bodyPr>
+          <a:lstStyle/>
+          <a:p>
+            <a:r>
+              <a:rPr kumimoji="1" lang="ja-JP" altLang="en-US" sz="1200" dirty="0">
                 <a:solidFill>
                   <a:schemeClr val="bg1"/>
                 </a:solidFill>
                 <a:highlight>
                   <a:srgbClr val="FF0000"/>
                 </a:highlight>
-              </a:endParaRPr>
-            </a:p>
-            <a:p>
-              <a:r>
-                <a:rPr kumimoji="1" lang="ja-JP" altLang="en-US" sz="1200" dirty="0"/>
-                <a:t>→傾き</a:t>
-              </a:r>
-              <a:r>
-                <a:rPr kumimoji="1" lang="en-US" altLang="ja-JP" sz="1200" dirty="0"/>
-                <a:t>:tan(c)</a:t>
-              </a:r>
-              <a:endParaRPr kumimoji="1" lang="ja-JP" altLang="en-US" sz="1200" dirty="0"/>
-            </a:p>
-          </p:txBody>
-        </p:sp>
-        <p:sp>
-          <p:nvSpPr>
-            <p:cNvPr id="57" name="矢印: 下 56">
-              <a:extLst>
-                <a:ext uri="{FF2B5EF4-FFF2-40B4-BE49-F238E27FC236}">
-                  <a16:creationId xmlns:a16="http://schemas.microsoft.com/office/drawing/2014/main" id="{1F9813DB-BBF9-31AE-D695-AA8D03B19327}"/>
-                </a:ext>
-              </a:extLst>
-            </p:cNvPr>
-            <p:cNvSpPr/>
-            <p:nvPr/>
-          </p:nvSpPr>
-          <p:spPr>
-            <a:xfrm rot="10800000">
-              <a:off x="1411746" y="2054397"/>
-              <a:ext cx="261599" cy="229215"/>
-            </a:xfrm>
-            <a:prstGeom prst="downArrow">
-              <a:avLst/>
-            </a:prstGeom>
+              </a:rPr>
+              <a:t>接線</a:t>
+            </a:r>
+            <a:endParaRPr kumimoji="1" lang="en-US" altLang="ja-JP" sz="1200" dirty="0">
+              <a:solidFill>
+                <a:schemeClr val="bg1"/>
+              </a:solidFill>
+              <a:highlight>
+                <a:srgbClr val="FF0000"/>
+              </a:highlight>
+            </a:endParaRPr>
+          </a:p>
+          <a:p>
+            <a:r>
+              <a:rPr kumimoji="1" lang="ja-JP" altLang="en-US" sz="1200" dirty="0"/>
+              <a:t>→傾き</a:t>
+            </a:r>
+            <a:r>
+              <a:rPr kumimoji="1" lang="en-US" altLang="ja-JP" sz="1200" dirty="0"/>
+              <a:t>:tan(c)</a:t>
+            </a:r>
+            <a:endParaRPr kumimoji="1" lang="ja-JP" altLang="en-US" sz="1200" dirty="0"/>
+          </a:p>
+        </p:txBody>
+      </p:sp>
+      <p:sp>
+        <p:nvSpPr>
+          <p:cNvPr id="57" name="矢印: 下 56">
+            <a:extLst>
+              <a:ext uri="{FF2B5EF4-FFF2-40B4-BE49-F238E27FC236}">
+                <a16:creationId xmlns:a16="http://schemas.microsoft.com/office/drawing/2014/main" id="{1F9813DB-BBF9-31AE-D695-AA8D03B19327}"/>
+              </a:ext>
+            </a:extLst>
+          </p:cNvPr>
+          <p:cNvSpPr/>
+          <p:nvPr/>
+        </p:nvSpPr>
+        <p:spPr>
+          <a:xfrm rot="10800000">
+            <a:off x="1411746" y="2054397"/>
+            <a:ext cx="261599" cy="229215"/>
+          </a:xfrm>
+          <a:prstGeom prst="downArrow">
+            <a:avLst/>
+          </a:prstGeom>
+          <a:solidFill>
+            <a:schemeClr val="accent6">
+              <a:lumMod val="60000"/>
+              <a:lumOff val="40000"/>
+            </a:schemeClr>
+          </a:solidFill>
+          <a:ln>
             <a:solidFill>
               <a:schemeClr val="accent6">
+                <a:lumMod val="75000"/>
+              </a:schemeClr>
+            </a:solidFill>
+          </a:ln>
+        </p:spPr>
+        <p:style>
+          <a:lnRef idx="2">
+            <a:schemeClr val="accent1">
+              <a:shade val="15000"/>
+            </a:schemeClr>
+          </a:lnRef>
+          <a:fillRef idx="1">
+            <a:schemeClr val="accent1"/>
+          </a:fillRef>
+          <a:effectRef idx="0">
+            <a:schemeClr val="accent1"/>
+          </a:effectRef>
+          <a:fontRef idx="minor">
+            <a:schemeClr val="lt1"/>
+          </a:fontRef>
+        </p:style>
+        <p:txBody>
+          <a:bodyPr rtlCol="0" anchor="ctr"/>
+          <a:lstStyle/>
+          <a:p>
+            <a:pPr algn="ctr"/>
+            <a:endParaRPr kumimoji="1" lang="ja-JP" altLang="en-US"/>
+          </a:p>
+        </p:txBody>
+      </p:sp>
+      <p:sp>
+        <p:nvSpPr>
+          <p:cNvPr id="58" name="テキスト ボックス 57">
+            <a:extLst>
+              <a:ext uri="{FF2B5EF4-FFF2-40B4-BE49-F238E27FC236}">
+                <a16:creationId xmlns:a16="http://schemas.microsoft.com/office/drawing/2014/main" id="{931E0D26-2F2F-D8EA-8EE4-F59B53FC243A}"/>
+              </a:ext>
+            </a:extLst>
+          </p:cNvPr>
+          <p:cNvSpPr txBox="1"/>
+          <p:nvPr/>
+        </p:nvSpPr>
+        <p:spPr>
+          <a:xfrm>
+            <a:off x="1218850" y="2273708"/>
+            <a:ext cx="646331" cy="276999"/>
+          </a:xfrm>
+          <a:prstGeom prst="rect">
+            <a:avLst/>
+          </a:prstGeom>
+          <a:noFill/>
+        </p:spPr>
+        <p:txBody>
+          <a:bodyPr wrap="none" rtlCol="0">
+            <a:spAutoFit/>
+          </a:bodyPr>
+          <a:lstStyle/>
+          <a:p>
+            <a:r>
+              <a:rPr kumimoji="1" lang="ja-JP" altLang="en-US" sz="1200" dirty="0">
+                <a:highlight>
+                  <a:srgbClr val="00FF00"/>
+                </a:highlight>
+              </a:rPr>
+              <a:t>カメラ</a:t>
+            </a:r>
+          </a:p>
+        </p:txBody>
+      </p:sp>
+      <p:cxnSp>
+        <p:nvCxnSpPr>
+          <p:cNvPr id="70" name="直線矢印コネクタ 69">
+            <a:extLst>
+              <a:ext uri="{FF2B5EF4-FFF2-40B4-BE49-F238E27FC236}">
+                <a16:creationId xmlns:a16="http://schemas.microsoft.com/office/drawing/2014/main" id="{21E2516D-E78F-6912-2D3F-905D9A991BE8}"/>
+              </a:ext>
+            </a:extLst>
+          </p:cNvPr>
+          <p:cNvCxnSpPr>
+            <a:cxnSpLocks/>
+          </p:cNvCxnSpPr>
+          <p:nvPr/>
+        </p:nvCxnSpPr>
+        <p:spPr>
+          <a:xfrm>
+            <a:off x="1537282" y="713048"/>
+            <a:ext cx="2665735" cy="1307118"/>
+          </a:xfrm>
+          <a:prstGeom prst="straightConnector1">
+            <a:avLst/>
+          </a:prstGeom>
+          <a:ln w="28575">
+            <a:solidFill>
+              <a:schemeClr val="accent4">
                 <a:lumMod val="60000"/>
                 <a:lumOff val="40000"/>
               </a:schemeClr>
             </a:solidFill>
-            <a:ln>
+            <a:tailEnd type="triangle"/>
+          </a:ln>
+        </p:spPr>
+        <p:style>
+          <a:lnRef idx="1">
+            <a:schemeClr val="accent1"/>
+          </a:lnRef>
+          <a:fillRef idx="0">
+            <a:schemeClr val="accent1"/>
+          </a:fillRef>
+          <a:effectRef idx="0">
+            <a:schemeClr val="accent1"/>
+          </a:effectRef>
+          <a:fontRef idx="minor">
+            <a:schemeClr val="tx1"/>
+          </a:fontRef>
+        </p:style>
+      </p:cxnSp>
+      <p:sp>
+        <p:nvSpPr>
+          <p:cNvPr id="89" name="楕円 88">
+            <a:extLst>
+              <a:ext uri="{FF2B5EF4-FFF2-40B4-BE49-F238E27FC236}">
+                <a16:creationId xmlns:a16="http://schemas.microsoft.com/office/drawing/2014/main" id="{3CBEE743-8C5D-59C8-3E4C-479B915AC25C}"/>
+              </a:ext>
+            </a:extLst>
+          </p:cNvPr>
+          <p:cNvSpPr/>
+          <p:nvPr/>
+        </p:nvSpPr>
+        <p:spPr>
+          <a:xfrm>
+            <a:off x="2139450" y="923137"/>
+            <a:ext cx="53535" cy="53931"/>
+          </a:xfrm>
+          <a:prstGeom prst="ellipse">
+            <a:avLst/>
+          </a:prstGeom>
+          <a:solidFill>
+            <a:srgbClr val="7030A0"/>
+          </a:solidFill>
+          <a:ln>
+            <a:noFill/>
+          </a:ln>
+        </p:spPr>
+        <p:style>
+          <a:lnRef idx="2">
+            <a:schemeClr val="accent1">
+              <a:shade val="15000"/>
+            </a:schemeClr>
+          </a:lnRef>
+          <a:fillRef idx="1">
+            <a:schemeClr val="accent1"/>
+          </a:fillRef>
+          <a:effectRef idx="0">
+            <a:schemeClr val="accent1"/>
+          </a:effectRef>
+          <a:fontRef idx="minor">
+            <a:schemeClr val="lt1"/>
+          </a:fontRef>
+        </p:style>
+        <p:txBody>
+          <a:bodyPr rtlCol="0" anchor="ctr"/>
+          <a:lstStyle/>
+          <a:p>
+            <a:pPr algn="ctr"/>
+            <a:endParaRPr kumimoji="1" lang="ja-JP" altLang="en-US" dirty="0">
               <a:solidFill>
-                <a:schemeClr val="accent6">
-                  <a:lumMod val="75000"/>
-                </a:schemeClr>
+                <a:schemeClr val="tx1"/>
               </a:solidFill>
-            </a:ln>
-          </p:spPr>
-          <p:style>
-            <a:lnRef idx="2">
-              <a:schemeClr val="accent1">
-                <a:shade val="15000"/>
+            </a:endParaRPr>
+          </a:p>
+        </p:txBody>
+      </p:sp>
+      <p:sp>
+        <p:nvSpPr>
+          <p:cNvPr id="90" name="楕円 89">
+            <a:extLst>
+              <a:ext uri="{FF2B5EF4-FFF2-40B4-BE49-F238E27FC236}">
+                <a16:creationId xmlns:a16="http://schemas.microsoft.com/office/drawing/2014/main" id="{36323DDA-C3F1-5AAF-9906-6ADDEF119500}"/>
+              </a:ext>
+            </a:extLst>
+          </p:cNvPr>
+          <p:cNvSpPr/>
+          <p:nvPr/>
+        </p:nvSpPr>
+        <p:spPr>
+          <a:xfrm>
+            <a:off x="1836908" y="1050261"/>
+            <a:ext cx="53535" cy="53931"/>
+          </a:xfrm>
+          <a:prstGeom prst="ellipse">
+            <a:avLst/>
+          </a:prstGeom>
+          <a:solidFill>
+            <a:srgbClr val="7030A0"/>
+          </a:solidFill>
+          <a:ln>
+            <a:noFill/>
+          </a:ln>
+        </p:spPr>
+        <p:style>
+          <a:lnRef idx="2">
+            <a:schemeClr val="accent1">
+              <a:shade val="15000"/>
+            </a:schemeClr>
+          </a:lnRef>
+          <a:fillRef idx="1">
+            <a:schemeClr val="accent1"/>
+          </a:fillRef>
+          <a:effectRef idx="0">
+            <a:schemeClr val="accent1"/>
+          </a:effectRef>
+          <a:fontRef idx="minor">
+            <a:schemeClr val="lt1"/>
+          </a:fontRef>
+        </p:style>
+        <p:txBody>
+          <a:bodyPr rtlCol="0" anchor="ctr"/>
+          <a:lstStyle/>
+          <a:p>
+            <a:pPr algn="ctr"/>
+            <a:endParaRPr kumimoji="1" lang="ja-JP" altLang="en-US" dirty="0">
+              <a:solidFill>
+                <a:schemeClr val="tx1"/>
+              </a:solidFill>
+            </a:endParaRPr>
+          </a:p>
+        </p:txBody>
+      </p:sp>
+      <p:sp>
+        <p:nvSpPr>
+          <p:cNvPr id="102" name="楕円 101">
+            <a:extLst>
+              <a:ext uri="{FF2B5EF4-FFF2-40B4-BE49-F238E27FC236}">
+                <a16:creationId xmlns:a16="http://schemas.microsoft.com/office/drawing/2014/main" id="{74CF8013-DE4A-1A14-0686-57F4867B1F53}"/>
+              </a:ext>
+            </a:extLst>
+          </p:cNvPr>
+          <p:cNvSpPr/>
+          <p:nvPr/>
+        </p:nvSpPr>
+        <p:spPr>
+          <a:xfrm>
+            <a:off x="1509276" y="679701"/>
+            <a:ext cx="66531" cy="69146"/>
+          </a:xfrm>
+          <a:prstGeom prst="ellipse">
+            <a:avLst/>
+          </a:prstGeom>
+          <a:solidFill>
+            <a:schemeClr val="tx1"/>
+          </a:solidFill>
+          <a:ln>
+            <a:solidFill>
+              <a:schemeClr val="bg1">
+                <a:lumMod val="65000"/>
               </a:schemeClr>
-            </a:lnRef>
-            <a:fillRef idx="1">
-              <a:schemeClr val="accent1"/>
-            </a:fillRef>
-            <a:effectRef idx="0">
-              <a:schemeClr val="accent1"/>
-            </a:effectRef>
-            <a:fontRef idx="minor">
-              <a:schemeClr val="lt1"/>
-            </a:fontRef>
-          </p:style>
-          <p:txBody>
-            <a:bodyPr rtlCol="0" anchor="ctr"/>
-            <a:lstStyle/>
-            <a:p>
-              <a:pPr algn="ctr"/>
-              <a:endParaRPr kumimoji="1" lang="ja-JP" altLang="en-US"/>
-            </a:p>
-          </p:txBody>
-        </p:sp>
-        <p:sp>
-          <p:nvSpPr>
-            <p:cNvPr id="58" name="テキスト ボックス 57">
-              <a:extLst>
-                <a:ext uri="{FF2B5EF4-FFF2-40B4-BE49-F238E27FC236}">
-                  <a16:creationId xmlns:a16="http://schemas.microsoft.com/office/drawing/2014/main" id="{931E0D26-2F2F-D8EA-8EE4-F59B53FC243A}"/>
-                </a:ext>
-              </a:extLst>
-            </p:cNvPr>
-            <p:cNvSpPr txBox="1"/>
-            <p:nvPr/>
-          </p:nvSpPr>
-          <p:spPr>
-            <a:xfrm>
-              <a:off x="1218850" y="2273708"/>
-              <a:ext cx="646331" cy="276999"/>
-            </a:xfrm>
-            <a:prstGeom prst="rect">
-              <a:avLst/>
-            </a:prstGeom>
-            <a:noFill/>
-          </p:spPr>
-          <p:txBody>
-            <a:bodyPr wrap="none" rtlCol="0">
-              <a:spAutoFit/>
-            </a:bodyPr>
-            <a:lstStyle/>
-            <a:p>
-              <a:r>
-                <a:rPr kumimoji="1" lang="ja-JP" altLang="en-US" sz="1200" dirty="0">
-                  <a:highlight>
-                    <a:srgbClr val="00FF00"/>
-                  </a:highlight>
-                </a:rPr>
-                <a:t>カメラ</a:t>
-              </a:r>
-            </a:p>
-          </p:txBody>
-        </p:sp>
-        <p:cxnSp>
-          <p:nvCxnSpPr>
-            <p:cNvPr id="70" name="直線矢印コネクタ 69">
-              <a:extLst>
-                <a:ext uri="{FF2B5EF4-FFF2-40B4-BE49-F238E27FC236}">
-                  <a16:creationId xmlns:a16="http://schemas.microsoft.com/office/drawing/2014/main" id="{21E2516D-E78F-6912-2D3F-905D9A991BE8}"/>
-                </a:ext>
-              </a:extLst>
-            </p:cNvPr>
-            <p:cNvCxnSpPr>
-              <a:cxnSpLocks/>
-            </p:cNvCxnSpPr>
-            <p:nvPr/>
-          </p:nvCxnSpPr>
-          <p:spPr>
-            <a:xfrm>
-              <a:off x="1537282" y="713048"/>
-              <a:ext cx="2665735" cy="1307118"/>
-            </a:xfrm>
-            <a:prstGeom prst="straightConnector1">
-              <a:avLst/>
-            </a:prstGeom>
-            <a:ln w="28575">
+            </a:solidFill>
+          </a:ln>
+        </p:spPr>
+        <p:style>
+          <a:lnRef idx="2">
+            <a:schemeClr val="accent1">
+              <a:shade val="15000"/>
+            </a:schemeClr>
+          </a:lnRef>
+          <a:fillRef idx="1">
+            <a:schemeClr val="accent1"/>
+          </a:fillRef>
+          <a:effectRef idx="0">
+            <a:schemeClr val="accent1"/>
+          </a:effectRef>
+          <a:fontRef idx="minor">
+            <a:schemeClr val="lt1"/>
+          </a:fontRef>
+        </p:style>
+        <p:txBody>
+          <a:bodyPr rtlCol="0" anchor="ctr"/>
+          <a:lstStyle/>
+          <a:p>
+            <a:pPr algn="ctr"/>
+            <a:endParaRPr kumimoji="1" lang="ja-JP" altLang="en-US">
               <a:solidFill>
-                <a:schemeClr val="accent4">
-                  <a:lumMod val="60000"/>
-                  <a:lumOff val="40000"/>
-                </a:schemeClr>
+                <a:schemeClr val="tx1"/>
               </a:solidFill>
-              <a:tailEnd type="triangle"/>
-            </a:ln>
-          </p:spPr>
-          <p:style>
-            <a:lnRef idx="1">
-              <a:schemeClr val="accent1"/>
-            </a:lnRef>
-            <a:fillRef idx="0">
-              <a:schemeClr val="accent1"/>
-            </a:fillRef>
-            <a:effectRef idx="0">
-              <a:schemeClr val="accent1"/>
-            </a:effectRef>
-            <a:fontRef idx="minor">
-              <a:schemeClr val="tx1"/>
-            </a:fontRef>
-          </p:style>
-        </p:cxnSp>
-        <p:sp>
-          <p:nvSpPr>
-            <p:cNvPr id="89" name="楕円 88">
-              <a:extLst>
-                <a:ext uri="{FF2B5EF4-FFF2-40B4-BE49-F238E27FC236}">
-                  <a16:creationId xmlns:a16="http://schemas.microsoft.com/office/drawing/2014/main" id="{3CBEE743-8C5D-59C8-3E4C-479B915AC25C}"/>
-                </a:ext>
-              </a:extLst>
-            </p:cNvPr>
-            <p:cNvSpPr/>
-            <p:nvPr/>
-          </p:nvSpPr>
-          <p:spPr>
-            <a:xfrm>
-              <a:off x="2139450" y="923137"/>
-              <a:ext cx="53535" cy="53931"/>
-            </a:xfrm>
-            <a:prstGeom prst="ellipse">
-              <a:avLst/>
-            </a:prstGeom>
-            <a:solidFill>
-              <a:srgbClr val="7030A0"/>
-            </a:solidFill>
-            <a:ln>
-              <a:noFill/>
-            </a:ln>
-          </p:spPr>
-          <p:style>
-            <a:lnRef idx="2">
-              <a:schemeClr val="accent1">
-                <a:shade val="15000"/>
-              </a:schemeClr>
-            </a:lnRef>
-            <a:fillRef idx="1">
-              <a:schemeClr val="accent1"/>
-            </a:fillRef>
-            <a:effectRef idx="0">
-              <a:schemeClr val="accent1"/>
-            </a:effectRef>
-            <a:fontRef idx="minor">
-              <a:schemeClr val="lt1"/>
-            </a:fontRef>
-          </p:style>
-          <p:txBody>
-            <a:bodyPr rtlCol="0" anchor="ctr"/>
-            <a:lstStyle/>
-            <a:p>
-              <a:pPr algn="ctr"/>
-              <a:endParaRPr kumimoji="1" lang="ja-JP" altLang="en-US" dirty="0">
-                <a:solidFill>
-                  <a:schemeClr val="tx1"/>
-                </a:solidFill>
-              </a:endParaRPr>
-            </a:p>
-          </p:txBody>
-        </p:sp>
-        <p:sp>
-          <p:nvSpPr>
-            <p:cNvPr id="90" name="楕円 89">
-              <a:extLst>
-                <a:ext uri="{FF2B5EF4-FFF2-40B4-BE49-F238E27FC236}">
-                  <a16:creationId xmlns:a16="http://schemas.microsoft.com/office/drawing/2014/main" id="{36323DDA-C3F1-5AAF-9906-6ADDEF119500}"/>
-                </a:ext>
-              </a:extLst>
-            </p:cNvPr>
-            <p:cNvSpPr/>
-            <p:nvPr/>
-          </p:nvSpPr>
-          <p:spPr>
-            <a:xfrm>
-              <a:off x="1836908" y="1050261"/>
-              <a:ext cx="53535" cy="53931"/>
-            </a:xfrm>
-            <a:prstGeom prst="ellipse">
-              <a:avLst/>
-            </a:prstGeom>
-            <a:solidFill>
-              <a:srgbClr val="7030A0"/>
-            </a:solidFill>
-            <a:ln>
-              <a:noFill/>
-            </a:ln>
-          </p:spPr>
-          <p:style>
-            <a:lnRef idx="2">
-              <a:schemeClr val="accent1">
-                <a:shade val="15000"/>
-              </a:schemeClr>
-            </a:lnRef>
-            <a:fillRef idx="1">
-              <a:schemeClr val="accent1"/>
-            </a:fillRef>
-            <a:effectRef idx="0">
-              <a:schemeClr val="accent1"/>
-            </a:effectRef>
-            <a:fontRef idx="minor">
-              <a:schemeClr val="lt1"/>
-            </a:fontRef>
-          </p:style>
-          <p:txBody>
-            <a:bodyPr rtlCol="0" anchor="ctr"/>
-            <a:lstStyle/>
-            <a:p>
-              <a:pPr algn="ctr"/>
-              <a:endParaRPr kumimoji="1" lang="ja-JP" altLang="en-US" dirty="0">
-                <a:solidFill>
-                  <a:schemeClr val="tx1"/>
-                </a:solidFill>
-              </a:endParaRPr>
-            </a:p>
-          </p:txBody>
-        </p:sp>
-        <p:sp>
-          <p:nvSpPr>
-            <p:cNvPr id="102" name="楕円 101">
-              <a:extLst>
-                <a:ext uri="{FF2B5EF4-FFF2-40B4-BE49-F238E27FC236}">
-                  <a16:creationId xmlns:a16="http://schemas.microsoft.com/office/drawing/2014/main" id="{74CF8013-DE4A-1A14-0686-57F4867B1F53}"/>
-                </a:ext>
-              </a:extLst>
-            </p:cNvPr>
-            <p:cNvSpPr/>
-            <p:nvPr/>
-          </p:nvSpPr>
-          <p:spPr>
-            <a:xfrm>
-              <a:off x="1509276" y="679701"/>
-              <a:ext cx="66531" cy="69146"/>
-            </a:xfrm>
-            <a:prstGeom prst="ellipse">
-              <a:avLst/>
-            </a:prstGeom>
+            </a:endParaRPr>
+          </a:p>
+        </p:txBody>
+      </p:sp>
+      <p:cxnSp>
+        <p:nvCxnSpPr>
+          <p:cNvPr id="113" name="直線矢印コネクタ 112">
+            <a:extLst>
+              <a:ext uri="{FF2B5EF4-FFF2-40B4-BE49-F238E27FC236}">
+                <a16:creationId xmlns:a16="http://schemas.microsoft.com/office/drawing/2014/main" id="{ABD1FB18-F6D5-A5BB-F1F4-72C3F546683C}"/>
+              </a:ext>
+            </a:extLst>
+          </p:cNvPr>
+          <p:cNvCxnSpPr>
+            <a:cxnSpLocks/>
+          </p:cNvCxnSpPr>
+          <p:nvPr/>
+        </p:nvCxnSpPr>
+        <p:spPr>
+          <a:xfrm>
+            <a:off x="1338263" y="722407"/>
+            <a:ext cx="0" cy="1316333"/>
+          </a:xfrm>
+          <a:prstGeom prst="straightConnector1">
+            <a:avLst/>
+          </a:prstGeom>
+          <a:ln>
             <a:solidFill>
               <a:schemeClr val="tx1"/>
             </a:solidFill>
-            <a:ln>
-              <a:solidFill>
-                <a:schemeClr val="bg1">
-                  <a:lumMod val="65000"/>
-                </a:schemeClr>
-              </a:solidFill>
-            </a:ln>
-          </p:spPr>
-          <p:style>
-            <a:lnRef idx="2">
+            <a:headEnd type="triangle"/>
+            <a:tailEnd type="triangle"/>
+          </a:ln>
+        </p:spPr>
+        <p:style>
+          <a:lnRef idx="1">
+            <a:schemeClr val="accent1"/>
+          </a:lnRef>
+          <a:fillRef idx="0">
+            <a:schemeClr val="accent1"/>
+          </a:fillRef>
+          <a:effectRef idx="0">
+            <a:schemeClr val="accent1"/>
+          </a:effectRef>
+          <a:fontRef idx="minor">
+            <a:schemeClr val="tx1"/>
+          </a:fontRef>
+        </p:style>
+      </p:cxnSp>
+      <p:sp>
+        <p:nvSpPr>
+          <p:cNvPr id="116" name="テキスト ボックス 115">
+            <a:extLst>
+              <a:ext uri="{FF2B5EF4-FFF2-40B4-BE49-F238E27FC236}">
+                <a16:creationId xmlns:a16="http://schemas.microsoft.com/office/drawing/2014/main" id="{2A1BDD4E-3F88-F0C2-B7B5-4B560E55EFED}"/>
+              </a:ext>
+            </a:extLst>
+          </p:cNvPr>
+          <p:cNvSpPr txBox="1"/>
+          <p:nvPr/>
+        </p:nvSpPr>
+        <p:spPr>
+          <a:xfrm>
+            <a:off x="1104629" y="1195907"/>
+            <a:ext cx="319318" cy="369332"/>
+          </a:xfrm>
+          <a:prstGeom prst="rect">
+            <a:avLst/>
+          </a:prstGeom>
+          <a:noFill/>
+        </p:spPr>
+        <p:txBody>
+          <a:bodyPr wrap="none" rtlCol="0">
+            <a:spAutoFit/>
+          </a:bodyPr>
+          <a:lstStyle/>
+          <a:p>
+            <a:r>
+              <a:rPr lang="en-US" altLang="ja-JP" dirty="0"/>
+              <a:t>h</a:t>
+            </a:r>
+            <a:endParaRPr kumimoji="1" lang="ja-JP" altLang="en-US" dirty="0"/>
+          </a:p>
+        </p:txBody>
+      </p:sp>
+      <p:sp>
+        <p:nvSpPr>
+          <p:cNvPr id="117" name="テキスト ボックス 116">
+            <a:extLst>
+              <a:ext uri="{FF2B5EF4-FFF2-40B4-BE49-F238E27FC236}">
+                <a16:creationId xmlns:a16="http://schemas.microsoft.com/office/drawing/2014/main" id="{7F8891BC-787D-9260-8122-2E6D1608106B}"/>
+              </a:ext>
+            </a:extLst>
+          </p:cNvPr>
+          <p:cNvSpPr txBox="1"/>
+          <p:nvPr/>
+        </p:nvSpPr>
+        <p:spPr>
+          <a:xfrm>
+            <a:off x="777184" y="453663"/>
+            <a:ext cx="646331" cy="276999"/>
+          </a:xfrm>
+          <a:prstGeom prst="rect">
+            <a:avLst/>
+          </a:prstGeom>
+          <a:noFill/>
+        </p:spPr>
+        <p:txBody>
+          <a:bodyPr wrap="none" rtlCol="0">
+            <a:spAutoFit/>
+          </a:bodyPr>
+          <a:lstStyle/>
+          <a:p>
+            <a:r>
+              <a:rPr lang="ja-JP" altLang="en-US" sz="1200" dirty="0">
+                <a:highlight>
+                  <a:srgbClr val="8FAADC"/>
+                </a:highlight>
+              </a:rPr>
+              <a:t>ミラー</a:t>
+            </a:r>
+            <a:endParaRPr kumimoji="1" lang="ja-JP" altLang="en-US" sz="1200" dirty="0">
+              <a:highlight>
+                <a:srgbClr val="8FAADC"/>
+              </a:highlight>
+            </a:endParaRPr>
+          </a:p>
+        </p:txBody>
+      </p:sp>
+      <p:cxnSp>
+        <p:nvCxnSpPr>
+          <p:cNvPr id="64" name="直線矢印コネクタ 63">
+            <a:extLst>
+              <a:ext uri="{FF2B5EF4-FFF2-40B4-BE49-F238E27FC236}">
+                <a16:creationId xmlns:a16="http://schemas.microsoft.com/office/drawing/2014/main" id="{99C81A06-036C-0BE7-A1AD-2055C107F808}"/>
+              </a:ext>
+            </a:extLst>
+          </p:cNvPr>
+          <p:cNvCxnSpPr>
+            <a:cxnSpLocks/>
+            <a:stCxn id="57" idx="2"/>
+          </p:cNvCxnSpPr>
+          <p:nvPr/>
+        </p:nvCxnSpPr>
+        <p:spPr>
+          <a:xfrm flipV="1">
+            <a:off x="1542545" y="955090"/>
+            <a:ext cx="454655" cy="1099307"/>
+          </a:xfrm>
+          <a:prstGeom prst="straightConnector1">
+            <a:avLst/>
+          </a:prstGeom>
+          <a:ln w="28575">
+            <a:solidFill>
+              <a:schemeClr val="accent4">
+                <a:lumMod val="60000"/>
+                <a:lumOff val="40000"/>
+              </a:schemeClr>
+            </a:solidFill>
+            <a:tailEnd type="triangle"/>
+          </a:ln>
+        </p:spPr>
+        <p:style>
+          <a:lnRef idx="1">
+            <a:schemeClr val="accent1"/>
+          </a:lnRef>
+          <a:fillRef idx="0">
+            <a:schemeClr val="accent1"/>
+          </a:fillRef>
+          <a:effectRef idx="0">
+            <a:schemeClr val="accent1"/>
+          </a:effectRef>
+          <a:fontRef idx="minor">
+            <a:schemeClr val="tx1"/>
+          </a:fontRef>
+        </p:style>
+      </p:cxnSp>
+      <p:sp>
+        <p:nvSpPr>
+          <p:cNvPr id="181" name="テキスト ボックス 180">
+            <a:extLst>
+              <a:ext uri="{FF2B5EF4-FFF2-40B4-BE49-F238E27FC236}">
+                <a16:creationId xmlns:a16="http://schemas.microsoft.com/office/drawing/2014/main" id="{D50351CF-FC15-6467-F5AF-4B4D51A6D085}"/>
+              </a:ext>
+            </a:extLst>
+          </p:cNvPr>
+          <p:cNvSpPr txBox="1"/>
+          <p:nvPr/>
+        </p:nvSpPr>
+        <p:spPr>
+          <a:xfrm>
+            <a:off x="1506723" y="751928"/>
+            <a:ext cx="319318" cy="369332"/>
+          </a:xfrm>
+          <a:prstGeom prst="rect">
+            <a:avLst/>
+          </a:prstGeom>
+          <a:noFill/>
+        </p:spPr>
+        <p:txBody>
+          <a:bodyPr wrap="none" rtlCol="0">
+            <a:spAutoFit/>
+          </a:bodyPr>
+          <a:lstStyle/>
+          <a:p>
+            <a:r>
+              <a:rPr lang="en-US" altLang="ja-JP" dirty="0"/>
+              <a:t>b</a:t>
+            </a:r>
+            <a:endParaRPr kumimoji="1" lang="ja-JP" altLang="en-US" dirty="0"/>
+          </a:p>
+        </p:txBody>
+      </p:sp>
+      <p:sp>
+        <p:nvSpPr>
+          <p:cNvPr id="194" name="フリーフォーム: 図形 193">
+            <a:extLst>
+              <a:ext uri="{FF2B5EF4-FFF2-40B4-BE49-F238E27FC236}">
+                <a16:creationId xmlns:a16="http://schemas.microsoft.com/office/drawing/2014/main" id="{D0A84184-451E-C0EA-D52B-BC0675955306}"/>
+              </a:ext>
+            </a:extLst>
+          </p:cNvPr>
+          <p:cNvSpPr/>
+          <p:nvPr/>
+        </p:nvSpPr>
+        <p:spPr>
+          <a:xfrm rot="21540000" flipH="1">
+            <a:off x="876609" y="714416"/>
+            <a:ext cx="657225" cy="340518"/>
+          </a:xfrm>
+          <a:custGeom>
+            <a:avLst/>
+            <a:gdLst>
+              <a:gd name="csX0" fmla="*/ 657225 w 657225"/>
+              <a:gd name="csY0" fmla="*/ 0 h 340518"/>
+              <a:gd name="csX1" fmla="*/ 452438 w 657225"/>
+              <a:gd name="csY1" fmla="*/ 228600 h 340518"/>
+              <a:gd name="csX2" fmla="*/ 0 w 657225"/>
+              <a:gd name="csY2" fmla="*/ 340518 h 340518"/>
+            </a:gdLst>
+            <a:ahLst/>
+            <a:cxnLst>
+              <a:cxn ang="0">
+                <a:pos x="csX0" y="csY0"/>
+              </a:cxn>
+              <a:cxn ang="0">
+                <a:pos x="csX1" y="csY1"/>
+              </a:cxn>
+              <a:cxn ang="0">
+                <a:pos x="csX2" y="csY2"/>
+              </a:cxn>
+            </a:cxnLst>
+            <a:rect l="l" t="t" r="r" b="b"/>
+            <a:pathLst>
+              <a:path w="657225" h="340518">
+                <a:moveTo>
+                  <a:pt x="657225" y="0"/>
+                </a:moveTo>
+                <a:cubicBezTo>
+                  <a:pt x="609600" y="85923"/>
+                  <a:pt x="561976" y="171847"/>
+                  <a:pt x="452438" y="228600"/>
+                </a:cubicBezTo>
+                <a:cubicBezTo>
+                  <a:pt x="342900" y="285353"/>
+                  <a:pt x="171450" y="312935"/>
+                  <a:pt x="0" y="340518"/>
+                </a:cubicBezTo>
+              </a:path>
+            </a:pathLst>
+          </a:custGeom>
+          <a:noFill/>
+          <a:ln w="19050">
+            <a:solidFill>
               <a:schemeClr val="accent1">
-                <a:shade val="15000"/>
+                <a:lumMod val="60000"/>
+                <a:lumOff val="40000"/>
               </a:schemeClr>
-            </a:lnRef>
-            <a:fillRef idx="1">
-              <a:schemeClr val="accent1"/>
-            </a:fillRef>
-            <a:effectRef idx="0">
-              <a:schemeClr val="accent1"/>
-            </a:effectRef>
-            <a:fontRef idx="minor">
-              <a:schemeClr val="lt1"/>
-            </a:fontRef>
-          </p:style>
-          <p:txBody>
-            <a:bodyPr rtlCol="0" anchor="ctr"/>
-            <a:lstStyle/>
-            <a:p>
-              <a:pPr algn="ctr"/>
-              <a:endParaRPr kumimoji="1" lang="ja-JP" altLang="en-US">
-                <a:solidFill>
-                  <a:schemeClr val="tx1"/>
-                </a:solidFill>
-              </a:endParaRPr>
-            </a:p>
-          </p:txBody>
-        </p:sp>
-        <p:cxnSp>
-          <p:nvCxnSpPr>
-            <p:cNvPr id="113" name="直線矢印コネクタ 112">
-              <a:extLst>
-                <a:ext uri="{FF2B5EF4-FFF2-40B4-BE49-F238E27FC236}">
-                  <a16:creationId xmlns:a16="http://schemas.microsoft.com/office/drawing/2014/main" id="{ABD1FB18-F6D5-A5BB-F1F4-72C3F546683C}"/>
-                </a:ext>
-              </a:extLst>
-            </p:cNvPr>
-            <p:cNvCxnSpPr>
-              <a:cxnSpLocks/>
-            </p:cNvCxnSpPr>
-            <p:nvPr/>
-          </p:nvCxnSpPr>
-          <p:spPr>
-            <a:xfrm>
-              <a:off x="1338263" y="722407"/>
-              <a:ext cx="0" cy="1316333"/>
-            </a:xfrm>
-            <a:prstGeom prst="straightConnector1">
-              <a:avLst/>
-            </a:prstGeom>
-            <a:ln>
+            </a:solidFill>
+          </a:ln>
+        </p:spPr>
+        <p:style>
+          <a:lnRef idx="2">
+            <a:schemeClr val="accent1">
+              <a:shade val="15000"/>
+            </a:schemeClr>
+          </a:lnRef>
+          <a:fillRef idx="1">
+            <a:schemeClr val="accent1"/>
+          </a:fillRef>
+          <a:effectRef idx="0">
+            <a:schemeClr val="accent1"/>
+          </a:effectRef>
+          <a:fontRef idx="minor">
+            <a:schemeClr val="lt1"/>
+          </a:fontRef>
+        </p:style>
+        <p:txBody>
+          <a:bodyPr rtlCol="0" anchor="ctr"/>
+          <a:lstStyle/>
+          <a:p>
+            <a:pPr algn="ctr"/>
+            <a:endParaRPr kumimoji="1" lang="ja-JP" altLang="en-US" dirty="0"/>
+          </a:p>
+        </p:txBody>
+      </p:sp>
+      <p:sp>
+        <p:nvSpPr>
+          <p:cNvPr id="202" name="フリーフォーム: 図形 201">
+            <a:extLst>
+              <a:ext uri="{FF2B5EF4-FFF2-40B4-BE49-F238E27FC236}">
+                <a16:creationId xmlns:a16="http://schemas.microsoft.com/office/drawing/2014/main" id="{EED629D2-7114-D10B-8E1D-E1746D42A027}"/>
+              </a:ext>
+            </a:extLst>
+          </p:cNvPr>
+          <p:cNvSpPr/>
+          <p:nvPr/>
+        </p:nvSpPr>
+        <p:spPr>
+          <a:xfrm rot="60000">
+            <a:off x="1555285" y="713026"/>
+            <a:ext cx="657225" cy="340518"/>
+          </a:xfrm>
+          <a:custGeom>
+            <a:avLst/>
+            <a:gdLst>
+              <a:gd name="csX0" fmla="*/ 657225 w 657225"/>
+              <a:gd name="csY0" fmla="*/ 0 h 340518"/>
+              <a:gd name="csX1" fmla="*/ 452438 w 657225"/>
+              <a:gd name="csY1" fmla="*/ 228600 h 340518"/>
+              <a:gd name="csX2" fmla="*/ 0 w 657225"/>
+              <a:gd name="csY2" fmla="*/ 340518 h 340518"/>
+            </a:gdLst>
+            <a:ahLst/>
+            <a:cxnLst>
+              <a:cxn ang="0">
+                <a:pos x="csX0" y="csY0"/>
+              </a:cxn>
+              <a:cxn ang="0">
+                <a:pos x="csX1" y="csY1"/>
+              </a:cxn>
+              <a:cxn ang="0">
+                <a:pos x="csX2" y="csY2"/>
+              </a:cxn>
+            </a:cxnLst>
+            <a:rect l="l" t="t" r="r" b="b"/>
+            <a:pathLst>
+              <a:path w="657225" h="340518">
+                <a:moveTo>
+                  <a:pt x="657225" y="0"/>
+                </a:moveTo>
+                <a:cubicBezTo>
+                  <a:pt x="609600" y="85923"/>
+                  <a:pt x="561976" y="171847"/>
+                  <a:pt x="452438" y="228600"/>
+                </a:cubicBezTo>
+                <a:cubicBezTo>
+                  <a:pt x="342900" y="285353"/>
+                  <a:pt x="171450" y="312935"/>
+                  <a:pt x="0" y="340518"/>
+                </a:cubicBezTo>
+              </a:path>
+            </a:pathLst>
+          </a:custGeom>
+          <a:noFill/>
+          <a:ln w="19050">
+            <a:solidFill>
+              <a:schemeClr val="accent1">
+                <a:lumMod val="60000"/>
+                <a:lumOff val="40000"/>
+              </a:schemeClr>
+            </a:solidFill>
+          </a:ln>
+        </p:spPr>
+        <p:style>
+          <a:lnRef idx="2">
+            <a:schemeClr val="accent1">
+              <a:shade val="15000"/>
+            </a:schemeClr>
+          </a:lnRef>
+          <a:fillRef idx="1">
+            <a:schemeClr val="accent1"/>
+          </a:fillRef>
+          <a:effectRef idx="0">
+            <a:schemeClr val="accent1"/>
+          </a:effectRef>
+          <a:fontRef idx="minor">
+            <a:schemeClr val="lt1"/>
+          </a:fontRef>
+        </p:style>
+        <p:txBody>
+          <a:bodyPr rtlCol="0" anchor="ctr"/>
+          <a:lstStyle/>
+          <a:p>
+            <a:pPr algn="ctr"/>
+            <a:endParaRPr kumimoji="1" lang="ja-JP" altLang="en-US" dirty="0"/>
+          </a:p>
+        </p:txBody>
+      </p:sp>
+      <p:cxnSp>
+        <p:nvCxnSpPr>
+          <p:cNvPr id="52" name="直線コネクタ 51">
+            <a:extLst>
+              <a:ext uri="{FF2B5EF4-FFF2-40B4-BE49-F238E27FC236}">
+                <a16:creationId xmlns:a16="http://schemas.microsoft.com/office/drawing/2014/main" id="{C5AA0556-ACCD-4C97-9E30-290C642F3455}"/>
+              </a:ext>
+            </a:extLst>
+          </p:cNvPr>
+          <p:cNvCxnSpPr>
+            <a:cxnSpLocks/>
+          </p:cNvCxnSpPr>
+          <p:nvPr/>
+        </p:nvCxnSpPr>
+        <p:spPr>
+          <a:xfrm flipV="1">
+            <a:off x="1429616" y="361098"/>
+            <a:ext cx="1929067" cy="832637"/>
+          </a:xfrm>
+          <a:prstGeom prst="line">
+            <a:avLst/>
+          </a:prstGeom>
+          <a:ln w="19050">
+            <a:solidFill>
+              <a:srgbClr val="FF0000"/>
+            </a:solidFill>
+          </a:ln>
+        </p:spPr>
+        <p:style>
+          <a:lnRef idx="1">
+            <a:schemeClr val="accent1"/>
+          </a:lnRef>
+          <a:fillRef idx="0">
+            <a:schemeClr val="accent1"/>
+          </a:fillRef>
+          <a:effectRef idx="0">
+            <a:schemeClr val="accent1"/>
+          </a:effectRef>
+          <a:fontRef idx="minor">
+            <a:schemeClr val="tx1"/>
+          </a:fontRef>
+        </p:style>
+      </p:cxnSp>
+      <p:sp>
+        <p:nvSpPr>
+          <p:cNvPr id="207" name="正方形/長方形 206">
+            <a:extLst>
+              <a:ext uri="{FF2B5EF4-FFF2-40B4-BE49-F238E27FC236}">
+                <a16:creationId xmlns:a16="http://schemas.microsoft.com/office/drawing/2014/main" id="{22FF457E-2D82-D768-5182-7DDD3EF63A48}"/>
+              </a:ext>
+            </a:extLst>
+          </p:cNvPr>
+          <p:cNvSpPr/>
+          <p:nvPr/>
+        </p:nvSpPr>
+        <p:spPr>
+          <a:xfrm>
+            <a:off x="4226426" y="1466850"/>
+            <a:ext cx="264612" cy="556835"/>
+          </a:xfrm>
+          <a:prstGeom prst="rect">
+            <a:avLst/>
+          </a:prstGeom>
+        </p:spPr>
+        <p:style>
+          <a:lnRef idx="2">
+            <a:schemeClr val="accent1">
+              <a:shade val="15000"/>
+            </a:schemeClr>
+          </a:lnRef>
+          <a:fillRef idx="1">
+            <a:schemeClr val="accent1"/>
+          </a:fillRef>
+          <a:effectRef idx="0">
+            <a:schemeClr val="accent1"/>
+          </a:effectRef>
+          <a:fontRef idx="minor">
+            <a:schemeClr val="lt1"/>
+          </a:fontRef>
+        </p:style>
+        <p:txBody>
+          <a:bodyPr rtlCol="0" anchor="ctr"/>
+          <a:lstStyle/>
+          <a:p>
+            <a:pPr algn="ctr"/>
+            <a:r>
+              <a:rPr lang="ja-JP" altLang="en-US" dirty="0"/>
+              <a:t>物体</a:t>
+            </a:r>
+            <a:endParaRPr kumimoji="1" lang="ja-JP" altLang="en-US" dirty="0"/>
+          </a:p>
+        </p:txBody>
+      </p:sp>
+      <p:cxnSp>
+        <p:nvCxnSpPr>
+          <p:cNvPr id="43" name="直線コネクタ 42">
+            <a:extLst>
+              <a:ext uri="{FF2B5EF4-FFF2-40B4-BE49-F238E27FC236}">
+                <a16:creationId xmlns:a16="http://schemas.microsoft.com/office/drawing/2014/main" id="{6B65DD0F-9EBE-5FA1-F6C9-85DD33FBBB73}"/>
+              </a:ext>
+            </a:extLst>
+          </p:cNvPr>
+          <p:cNvCxnSpPr>
+            <a:cxnSpLocks/>
+            <a:stCxn id="202" idx="0"/>
+          </p:cNvCxnSpPr>
+          <p:nvPr/>
+        </p:nvCxnSpPr>
+        <p:spPr>
+          <a:xfrm flipV="1">
+            <a:off x="2215431" y="717225"/>
+            <a:ext cx="1204496" cy="1562"/>
+          </a:xfrm>
+          <a:prstGeom prst="line">
+            <a:avLst/>
+          </a:prstGeom>
+          <a:ln w="19050">
+            <a:solidFill>
+              <a:srgbClr val="8FAADC"/>
+            </a:solidFill>
+            <a:prstDash val="sysDot"/>
+          </a:ln>
+        </p:spPr>
+        <p:style>
+          <a:lnRef idx="1">
+            <a:schemeClr val="accent1"/>
+          </a:lnRef>
+          <a:fillRef idx="0">
+            <a:schemeClr val="accent1"/>
+          </a:fillRef>
+          <a:effectRef idx="0">
+            <a:schemeClr val="accent1"/>
+          </a:effectRef>
+          <a:fontRef idx="minor">
+            <a:schemeClr val="tx1"/>
+          </a:fontRef>
+        </p:style>
+      </p:cxnSp>
+      <p:sp>
+        <p:nvSpPr>
+          <p:cNvPr id="47" name="テキスト ボックス 46">
+            <a:extLst>
+              <a:ext uri="{FF2B5EF4-FFF2-40B4-BE49-F238E27FC236}">
+                <a16:creationId xmlns:a16="http://schemas.microsoft.com/office/drawing/2014/main" id="{F1872CB4-6B3D-2D80-E5BA-8A3F49F9590E}"/>
+              </a:ext>
+            </a:extLst>
+          </p:cNvPr>
+          <p:cNvSpPr txBox="1"/>
+          <p:nvPr/>
+        </p:nvSpPr>
+        <p:spPr>
+          <a:xfrm>
+            <a:off x="2826485" y="436871"/>
+            <a:ext cx="303288" cy="369332"/>
+          </a:xfrm>
+          <a:prstGeom prst="rect">
+            <a:avLst/>
+          </a:prstGeom>
+          <a:noFill/>
+        </p:spPr>
+        <p:txBody>
+          <a:bodyPr wrap="none" rtlCol="0">
+            <a:spAutoFit/>
+          </a:bodyPr>
+          <a:lstStyle/>
+          <a:p>
+            <a:r>
+              <a:rPr kumimoji="1" lang="en-US" altLang="ja-JP" dirty="0"/>
+              <a:t>c</a:t>
+            </a:r>
+            <a:endParaRPr kumimoji="1" lang="ja-JP" altLang="en-US" dirty="0"/>
+          </a:p>
+        </p:txBody>
+      </p:sp>
+      <p:sp>
+        <p:nvSpPr>
+          <p:cNvPr id="3" name="テキスト ボックス 2">
+            <a:extLst>
+              <a:ext uri="{FF2B5EF4-FFF2-40B4-BE49-F238E27FC236}">
+                <a16:creationId xmlns:a16="http://schemas.microsoft.com/office/drawing/2014/main" id="{48CF691E-5B3F-7FD1-F340-ADAB4646441C}"/>
+              </a:ext>
+            </a:extLst>
+          </p:cNvPr>
+          <p:cNvSpPr txBox="1"/>
+          <p:nvPr/>
+        </p:nvSpPr>
+        <p:spPr>
+          <a:xfrm>
+            <a:off x="1742148" y="373755"/>
+            <a:ext cx="268022" cy="369332"/>
+          </a:xfrm>
+          <a:prstGeom prst="rect">
+            <a:avLst/>
+          </a:prstGeom>
+          <a:noFill/>
+        </p:spPr>
+        <p:txBody>
+          <a:bodyPr wrap="none" rtlCol="0">
+            <a:spAutoFit/>
+          </a:bodyPr>
+          <a:lstStyle/>
+          <a:p>
+            <a:r>
+              <a:rPr kumimoji="1" lang="en-US" altLang="ja-JP" dirty="0"/>
+              <a:t>r</a:t>
+            </a:r>
+            <a:endParaRPr kumimoji="1" lang="ja-JP" altLang="en-US" dirty="0"/>
+          </a:p>
+        </p:txBody>
+      </p:sp>
+      <p:cxnSp>
+        <p:nvCxnSpPr>
+          <p:cNvPr id="38" name="直線矢印コネクタ 37">
+            <a:extLst>
+              <a:ext uri="{FF2B5EF4-FFF2-40B4-BE49-F238E27FC236}">
+                <a16:creationId xmlns:a16="http://schemas.microsoft.com/office/drawing/2014/main" id="{365CF368-D663-159D-BABD-62BB30F9C5FB}"/>
+              </a:ext>
+            </a:extLst>
+          </p:cNvPr>
+          <p:cNvCxnSpPr>
+            <a:cxnSpLocks/>
+          </p:cNvCxnSpPr>
+          <p:nvPr/>
+        </p:nvCxnSpPr>
+        <p:spPr>
+          <a:xfrm>
+            <a:off x="1542473" y="653949"/>
+            <a:ext cx="672958" cy="4513"/>
+          </a:xfrm>
+          <a:prstGeom prst="straightConnector1">
+            <a:avLst/>
+          </a:prstGeom>
+          <a:ln>
+            <a:solidFill>
+              <a:schemeClr val="tx1"/>
+            </a:solidFill>
+            <a:headEnd type="triangle"/>
+            <a:tailEnd type="triangle"/>
+          </a:ln>
+        </p:spPr>
+        <p:style>
+          <a:lnRef idx="1">
+            <a:schemeClr val="accent1"/>
+          </a:lnRef>
+          <a:fillRef idx="0">
+            <a:schemeClr val="accent1"/>
+          </a:fillRef>
+          <a:effectRef idx="0">
+            <a:schemeClr val="accent1"/>
+          </a:effectRef>
+          <a:fontRef idx="minor">
+            <a:schemeClr val="tx1"/>
+          </a:fontRef>
+        </p:style>
+      </p:cxnSp>
+      <p:sp>
+        <p:nvSpPr>
+          <p:cNvPr id="210" name="正方形/長方形 209">
+            <a:extLst>
+              <a:ext uri="{FF2B5EF4-FFF2-40B4-BE49-F238E27FC236}">
+                <a16:creationId xmlns:a16="http://schemas.microsoft.com/office/drawing/2014/main" id="{48BB2541-1D9B-4F86-D34B-84B9F2CE09B0}"/>
+              </a:ext>
+            </a:extLst>
+          </p:cNvPr>
+          <p:cNvSpPr/>
+          <p:nvPr/>
+        </p:nvSpPr>
+        <p:spPr>
+          <a:xfrm>
+            <a:off x="5574087" y="2169841"/>
+            <a:ext cx="168146" cy="82550"/>
+          </a:xfrm>
+          <a:prstGeom prst="rect">
+            <a:avLst/>
+          </a:prstGeom>
+          <a:solidFill>
+            <a:schemeClr val="bg1"/>
+          </a:solidFill>
+          <a:ln>
+            <a:noFill/>
+          </a:ln>
+        </p:spPr>
+        <p:style>
+          <a:lnRef idx="2">
+            <a:schemeClr val="accent1">
+              <a:shade val="15000"/>
+            </a:schemeClr>
+          </a:lnRef>
+          <a:fillRef idx="1">
+            <a:schemeClr val="accent1"/>
+          </a:fillRef>
+          <a:effectRef idx="0">
+            <a:schemeClr val="accent1"/>
+          </a:effectRef>
+          <a:fontRef idx="minor">
+            <a:schemeClr val="lt1"/>
+          </a:fontRef>
+        </p:style>
+        <p:txBody>
+          <a:bodyPr rtlCol="0" anchor="ctr"/>
+          <a:lstStyle/>
+          <a:p>
+            <a:pPr algn="ctr"/>
+            <a:endParaRPr kumimoji="1" lang="ja-JP" altLang="en-US"/>
+          </a:p>
+        </p:txBody>
+      </p:sp>
+      <p:cxnSp>
+        <p:nvCxnSpPr>
+          <p:cNvPr id="212" name="直線コネクタ 211">
+            <a:extLst>
+              <a:ext uri="{FF2B5EF4-FFF2-40B4-BE49-F238E27FC236}">
+                <a16:creationId xmlns:a16="http://schemas.microsoft.com/office/drawing/2014/main" id="{6E1CF165-20E7-C2D0-76F8-7CC0DFCA7CAF}"/>
+              </a:ext>
+            </a:extLst>
+          </p:cNvPr>
+          <p:cNvCxnSpPr>
+            <a:cxnSpLocks/>
+            <a:endCxn id="215" idx="2"/>
+          </p:cNvCxnSpPr>
+          <p:nvPr/>
+        </p:nvCxnSpPr>
+        <p:spPr>
+          <a:xfrm>
+            <a:off x="4986931" y="3260529"/>
+            <a:ext cx="512636" cy="1"/>
+          </a:xfrm>
+          <a:prstGeom prst="line">
+            <a:avLst/>
+          </a:prstGeom>
+          <a:ln w="38100">
+            <a:solidFill>
+              <a:schemeClr val="tx1"/>
+            </a:solidFill>
+          </a:ln>
+        </p:spPr>
+        <p:style>
+          <a:lnRef idx="1">
+            <a:schemeClr val="accent1"/>
+          </a:lnRef>
+          <a:fillRef idx="0">
+            <a:schemeClr val="accent1"/>
+          </a:fillRef>
+          <a:effectRef idx="0">
+            <a:schemeClr val="accent1"/>
+          </a:effectRef>
+          <a:fontRef idx="minor">
+            <a:schemeClr val="tx1"/>
+          </a:fontRef>
+        </p:style>
+      </p:cxnSp>
+      <p:cxnSp>
+        <p:nvCxnSpPr>
+          <p:cNvPr id="213" name="直線矢印コネクタ 212">
+            <a:extLst>
+              <a:ext uri="{FF2B5EF4-FFF2-40B4-BE49-F238E27FC236}">
+                <a16:creationId xmlns:a16="http://schemas.microsoft.com/office/drawing/2014/main" id="{310AA31B-6AB3-3D79-405B-A95658C5C219}"/>
+              </a:ext>
+            </a:extLst>
+          </p:cNvPr>
+          <p:cNvCxnSpPr>
+            <a:cxnSpLocks/>
+          </p:cNvCxnSpPr>
+          <p:nvPr/>
+        </p:nvCxnSpPr>
+        <p:spPr>
+          <a:xfrm>
+            <a:off x="5532844" y="3260532"/>
+            <a:ext cx="3255493" cy="0"/>
+          </a:xfrm>
+          <a:prstGeom prst="straightConnector1">
+            <a:avLst/>
+          </a:prstGeom>
+          <a:ln w="38100">
+            <a:solidFill>
+              <a:schemeClr val="tx1"/>
+            </a:solidFill>
+            <a:tailEnd type="triangle"/>
+          </a:ln>
+        </p:spPr>
+        <p:style>
+          <a:lnRef idx="1">
+            <a:schemeClr val="accent1"/>
+          </a:lnRef>
+          <a:fillRef idx="0">
+            <a:schemeClr val="accent1"/>
+          </a:fillRef>
+          <a:effectRef idx="0">
+            <a:schemeClr val="accent1"/>
+          </a:effectRef>
+          <a:fontRef idx="minor">
+            <a:schemeClr val="tx1"/>
+          </a:fontRef>
+        </p:style>
+      </p:cxnSp>
+      <p:cxnSp>
+        <p:nvCxnSpPr>
+          <p:cNvPr id="214" name="直線矢印コネクタ 213">
+            <a:extLst>
+              <a:ext uri="{FF2B5EF4-FFF2-40B4-BE49-F238E27FC236}">
+                <a16:creationId xmlns:a16="http://schemas.microsoft.com/office/drawing/2014/main" id="{83739125-8273-7149-1E35-4D05B6B75489}"/>
+              </a:ext>
+            </a:extLst>
+          </p:cNvPr>
+          <p:cNvCxnSpPr>
+            <a:cxnSpLocks/>
+            <a:stCxn id="219" idx="0"/>
+          </p:cNvCxnSpPr>
+          <p:nvPr/>
+        </p:nvCxnSpPr>
+        <p:spPr>
+          <a:xfrm flipV="1">
+            <a:off x="5532836" y="1333134"/>
+            <a:ext cx="8" cy="2156612"/>
+          </a:xfrm>
+          <a:prstGeom prst="straightConnector1">
+            <a:avLst/>
+          </a:prstGeom>
+          <a:ln w="38100">
+            <a:solidFill>
+              <a:schemeClr val="tx1"/>
+            </a:solidFill>
+            <a:tailEnd type="triangle"/>
+          </a:ln>
+        </p:spPr>
+        <p:style>
+          <a:lnRef idx="1">
+            <a:schemeClr val="accent1"/>
+          </a:lnRef>
+          <a:fillRef idx="0">
+            <a:schemeClr val="accent1"/>
+          </a:fillRef>
+          <a:effectRef idx="0">
+            <a:schemeClr val="accent1"/>
+          </a:effectRef>
+          <a:fontRef idx="minor">
+            <a:schemeClr val="tx1"/>
+          </a:fontRef>
+        </p:style>
+      </p:cxnSp>
+      <p:sp>
+        <p:nvSpPr>
+          <p:cNvPr id="215" name="楕円 214">
+            <a:extLst>
+              <a:ext uri="{FF2B5EF4-FFF2-40B4-BE49-F238E27FC236}">
+                <a16:creationId xmlns:a16="http://schemas.microsoft.com/office/drawing/2014/main" id="{6C4F172F-A46D-8D9A-F53C-93E548A799CA}"/>
+              </a:ext>
+            </a:extLst>
+          </p:cNvPr>
+          <p:cNvSpPr/>
+          <p:nvPr/>
+        </p:nvSpPr>
+        <p:spPr>
+          <a:xfrm>
+            <a:off x="5499567" y="3226300"/>
+            <a:ext cx="66531" cy="68459"/>
+          </a:xfrm>
+          <a:prstGeom prst="ellipse">
+            <a:avLst/>
+          </a:prstGeom>
+          <a:solidFill>
+            <a:schemeClr val="tx1"/>
+          </a:solidFill>
+          <a:ln>
+            <a:solidFill>
+              <a:schemeClr val="bg1">
+                <a:lumMod val="65000"/>
+              </a:schemeClr>
+            </a:solidFill>
+          </a:ln>
+        </p:spPr>
+        <p:style>
+          <a:lnRef idx="2">
+            <a:schemeClr val="accent1">
+              <a:shade val="15000"/>
+            </a:schemeClr>
+          </a:lnRef>
+          <a:fillRef idx="1">
+            <a:schemeClr val="accent1"/>
+          </a:fillRef>
+          <a:effectRef idx="0">
+            <a:schemeClr val="accent1"/>
+          </a:effectRef>
+          <a:fontRef idx="minor">
+            <a:schemeClr val="lt1"/>
+          </a:fontRef>
+        </p:style>
+        <p:txBody>
+          <a:bodyPr rtlCol="0" anchor="ctr"/>
+          <a:lstStyle/>
+          <a:p>
+            <a:pPr algn="ctr"/>
+            <a:endParaRPr kumimoji="1" lang="ja-JP" altLang="en-US" dirty="0">
               <a:solidFill>
                 <a:schemeClr val="tx1"/>
               </a:solidFill>
-              <a:headEnd type="triangle"/>
-              <a:tailEnd type="triangle"/>
-            </a:ln>
-          </p:spPr>
-          <p:style>
-            <a:lnRef idx="1">
-              <a:schemeClr val="accent1"/>
-            </a:lnRef>
-            <a:fillRef idx="0">
-              <a:schemeClr val="accent1"/>
-            </a:fillRef>
-            <a:effectRef idx="0">
-              <a:schemeClr val="accent1"/>
-            </a:effectRef>
-            <a:fontRef idx="minor">
+            </a:endParaRPr>
+          </a:p>
+        </p:txBody>
+      </p:sp>
+      <p:sp>
+        <p:nvSpPr>
+          <p:cNvPr id="216" name="テキスト ボックス 215">
+            <a:extLst>
+              <a:ext uri="{FF2B5EF4-FFF2-40B4-BE49-F238E27FC236}">
+                <a16:creationId xmlns:a16="http://schemas.microsoft.com/office/drawing/2014/main" id="{B61EAD4E-898B-465A-2258-FDC0D6399680}"/>
+              </a:ext>
+            </a:extLst>
+          </p:cNvPr>
+          <p:cNvSpPr txBox="1"/>
+          <p:nvPr/>
+        </p:nvSpPr>
+        <p:spPr>
+          <a:xfrm>
+            <a:off x="8643815" y="3213399"/>
+            <a:ext cx="308098" cy="369332"/>
+          </a:xfrm>
+          <a:prstGeom prst="rect">
+            <a:avLst/>
+          </a:prstGeom>
+          <a:noFill/>
+        </p:spPr>
+        <p:txBody>
+          <a:bodyPr wrap="none" rtlCol="0">
+            <a:spAutoFit/>
+          </a:bodyPr>
+          <a:lstStyle/>
+          <a:p>
+            <a:r>
+              <a:rPr kumimoji="1" lang="en-US" altLang="ja-JP" b="1" dirty="0"/>
+              <a:t>x</a:t>
+            </a:r>
+            <a:endParaRPr kumimoji="1" lang="ja-JP" altLang="en-US" b="1" dirty="0"/>
+          </a:p>
+        </p:txBody>
+      </p:sp>
+      <p:sp>
+        <p:nvSpPr>
+          <p:cNvPr id="217" name="テキスト ボックス 216">
+            <a:extLst>
+              <a:ext uri="{FF2B5EF4-FFF2-40B4-BE49-F238E27FC236}">
+                <a16:creationId xmlns:a16="http://schemas.microsoft.com/office/drawing/2014/main" id="{C22E662A-FE95-3F94-36D6-4765A54DF746}"/>
+              </a:ext>
+            </a:extLst>
+          </p:cNvPr>
+          <p:cNvSpPr txBox="1"/>
+          <p:nvPr/>
+        </p:nvSpPr>
+        <p:spPr>
+          <a:xfrm>
+            <a:off x="5224745" y="1191244"/>
+            <a:ext cx="308098" cy="369332"/>
+          </a:xfrm>
+          <a:prstGeom prst="rect">
+            <a:avLst/>
+          </a:prstGeom>
+          <a:noFill/>
+        </p:spPr>
+        <p:txBody>
+          <a:bodyPr wrap="none" rtlCol="0">
+            <a:spAutoFit/>
+          </a:bodyPr>
+          <a:lstStyle/>
+          <a:p>
+            <a:r>
+              <a:rPr lang="en-US" altLang="ja-JP" b="1" dirty="0"/>
+              <a:t>y</a:t>
+            </a:r>
+            <a:endParaRPr kumimoji="1" lang="ja-JP" altLang="en-US" b="1" dirty="0"/>
+          </a:p>
+        </p:txBody>
+      </p:sp>
+      <p:sp>
+        <p:nvSpPr>
+          <p:cNvPr id="219" name="矢印: 下 218">
+            <a:extLst>
+              <a:ext uri="{FF2B5EF4-FFF2-40B4-BE49-F238E27FC236}">
+                <a16:creationId xmlns:a16="http://schemas.microsoft.com/office/drawing/2014/main" id="{6A31C0A7-6C3D-8134-D794-C367C408B34C}"/>
+              </a:ext>
+            </a:extLst>
+          </p:cNvPr>
+          <p:cNvSpPr/>
+          <p:nvPr/>
+        </p:nvSpPr>
+        <p:spPr>
+          <a:xfrm rot="10800000">
+            <a:off x="5402037" y="3260531"/>
+            <a:ext cx="261599" cy="229215"/>
+          </a:xfrm>
+          <a:prstGeom prst="downArrow">
+            <a:avLst/>
+          </a:prstGeom>
+          <a:solidFill>
+            <a:schemeClr val="accent6">
+              <a:lumMod val="60000"/>
+              <a:lumOff val="40000"/>
+            </a:schemeClr>
+          </a:solidFill>
+          <a:ln>
+            <a:solidFill>
+              <a:schemeClr val="accent6">
+                <a:lumMod val="75000"/>
+              </a:schemeClr>
+            </a:solidFill>
+          </a:ln>
+        </p:spPr>
+        <p:style>
+          <a:lnRef idx="2">
+            <a:schemeClr val="accent1">
+              <a:shade val="15000"/>
+            </a:schemeClr>
+          </a:lnRef>
+          <a:fillRef idx="1">
+            <a:schemeClr val="accent1"/>
+          </a:fillRef>
+          <a:effectRef idx="0">
+            <a:schemeClr val="accent1"/>
+          </a:effectRef>
+          <a:fontRef idx="minor">
+            <a:schemeClr val="lt1"/>
+          </a:fontRef>
+        </p:style>
+        <p:txBody>
+          <a:bodyPr rtlCol="0" anchor="ctr"/>
+          <a:lstStyle/>
+          <a:p>
+            <a:pPr algn="ctr"/>
+            <a:endParaRPr kumimoji="1" lang="ja-JP" altLang="en-US"/>
+          </a:p>
+        </p:txBody>
+      </p:sp>
+      <p:sp>
+        <p:nvSpPr>
+          <p:cNvPr id="220" name="テキスト ボックス 219">
+            <a:extLst>
+              <a:ext uri="{FF2B5EF4-FFF2-40B4-BE49-F238E27FC236}">
+                <a16:creationId xmlns:a16="http://schemas.microsoft.com/office/drawing/2014/main" id="{E32B47EC-325F-B56E-24CA-CDCFB24A4458}"/>
+              </a:ext>
+            </a:extLst>
+          </p:cNvPr>
+          <p:cNvSpPr txBox="1"/>
+          <p:nvPr/>
+        </p:nvSpPr>
+        <p:spPr>
+          <a:xfrm>
+            <a:off x="5209141" y="3479842"/>
+            <a:ext cx="646331" cy="276999"/>
+          </a:xfrm>
+          <a:prstGeom prst="rect">
+            <a:avLst/>
+          </a:prstGeom>
+          <a:noFill/>
+        </p:spPr>
+        <p:txBody>
+          <a:bodyPr wrap="none" rtlCol="0">
+            <a:spAutoFit/>
+          </a:bodyPr>
+          <a:lstStyle/>
+          <a:p>
+            <a:r>
+              <a:rPr kumimoji="1" lang="ja-JP" altLang="en-US" sz="1200" dirty="0">
+                <a:highlight>
+                  <a:srgbClr val="00FF00"/>
+                </a:highlight>
+              </a:rPr>
+              <a:t>カメラ</a:t>
+            </a:r>
+          </a:p>
+        </p:txBody>
+      </p:sp>
+      <p:sp>
+        <p:nvSpPr>
+          <p:cNvPr id="222" name="楕円 221">
+            <a:extLst>
+              <a:ext uri="{FF2B5EF4-FFF2-40B4-BE49-F238E27FC236}">
+                <a16:creationId xmlns:a16="http://schemas.microsoft.com/office/drawing/2014/main" id="{E36D6ED7-5724-5150-BA8F-9D0CDC876344}"/>
+              </a:ext>
+            </a:extLst>
+          </p:cNvPr>
+          <p:cNvSpPr/>
+          <p:nvPr/>
+        </p:nvSpPr>
+        <p:spPr>
+          <a:xfrm>
+            <a:off x="5499567" y="1885835"/>
+            <a:ext cx="66531" cy="69146"/>
+          </a:xfrm>
+          <a:prstGeom prst="ellipse">
+            <a:avLst/>
+          </a:prstGeom>
+          <a:solidFill>
+            <a:schemeClr val="tx1"/>
+          </a:solidFill>
+          <a:ln>
+            <a:solidFill>
+              <a:schemeClr val="bg1">
+                <a:lumMod val="65000"/>
+              </a:schemeClr>
+            </a:solidFill>
+          </a:ln>
+        </p:spPr>
+        <p:style>
+          <a:lnRef idx="2">
+            <a:schemeClr val="accent1">
+              <a:shade val="15000"/>
+            </a:schemeClr>
+          </a:lnRef>
+          <a:fillRef idx="1">
+            <a:schemeClr val="accent1"/>
+          </a:fillRef>
+          <a:effectRef idx="0">
+            <a:schemeClr val="accent1"/>
+          </a:effectRef>
+          <a:fontRef idx="minor">
+            <a:schemeClr val="lt1"/>
+          </a:fontRef>
+        </p:style>
+        <p:txBody>
+          <a:bodyPr rtlCol="0" anchor="ctr"/>
+          <a:lstStyle/>
+          <a:p>
+            <a:pPr algn="ctr"/>
+            <a:endParaRPr kumimoji="1" lang="ja-JP" altLang="en-US">
+              <a:solidFill>
+                <a:schemeClr val="tx1"/>
+              </a:solidFill>
+            </a:endParaRPr>
+          </a:p>
+        </p:txBody>
+      </p:sp>
+      <p:cxnSp>
+        <p:nvCxnSpPr>
+          <p:cNvPr id="223" name="直線矢印コネクタ 222">
+            <a:extLst>
+              <a:ext uri="{FF2B5EF4-FFF2-40B4-BE49-F238E27FC236}">
+                <a16:creationId xmlns:a16="http://schemas.microsoft.com/office/drawing/2014/main" id="{AD4463F0-49BB-447F-FF74-5AB0D07EC8F2}"/>
+              </a:ext>
+            </a:extLst>
+          </p:cNvPr>
+          <p:cNvCxnSpPr>
+            <a:cxnSpLocks/>
+          </p:cNvCxnSpPr>
+          <p:nvPr/>
+        </p:nvCxnSpPr>
+        <p:spPr>
+          <a:xfrm>
+            <a:off x="5328554" y="1928541"/>
+            <a:ext cx="0" cy="1316333"/>
+          </a:xfrm>
+          <a:prstGeom prst="straightConnector1">
+            <a:avLst/>
+          </a:prstGeom>
+          <a:ln>
+            <a:solidFill>
               <a:schemeClr val="tx1"/>
-            </a:fontRef>
-          </p:style>
-        </p:cxnSp>
-        <p:sp>
-          <p:nvSpPr>
-            <p:cNvPr id="116" name="テキスト ボックス 115">
-              <a:extLst>
-                <a:ext uri="{FF2B5EF4-FFF2-40B4-BE49-F238E27FC236}">
-                  <a16:creationId xmlns:a16="http://schemas.microsoft.com/office/drawing/2014/main" id="{2A1BDD4E-3F88-F0C2-B7B5-4B560E55EFED}"/>
-                </a:ext>
-              </a:extLst>
-            </p:cNvPr>
-            <p:cNvSpPr txBox="1"/>
-            <p:nvPr/>
-          </p:nvSpPr>
-          <p:spPr>
-            <a:xfrm>
-              <a:off x="1114155" y="1195907"/>
-              <a:ext cx="319318" cy="369332"/>
-            </a:xfrm>
-            <a:prstGeom prst="rect">
-              <a:avLst/>
-            </a:prstGeom>
+            </a:solidFill>
+            <a:headEnd type="triangle"/>
+            <a:tailEnd type="triangle"/>
+          </a:ln>
+        </p:spPr>
+        <p:style>
+          <a:lnRef idx="1">
+            <a:schemeClr val="accent1"/>
+          </a:lnRef>
+          <a:fillRef idx="0">
+            <a:schemeClr val="accent1"/>
+          </a:fillRef>
+          <a:effectRef idx="0">
+            <a:schemeClr val="accent1"/>
+          </a:effectRef>
+          <a:fontRef idx="minor">
+            <a:schemeClr val="tx1"/>
+          </a:fontRef>
+        </p:style>
+      </p:cxnSp>
+      <p:sp>
+        <p:nvSpPr>
+          <p:cNvPr id="224" name="テキスト ボックス 223">
+            <a:extLst>
+              <a:ext uri="{FF2B5EF4-FFF2-40B4-BE49-F238E27FC236}">
+                <a16:creationId xmlns:a16="http://schemas.microsoft.com/office/drawing/2014/main" id="{82CA950E-6A10-0293-1157-6361A4E74BF1}"/>
+              </a:ext>
+            </a:extLst>
+          </p:cNvPr>
+          <p:cNvSpPr txBox="1"/>
+          <p:nvPr/>
+        </p:nvSpPr>
+        <p:spPr>
+          <a:xfrm>
+            <a:off x="5094920" y="2402041"/>
+            <a:ext cx="319318" cy="369332"/>
+          </a:xfrm>
+          <a:prstGeom prst="rect">
+            <a:avLst/>
+          </a:prstGeom>
+          <a:noFill/>
+        </p:spPr>
+        <p:txBody>
+          <a:bodyPr wrap="none" rtlCol="0">
+            <a:spAutoFit/>
+          </a:bodyPr>
+          <a:lstStyle/>
+          <a:p>
+            <a:r>
+              <a:rPr lang="en-US" altLang="ja-JP" dirty="0"/>
+              <a:t>h</a:t>
+            </a:r>
+            <a:endParaRPr kumimoji="1" lang="ja-JP" altLang="en-US" dirty="0"/>
+          </a:p>
+        </p:txBody>
+      </p:sp>
+      <p:cxnSp>
+        <p:nvCxnSpPr>
+          <p:cNvPr id="225" name="直線矢印コネクタ 224">
+            <a:extLst>
+              <a:ext uri="{FF2B5EF4-FFF2-40B4-BE49-F238E27FC236}">
+                <a16:creationId xmlns:a16="http://schemas.microsoft.com/office/drawing/2014/main" id="{C0B8E2DF-20C9-3168-C324-4AC0EB585A4D}"/>
+              </a:ext>
+            </a:extLst>
+          </p:cNvPr>
+          <p:cNvCxnSpPr>
+            <a:cxnSpLocks/>
+            <a:stCxn id="219" idx="2"/>
+            <a:endCxn id="228" idx="4"/>
+          </p:cNvCxnSpPr>
+          <p:nvPr/>
+        </p:nvCxnSpPr>
+        <p:spPr>
+          <a:xfrm flipV="1">
+            <a:off x="5532836" y="2047131"/>
+            <a:ext cx="438782" cy="1213400"/>
+          </a:xfrm>
+          <a:prstGeom prst="straightConnector1">
+            <a:avLst/>
+          </a:prstGeom>
+          <a:ln w="28575">
+            <a:solidFill>
+              <a:schemeClr val="accent4">
+                <a:lumMod val="60000"/>
+                <a:lumOff val="40000"/>
+              </a:schemeClr>
+            </a:solidFill>
+            <a:tailEnd type="triangle"/>
+          </a:ln>
+        </p:spPr>
+        <p:style>
+          <a:lnRef idx="1">
+            <a:schemeClr val="accent1"/>
+          </a:lnRef>
+          <a:fillRef idx="0">
+            <a:schemeClr val="accent1"/>
+          </a:fillRef>
+          <a:effectRef idx="0">
+            <a:schemeClr val="accent1"/>
+          </a:effectRef>
+          <a:fontRef idx="minor">
+            <a:schemeClr val="tx1"/>
+          </a:fontRef>
+        </p:style>
+      </p:cxnSp>
+      <p:sp>
+        <p:nvSpPr>
+          <p:cNvPr id="228" name="楕円 227">
+            <a:extLst>
+              <a:ext uri="{FF2B5EF4-FFF2-40B4-BE49-F238E27FC236}">
+                <a16:creationId xmlns:a16="http://schemas.microsoft.com/office/drawing/2014/main" id="{4D23D46D-79F1-3846-3981-FACB2C9BFC42}"/>
+              </a:ext>
+            </a:extLst>
+          </p:cNvPr>
+          <p:cNvSpPr/>
+          <p:nvPr/>
+        </p:nvSpPr>
+        <p:spPr>
+          <a:xfrm>
+            <a:off x="5944850" y="1993200"/>
+            <a:ext cx="53535" cy="53931"/>
+          </a:xfrm>
+          <a:prstGeom prst="ellipse">
+            <a:avLst/>
+          </a:prstGeom>
+          <a:solidFill>
+            <a:srgbClr val="7030A0"/>
+          </a:solidFill>
+          <a:ln>
             <a:noFill/>
-          </p:spPr>
-          <p:txBody>
-            <a:bodyPr wrap="none" rtlCol="0">
-              <a:spAutoFit/>
-            </a:bodyPr>
-            <a:lstStyle/>
-            <a:p>
-              <a:r>
-                <a:rPr lang="en-US" altLang="ja-JP" dirty="0"/>
-                <a:t>h</a:t>
-              </a:r>
-              <a:endParaRPr kumimoji="1" lang="ja-JP" altLang="en-US" dirty="0"/>
-            </a:p>
-          </p:txBody>
-        </p:sp>
-        <p:sp>
-          <p:nvSpPr>
-            <p:cNvPr id="117" name="テキスト ボックス 116">
-              <a:extLst>
-                <a:ext uri="{FF2B5EF4-FFF2-40B4-BE49-F238E27FC236}">
-                  <a16:creationId xmlns:a16="http://schemas.microsoft.com/office/drawing/2014/main" id="{7F8891BC-787D-9260-8122-2E6D1608106B}"/>
-                </a:ext>
-              </a:extLst>
-            </p:cNvPr>
-            <p:cNvSpPr txBox="1"/>
-            <p:nvPr/>
-          </p:nvSpPr>
-          <p:spPr>
-            <a:xfrm>
-              <a:off x="777184" y="453663"/>
-              <a:ext cx="646331" cy="276999"/>
-            </a:xfrm>
-            <a:prstGeom prst="rect">
-              <a:avLst/>
-            </a:prstGeom>
+          </a:ln>
+        </p:spPr>
+        <p:style>
+          <a:lnRef idx="2">
+            <a:schemeClr val="accent1">
+              <a:shade val="15000"/>
+            </a:schemeClr>
+          </a:lnRef>
+          <a:fillRef idx="1">
+            <a:schemeClr val="accent1"/>
+          </a:fillRef>
+          <a:effectRef idx="0">
+            <a:schemeClr val="accent1"/>
+          </a:effectRef>
+          <a:fontRef idx="minor">
+            <a:schemeClr val="lt1"/>
+          </a:fontRef>
+        </p:style>
+        <p:txBody>
+          <a:bodyPr rtlCol="0" anchor="ctr"/>
+          <a:lstStyle/>
+          <a:p>
+            <a:pPr algn="ctr"/>
+            <a:endParaRPr kumimoji="1" lang="ja-JP" altLang="en-US" dirty="0">
+              <a:solidFill>
+                <a:schemeClr val="tx1"/>
+              </a:solidFill>
+            </a:endParaRPr>
+          </a:p>
+        </p:txBody>
+      </p:sp>
+      <p:cxnSp>
+        <p:nvCxnSpPr>
+          <p:cNvPr id="232" name="直線コネクタ 231">
+            <a:extLst>
+              <a:ext uri="{FF2B5EF4-FFF2-40B4-BE49-F238E27FC236}">
+                <a16:creationId xmlns:a16="http://schemas.microsoft.com/office/drawing/2014/main" id="{956ED938-48A5-72F3-D916-0D51003888A7}"/>
+              </a:ext>
+            </a:extLst>
+          </p:cNvPr>
+          <p:cNvCxnSpPr>
+            <a:cxnSpLocks/>
+            <a:endCxn id="246" idx="6"/>
+          </p:cNvCxnSpPr>
+          <p:nvPr/>
+        </p:nvCxnSpPr>
+        <p:spPr>
+          <a:xfrm flipH="1" flipV="1">
+            <a:off x="5571846" y="1919968"/>
+            <a:ext cx="638141" cy="3567"/>
+          </a:xfrm>
+          <a:prstGeom prst="line">
+            <a:avLst/>
+          </a:prstGeom>
+          <a:ln w="19050">
+            <a:solidFill>
+              <a:srgbClr val="8FAADC"/>
+            </a:solidFill>
+          </a:ln>
+        </p:spPr>
+        <p:style>
+          <a:lnRef idx="1">
+            <a:schemeClr val="accent1"/>
+          </a:lnRef>
+          <a:fillRef idx="0">
+            <a:schemeClr val="accent1"/>
+          </a:fillRef>
+          <a:effectRef idx="0">
+            <a:schemeClr val="accent1"/>
+          </a:effectRef>
+          <a:fontRef idx="minor">
+            <a:schemeClr val="tx1"/>
+          </a:fontRef>
+        </p:style>
+      </p:cxnSp>
+      <p:sp>
+        <p:nvSpPr>
+          <p:cNvPr id="234" name="正方形/長方形 233">
+            <a:extLst>
+              <a:ext uri="{FF2B5EF4-FFF2-40B4-BE49-F238E27FC236}">
+                <a16:creationId xmlns:a16="http://schemas.microsoft.com/office/drawing/2014/main" id="{D876730A-DEA9-02EE-7891-C2760B5619CE}"/>
+              </a:ext>
+            </a:extLst>
+          </p:cNvPr>
+          <p:cNvSpPr/>
+          <p:nvPr/>
+        </p:nvSpPr>
+        <p:spPr>
+          <a:xfrm>
+            <a:off x="5579835" y="2169401"/>
+            <a:ext cx="168146" cy="82550"/>
+          </a:xfrm>
+          <a:prstGeom prst="rect">
+            <a:avLst/>
+          </a:prstGeom>
+          <a:solidFill>
+            <a:schemeClr val="bg1"/>
+          </a:solidFill>
+          <a:ln>
             <a:noFill/>
-          </p:spPr>
-          <p:txBody>
-            <a:bodyPr wrap="none" rtlCol="0">
-              <a:spAutoFit/>
-            </a:bodyPr>
-            <a:lstStyle/>
-            <a:p>
-              <a:r>
-                <a:rPr lang="ja-JP" altLang="en-US" sz="1200" dirty="0">
-                  <a:highlight>
-                    <a:srgbClr val="8FAADC"/>
-                  </a:highlight>
-                </a:rPr>
-                <a:t>ミラー</a:t>
-              </a:r>
-              <a:endParaRPr kumimoji="1" lang="ja-JP" altLang="en-US" sz="1200" dirty="0">
+          </a:ln>
+        </p:spPr>
+        <p:style>
+          <a:lnRef idx="2">
+            <a:schemeClr val="accent1">
+              <a:shade val="15000"/>
+            </a:schemeClr>
+          </a:lnRef>
+          <a:fillRef idx="1">
+            <a:schemeClr val="accent1"/>
+          </a:fillRef>
+          <a:effectRef idx="0">
+            <a:schemeClr val="accent1"/>
+          </a:effectRef>
+          <a:fontRef idx="minor">
+            <a:schemeClr val="lt1"/>
+          </a:fontRef>
+        </p:style>
+        <p:txBody>
+          <a:bodyPr rtlCol="0" anchor="ctr"/>
+          <a:lstStyle/>
+          <a:p>
+            <a:pPr algn="ctr"/>
+            <a:endParaRPr kumimoji="1" lang="ja-JP" altLang="en-US"/>
+          </a:p>
+        </p:txBody>
+      </p:sp>
+      <p:cxnSp>
+        <p:nvCxnSpPr>
+          <p:cNvPr id="245" name="直線矢印コネクタ 244">
+            <a:extLst>
+              <a:ext uri="{FF2B5EF4-FFF2-40B4-BE49-F238E27FC236}">
+                <a16:creationId xmlns:a16="http://schemas.microsoft.com/office/drawing/2014/main" id="{22CE2F5B-231C-C1C0-17CF-0220162C5038}"/>
+              </a:ext>
+            </a:extLst>
+          </p:cNvPr>
+          <p:cNvCxnSpPr>
+            <a:cxnSpLocks/>
+          </p:cNvCxnSpPr>
+          <p:nvPr/>
+        </p:nvCxnSpPr>
+        <p:spPr>
+          <a:xfrm>
+            <a:off x="5533321" y="1918742"/>
+            <a:ext cx="2816746" cy="578"/>
+          </a:xfrm>
+          <a:prstGeom prst="straightConnector1">
+            <a:avLst/>
+          </a:prstGeom>
+          <a:ln w="28575">
+            <a:solidFill>
+              <a:schemeClr val="accent4">
+                <a:lumMod val="60000"/>
+                <a:lumOff val="40000"/>
+              </a:schemeClr>
+            </a:solidFill>
+            <a:tailEnd type="triangle"/>
+          </a:ln>
+        </p:spPr>
+        <p:style>
+          <a:lnRef idx="1">
+            <a:schemeClr val="accent1"/>
+          </a:lnRef>
+          <a:fillRef idx="0">
+            <a:schemeClr val="accent1"/>
+          </a:fillRef>
+          <a:effectRef idx="0">
+            <a:schemeClr val="accent1"/>
+          </a:effectRef>
+          <a:fontRef idx="minor">
+            <a:schemeClr val="tx1"/>
+          </a:fontRef>
+        </p:style>
+      </p:cxnSp>
+      <p:sp>
+        <p:nvSpPr>
+          <p:cNvPr id="246" name="楕円 245">
+            <a:extLst>
+              <a:ext uri="{FF2B5EF4-FFF2-40B4-BE49-F238E27FC236}">
+                <a16:creationId xmlns:a16="http://schemas.microsoft.com/office/drawing/2014/main" id="{0B1C7750-0385-FB13-8F55-2205FEDCC914}"/>
+              </a:ext>
+            </a:extLst>
+          </p:cNvPr>
+          <p:cNvSpPr/>
+          <p:nvPr/>
+        </p:nvSpPr>
+        <p:spPr>
+          <a:xfrm>
+            <a:off x="5505315" y="1885395"/>
+            <a:ext cx="66531" cy="69146"/>
+          </a:xfrm>
+          <a:prstGeom prst="ellipse">
+            <a:avLst/>
+          </a:prstGeom>
+          <a:solidFill>
+            <a:schemeClr val="tx1"/>
+          </a:solidFill>
+          <a:ln>
+            <a:solidFill>
+              <a:schemeClr val="bg1">
+                <a:lumMod val="65000"/>
+              </a:schemeClr>
+            </a:solidFill>
+          </a:ln>
+        </p:spPr>
+        <p:style>
+          <a:lnRef idx="2">
+            <a:schemeClr val="accent1">
+              <a:shade val="15000"/>
+            </a:schemeClr>
+          </a:lnRef>
+          <a:fillRef idx="1">
+            <a:schemeClr val="accent1"/>
+          </a:fillRef>
+          <a:effectRef idx="0">
+            <a:schemeClr val="accent1"/>
+          </a:effectRef>
+          <a:fontRef idx="minor">
+            <a:schemeClr val="lt1"/>
+          </a:fontRef>
+        </p:style>
+        <p:txBody>
+          <a:bodyPr rtlCol="0" anchor="ctr"/>
+          <a:lstStyle/>
+          <a:p>
+            <a:pPr algn="ctr"/>
+            <a:endParaRPr kumimoji="1" lang="ja-JP" altLang="en-US">
+              <a:solidFill>
+                <a:schemeClr val="tx1"/>
+              </a:solidFill>
+            </a:endParaRPr>
+          </a:p>
+        </p:txBody>
+      </p:sp>
+      <p:cxnSp>
+        <p:nvCxnSpPr>
+          <p:cNvPr id="250" name="直線コネクタ 249">
+            <a:extLst>
+              <a:ext uri="{FF2B5EF4-FFF2-40B4-BE49-F238E27FC236}">
+                <a16:creationId xmlns:a16="http://schemas.microsoft.com/office/drawing/2014/main" id="{36895232-F386-1A65-75D6-91311F08CEF2}"/>
+              </a:ext>
+            </a:extLst>
+          </p:cNvPr>
+          <p:cNvCxnSpPr>
+            <a:cxnSpLocks/>
+          </p:cNvCxnSpPr>
+          <p:nvPr/>
+        </p:nvCxnSpPr>
+        <p:spPr>
+          <a:xfrm flipV="1">
+            <a:off x="5822080" y="1696274"/>
+            <a:ext cx="740129" cy="493641"/>
+          </a:xfrm>
+          <a:prstGeom prst="line">
+            <a:avLst/>
+          </a:prstGeom>
+          <a:ln w="19050">
+            <a:solidFill>
+              <a:srgbClr val="FF0000"/>
+            </a:solidFill>
+          </a:ln>
+        </p:spPr>
+        <p:style>
+          <a:lnRef idx="1">
+            <a:schemeClr val="accent1"/>
+          </a:lnRef>
+          <a:fillRef idx="0">
+            <a:schemeClr val="accent1"/>
+          </a:fillRef>
+          <a:effectRef idx="0">
+            <a:schemeClr val="accent1"/>
+          </a:effectRef>
+          <a:fontRef idx="minor">
+            <a:schemeClr val="tx1"/>
+          </a:fontRef>
+        </p:style>
+      </p:cxnSp>
+      <p:sp>
+        <p:nvSpPr>
+          <p:cNvPr id="251" name="テキスト ボックス 250">
+            <a:extLst>
+              <a:ext uri="{FF2B5EF4-FFF2-40B4-BE49-F238E27FC236}">
+                <a16:creationId xmlns:a16="http://schemas.microsoft.com/office/drawing/2014/main" id="{D9E0AC30-D800-6FF8-E6B2-5C746CCD6F56}"/>
+              </a:ext>
+            </a:extLst>
+          </p:cNvPr>
+          <p:cNvSpPr txBox="1"/>
+          <p:nvPr/>
+        </p:nvSpPr>
+        <p:spPr>
+          <a:xfrm>
+            <a:off x="5738187" y="1579449"/>
+            <a:ext cx="268022" cy="369332"/>
+          </a:xfrm>
+          <a:prstGeom prst="rect">
+            <a:avLst/>
+          </a:prstGeom>
+          <a:noFill/>
+        </p:spPr>
+        <p:txBody>
+          <a:bodyPr wrap="none" rtlCol="0">
+            <a:spAutoFit/>
+          </a:bodyPr>
+          <a:lstStyle/>
+          <a:p>
+            <a:r>
+              <a:rPr kumimoji="1" lang="en-US" altLang="ja-JP" dirty="0"/>
+              <a:t>r</a:t>
+            </a:r>
+            <a:endParaRPr kumimoji="1" lang="ja-JP" altLang="en-US" dirty="0"/>
+          </a:p>
+        </p:txBody>
+      </p:sp>
+      <p:cxnSp>
+        <p:nvCxnSpPr>
+          <p:cNvPr id="252" name="直線矢印コネクタ 251">
+            <a:extLst>
+              <a:ext uri="{FF2B5EF4-FFF2-40B4-BE49-F238E27FC236}">
+                <a16:creationId xmlns:a16="http://schemas.microsoft.com/office/drawing/2014/main" id="{4F43FD67-DF37-492A-0AB3-A6A1F3ED2960}"/>
+              </a:ext>
+            </a:extLst>
+          </p:cNvPr>
+          <p:cNvCxnSpPr>
+            <a:cxnSpLocks/>
+          </p:cNvCxnSpPr>
+          <p:nvPr/>
+        </p:nvCxnSpPr>
+        <p:spPr>
+          <a:xfrm>
+            <a:off x="5538512" y="1859643"/>
+            <a:ext cx="672958" cy="4513"/>
+          </a:xfrm>
+          <a:prstGeom prst="straightConnector1">
+            <a:avLst/>
+          </a:prstGeom>
+          <a:ln>
+            <a:solidFill>
+              <a:schemeClr val="tx1"/>
+            </a:solidFill>
+            <a:headEnd type="triangle"/>
+            <a:tailEnd type="triangle"/>
+          </a:ln>
+        </p:spPr>
+        <p:style>
+          <a:lnRef idx="1">
+            <a:schemeClr val="accent1"/>
+          </a:lnRef>
+          <a:fillRef idx="0">
+            <a:schemeClr val="accent1"/>
+          </a:fillRef>
+          <a:effectRef idx="0">
+            <a:schemeClr val="accent1"/>
+          </a:effectRef>
+          <a:fontRef idx="minor">
+            <a:schemeClr val="tx1"/>
+          </a:fontRef>
+        </p:style>
+      </p:cxnSp>
+      <p:cxnSp>
+        <p:nvCxnSpPr>
+          <p:cNvPr id="249" name="直線矢印コネクタ 248">
+            <a:extLst>
+              <a:ext uri="{FF2B5EF4-FFF2-40B4-BE49-F238E27FC236}">
+                <a16:creationId xmlns:a16="http://schemas.microsoft.com/office/drawing/2014/main" id="{0BE8B31C-5BEE-DC75-77A6-5FB78D7040FD}"/>
+              </a:ext>
+            </a:extLst>
+          </p:cNvPr>
+          <p:cNvCxnSpPr>
+            <a:cxnSpLocks/>
+            <a:endCxn id="254" idx="4"/>
+          </p:cNvCxnSpPr>
+          <p:nvPr/>
+        </p:nvCxnSpPr>
+        <p:spPr>
+          <a:xfrm flipV="1">
+            <a:off x="5538584" y="1949553"/>
+            <a:ext cx="681670" cy="1310538"/>
+          </a:xfrm>
+          <a:prstGeom prst="straightConnector1">
+            <a:avLst/>
+          </a:prstGeom>
+          <a:ln w="28575">
+            <a:solidFill>
+              <a:schemeClr val="accent4">
+                <a:lumMod val="60000"/>
+                <a:lumOff val="40000"/>
+              </a:schemeClr>
+            </a:solidFill>
+            <a:tailEnd type="triangle"/>
+          </a:ln>
+        </p:spPr>
+        <p:style>
+          <a:lnRef idx="1">
+            <a:schemeClr val="accent1"/>
+          </a:lnRef>
+          <a:fillRef idx="0">
+            <a:schemeClr val="accent1"/>
+          </a:fillRef>
+          <a:effectRef idx="0">
+            <a:schemeClr val="accent1"/>
+          </a:effectRef>
+          <a:fontRef idx="minor">
+            <a:schemeClr val="tx1"/>
+          </a:fontRef>
+        </p:style>
+      </p:cxnSp>
+      <p:sp>
+        <p:nvSpPr>
+          <p:cNvPr id="254" name="楕円 253">
+            <a:extLst>
+              <a:ext uri="{FF2B5EF4-FFF2-40B4-BE49-F238E27FC236}">
+                <a16:creationId xmlns:a16="http://schemas.microsoft.com/office/drawing/2014/main" id="{1EF11AF3-1E48-72C5-E8B1-386BA91BEEF6}"/>
+              </a:ext>
+            </a:extLst>
+          </p:cNvPr>
+          <p:cNvSpPr/>
+          <p:nvPr/>
+        </p:nvSpPr>
+        <p:spPr>
+          <a:xfrm>
+            <a:off x="6193486" y="1895622"/>
+            <a:ext cx="53535" cy="53931"/>
+          </a:xfrm>
+          <a:prstGeom prst="ellipse">
+            <a:avLst/>
+          </a:prstGeom>
+          <a:solidFill>
+            <a:srgbClr val="7030A0"/>
+          </a:solidFill>
+          <a:ln>
+            <a:noFill/>
+          </a:ln>
+        </p:spPr>
+        <p:style>
+          <a:lnRef idx="2">
+            <a:schemeClr val="accent1">
+              <a:shade val="15000"/>
+            </a:schemeClr>
+          </a:lnRef>
+          <a:fillRef idx="1">
+            <a:schemeClr val="accent1"/>
+          </a:fillRef>
+          <a:effectRef idx="0">
+            <a:schemeClr val="accent1"/>
+          </a:effectRef>
+          <a:fontRef idx="minor">
+            <a:schemeClr val="lt1"/>
+          </a:fontRef>
+        </p:style>
+        <p:txBody>
+          <a:bodyPr rtlCol="0" anchor="ctr"/>
+          <a:lstStyle/>
+          <a:p>
+            <a:pPr algn="ctr"/>
+            <a:endParaRPr kumimoji="1" lang="ja-JP" altLang="en-US" dirty="0">
+              <a:solidFill>
+                <a:schemeClr val="tx1"/>
+              </a:solidFill>
+            </a:endParaRPr>
+          </a:p>
+        </p:txBody>
+      </p:sp>
+      <p:cxnSp>
+        <p:nvCxnSpPr>
+          <p:cNvPr id="278" name="直線矢印コネクタ 277">
+            <a:extLst>
+              <a:ext uri="{FF2B5EF4-FFF2-40B4-BE49-F238E27FC236}">
+                <a16:creationId xmlns:a16="http://schemas.microsoft.com/office/drawing/2014/main" id="{8DB75D4F-8743-0F46-6BA7-A464599A6E17}"/>
+              </a:ext>
+            </a:extLst>
+          </p:cNvPr>
+          <p:cNvCxnSpPr>
+            <a:cxnSpLocks/>
+          </p:cNvCxnSpPr>
+          <p:nvPr/>
+        </p:nvCxnSpPr>
+        <p:spPr>
+          <a:xfrm>
+            <a:off x="696493" y="4895113"/>
+            <a:ext cx="2714727" cy="592631"/>
+          </a:xfrm>
+          <a:prstGeom prst="straightConnector1">
+            <a:avLst/>
+          </a:prstGeom>
+          <a:ln w="28575">
+            <a:solidFill>
+              <a:schemeClr val="accent4">
+                <a:lumMod val="60000"/>
+                <a:lumOff val="40000"/>
+              </a:schemeClr>
+            </a:solidFill>
+            <a:tailEnd type="triangle"/>
+          </a:ln>
+        </p:spPr>
+        <p:style>
+          <a:lnRef idx="1">
+            <a:schemeClr val="accent1"/>
+          </a:lnRef>
+          <a:fillRef idx="0">
+            <a:schemeClr val="accent1"/>
+          </a:fillRef>
+          <a:effectRef idx="0">
+            <a:schemeClr val="accent1"/>
+          </a:effectRef>
+          <a:fontRef idx="minor">
+            <a:schemeClr val="tx1"/>
+          </a:fontRef>
+        </p:style>
+      </p:cxnSp>
+      <p:cxnSp>
+        <p:nvCxnSpPr>
+          <p:cNvPr id="279" name="直線コネクタ 278">
+            <a:extLst>
+              <a:ext uri="{FF2B5EF4-FFF2-40B4-BE49-F238E27FC236}">
+                <a16:creationId xmlns:a16="http://schemas.microsoft.com/office/drawing/2014/main" id="{ED2DE9A6-33F0-25AD-E114-F4DC9E7855AD}"/>
+              </a:ext>
+            </a:extLst>
+          </p:cNvPr>
+          <p:cNvCxnSpPr>
+            <a:cxnSpLocks/>
+          </p:cNvCxnSpPr>
+          <p:nvPr/>
+        </p:nvCxnSpPr>
+        <p:spPr>
+          <a:xfrm flipV="1">
+            <a:off x="777023" y="4880931"/>
+            <a:ext cx="824140" cy="204788"/>
+          </a:xfrm>
+          <a:prstGeom prst="line">
+            <a:avLst/>
+          </a:prstGeom>
+          <a:ln w="19050">
+            <a:solidFill>
+              <a:srgbClr val="FF0000"/>
+            </a:solidFill>
+          </a:ln>
+        </p:spPr>
+        <p:style>
+          <a:lnRef idx="1">
+            <a:schemeClr val="accent1"/>
+          </a:lnRef>
+          <a:fillRef idx="0">
+            <a:schemeClr val="accent1"/>
+          </a:fillRef>
+          <a:effectRef idx="0">
+            <a:schemeClr val="accent1"/>
+          </a:effectRef>
+          <a:fontRef idx="minor">
+            <a:schemeClr val="tx1"/>
+          </a:fontRef>
+        </p:style>
+      </p:cxnSp>
+      <p:sp>
+        <p:nvSpPr>
+          <p:cNvPr id="280" name="正方形/長方形 279">
+            <a:extLst>
+              <a:ext uri="{FF2B5EF4-FFF2-40B4-BE49-F238E27FC236}">
+                <a16:creationId xmlns:a16="http://schemas.microsoft.com/office/drawing/2014/main" id="{42636CAF-A5F4-27B7-D197-E3F6D5E0F72F}"/>
+              </a:ext>
+            </a:extLst>
+          </p:cNvPr>
+          <p:cNvSpPr/>
+          <p:nvPr/>
+        </p:nvSpPr>
+        <p:spPr>
+          <a:xfrm>
+            <a:off x="743007" y="5145772"/>
+            <a:ext cx="168146" cy="82550"/>
+          </a:xfrm>
+          <a:prstGeom prst="rect">
+            <a:avLst/>
+          </a:prstGeom>
+          <a:solidFill>
+            <a:schemeClr val="bg1"/>
+          </a:solidFill>
+          <a:ln>
+            <a:noFill/>
+          </a:ln>
+        </p:spPr>
+        <p:style>
+          <a:lnRef idx="2">
+            <a:schemeClr val="accent1">
+              <a:shade val="15000"/>
+            </a:schemeClr>
+          </a:lnRef>
+          <a:fillRef idx="1">
+            <a:schemeClr val="accent1"/>
+          </a:fillRef>
+          <a:effectRef idx="0">
+            <a:schemeClr val="accent1"/>
+          </a:effectRef>
+          <a:fontRef idx="minor">
+            <a:schemeClr val="lt1"/>
+          </a:fontRef>
+        </p:style>
+        <p:txBody>
+          <a:bodyPr rtlCol="0" anchor="ctr"/>
+          <a:lstStyle/>
+          <a:p>
+            <a:pPr algn="ctr"/>
+            <a:endParaRPr kumimoji="1" lang="ja-JP" altLang="en-US"/>
+          </a:p>
+        </p:txBody>
+      </p:sp>
+      <p:cxnSp>
+        <p:nvCxnSpPr>
+          <p:cNvPr id="281" name="直線コネクタ 280">
+            <a:extLst>
+              <a:ext uri="{FF2B5EF4-FFF2-40B4-BE49-F238E27FC236}">
+                <a16:creationId xmlns:a16="http://schemas.microsoft.com/office/drawing/2014/main" id="{6FCC0327-4553-F318-CC5C-9B17B9E041A6}"/>
+              </a:ext>
+            </a:extLst>
+          </p:cNvPr>
+          <p:cNvCxnSpPr>
+            <a:cxnSpLocks/>
+            <a:endCxn id="284" idx="2"/>
+          </p:cNvCxnSpPr>
+          <p:nvPr/>
+        </p:nvCxnSpPr>
+        <p:spPr>
+          <a:xfrm>
+            <a:off x="155851" y="6236460"/>
+            <a:ext cx="512636" cy="1"/>
+          </a:xfrm>
+          <a:prstGeom prst="line">
+            <a:avLst/>
+          </a:prstGeom>
+          <a:ln w="38100">
+            <a:solidFill>
+              <a:schemeClr val="tx1"/>
+            </a:solidFill>
+          </a:ln>
+        </p:spPr>
+        <p:style>
+          <a:lnRef idx="1">
+            <a:schemeClr val="accent1"/>
+          </a:lnRef>
+          <a:fillRef idx="0">
+            <a:schemeClr val="accent1"/>
+          </a:fillRef>
+          <a:effectRef idx="0">
+            <a:schemeClr val="accent1"/>
+          </a:effectRef>
+          <a:fontRef idx="minor">
+            <a:schemeClr val="tx1"/>
+          </a:fontRef>
+        </p:style>
+      </p:cxnSp>
+      <p:cxnSp>
+        <p:nvCxnSpPr>
+          <p:cNvPr id="282" name="直線矢印コネクタ 281">
+            <a:extLst>
+              <a:ext uri="{FF2B5EF4-FFF2-40B4-BE49-F238E27FC236}">
+                <a16:creationId xmlns:a16="http://schemas.microsoft.com/office/drawing/2014/main" id="{110177BE-B255-4FBB-5780-E10B53091357}"/>
+              </a:ext>
+            </a:extLst>
+          </p:cNvPr>
+          <p:cNvCxnSpPr>
+            <a:cxnSpLocks/>
+          </p:cNvCxnSpPr>
+          <p:nvPr/>
+        </p:nvCxnSpPr>
+        <p:spPr>
+          <a:xfrm>
+            <a:off x="701764" y="6236463"/>
+            <a:ext cx="3255493" cy="0"/>
+          </a:xfrm>
+          <a:prstGeom prst="straightConnector1">
+            <a:avLst/>
+          </a:prstGeom>
+          <a:ln w="38100">
+            <a:solidFill>
+              <a:schemeClr val="tx1"/>
+            </a:solidFill>
+            <a:tailEnd type="triangle"/>
+          </a:ln>
+        </p:spPr>
+        <p:style>
+          <a:lnRef idx="1">
+            <a:schemeClr val="accent1"/>
+          </a:lnRef>
+          <a:fillRef idx="0">
+            <a:schemeClr val="accent1"/>
+          </a:fillRef>
+          <a:effectRef idx="0">
+            <a:schemeClr val="accent1"/>
+          </a:effectRef>
+          <a:fontRef idx="minor">
+            <a:schemeClr val="tx1"/>
+          </a:fontRef>
+        </p:style>
+      </p:cxnSp>
+      <p:cxnSp>
+        <p:nvCxnSpPr>
+          <p:cNvPr id="283" name="直線矢印コネクタ 282">
+            <a:extLst>
+              <a:ext uri="{FF2B5EF4-FFF2-40B4-BE49-F238E27FC236}">
+                <a16:creationId xmlns:a16="http://schemas.microsoft.com/office/drawing/2014/main" id="{02CF8E75-282C-7514-FBD2-EEFACCE5BDCB}"/>
+              </a:ext>
+            </a:extLst>
+          </p:cNvPr>
+          <p:cNvCxnSpPr>
+            <a:cxnSpLocks/>
+            <a:stCxn id="287" idx="0"/>
+          </p:cNvCxnSpPr>
+          <p:nvPr/>
+        </p:nvCxnSpPr>
+        <p:spPr>
+          <a:xfrm flipV="1">
+            <a:off x="701756" y="4309065"/>
+            <a:ext cx="8" cy="2156612"/>
+          </a:xfrm>
+          <a:prstGeom prst="straightConnector1">
+            <a:avLst/>
+          </a:prstGeom>
+          <a:ln w="38100">
+            <a:solidFill>
+              <a:schemeClr val="tx1"/>
+            </a:solidFill>
+            <a:tailEnd type="triangle"/>
+          </a:ln>
+        </p:spPr>
+        <p:style>
+          <a:lnRef idx="1">
+            <a:schemeClr val="accent1"/>
+          </a:lnRef>
+          <a:fillRef idx="0">
+            <a:schemeClr val="accent1"/>
+          </a:fillRef>
+          <a:effectRef idx="0">
+            <a:schemeClr val="accent1"/>
+          </a:effectRef>
+          <a:fontRef idx="minor">
+            <a:schemeClr val="tx1"/>
+          </a:fontRef>
+        </p:style>
+      </p:cxnSp>
+      <p:sp>
+        <p:nvSpPr>
+          <p:cNvPr id="284" name="楕円 283">
+            <a:extLst>
+              <a:ext uri="{FF2B5EF4-FFF2-40B4-BE49-F238E27FC236}">
+                <a16:creationId xmlns:a16="http://schemas.microsoft.com/office/drawing/2014/main" id="{120B28AE-AC6D-6EC0-CAD3-E2E000FBA7C3}"/>
+              </a:ext>
+            </a:extLst>
+          </p:cNvPr>
+          <p:cNvSpPr/>
+          <p:nvPr/>
+        </p:nvSpPr>
+        <p:spPr>
+          <a:xfrm>
+            <a:off x="668487" y="6202231"/>
+            <a:ext cx="66531" cy="68459"/>
+          </a:xfrm>
+          <a:prstGeom prst="ellipse">
+            <a:avLst/>
+          </a:prstGeom>
+          <a:solidFill>
+            <a:schemeClr val="tx1"/>
+          </a:solidFill>
+          <a:ln>
+            <a:solidFill>
+              <a:schemeClr val="bg1">
+                <a:lumMod val="65000"/>
+              </a:schemeClr>
+            </a:solidFill>
+          </a:ln>
+        </p:spPr>
+        <p:style>
+          <a:lnRef idx="2">
+            <a:schemeClr val="accent1">
+              <a:shade val="15000"/>
+            </a:schemeClr>
+          </a:lnRef>
+          <a:fillRef idx="1">
+            <a:schemeClr val="accent1"/>
+          </a:fillRef>
+          <a:effectRef idx="0">
+            <a:schemeClr val="accent1"/>
+          </a:effectRef>
+          <a:fontRef idx="minor">
+            <a:schemeClr val="lt1"/>
+          </a:fontRef>
+        </p:style>
+        <p:txBody>
+          <a:bodyPr rtlCol="0" anchor="ctr"/>
+          <a:lstStyle/>
+          <a:p>
+            <a:pPr algn="ctr"/>
+            <a:endParaRPr kumimoji="1" lang="ja-JP" altLang="en-US" dirty="0">
+              <a:solidFill>
+                <a:schemeClr val="tx1"/>
+              </a:solidFill>
+            </a:endParaRPr>
+          </a:p>
+        </p:txBody>
+      </p:sp>
+      <p:sp>
+        <p:nvSpPr>
+          <p:cNvPr id="285" name="テキスト ボックス 284">
+            <a:extLst>
+              <a:ext uri="{FF2B5EF4-FFF2-40B4-BE49-F238E27FC236}">
+                <a16:creationId xmlns:a16="http://schemas.microsoft.com/office/drawing/2014/main" id="{BD9E0DDF-4D0B-F809-3A46-A707D20ED624}"/>
+              </a:ext>
+            </a:extLst>
+          </p:cNvPr>
+          <p:cNvSpPr txBox="1"/>
+          <p:nvPr/>
+        </p:nvSpPr>
+        <p:spPr>
+          <a:xfrm>
+            <a:off x="3812735" y="6189330"/>
+            <a:ext cx="308098" cy="369332"/>
+          </a:xfrm>
+          <a:prstGeom prst="rect">
+            <a:avLst/>
+          </a:prstGeom>
+          <a:noFill/>
+        </p:spPr>
+        <p:txBody>
+          <a:bodyPr wrap="none" rtlCol="0">
+            <a:spAutoFit/>
+          </a:bodyPr>
+          <a:lstStyle/>
+          <a:p>
+            <a:r>
+              <a:rPr kumimoji="1" lang="en-US" altLang="ja-JP" b="1" dirty="0"/>
+              <a:t>x</a:t>
+            </a:r>
+            <a:endParaRPr kumimoji="1" lang="ja-JP" altLang="en-US" b="1" dirty="0"/>
+          </a:p>
+        </p:txBody>
+      </p:sp>
+      <p:sp>
+        <p:nvSpPr>
+          <p:cNvPr id="286" name="テキスト ボックス 285">
+            <a:extLst>
+              <a:ext uri="{FF2B5EF4-FFF2-40B4-BE49-F238E27FC236}">
+                <a16:creationId xmlns:a16="http://schemas.microsoft.com/office/drawing/2014/main" id="{982320DF-AF7B-EAEA-575C-21BD18AD6E2A}"/>
+              </a:ext>
+            </a:extLst>
+          </p:cNvPr>
+          <p:cNvSpPr txBox="1"/>
+          <p:nvPr/>
+        </p:nvSpPr>
+        <p:spPr>
+          <a:xfrm>
+            <a:off x="393665" y="4167175"/>
+            <a:ext cx="308098" cy="369332"/>
+          </a:xfrm>
+          <a:prstGeom prst="rect">
+            <a:avLst/>
+          </a:prstGeom>
+          <a:noFill/>
+        </p:spPr>
+        <p:txBody>
+          <a:bodyPr wrap="none" rtlCol="0">
+            <a:spAutoFit/>
+          </a:bodyPr>
+          <a:lstStyle/>
+          <a:p>
+            <a:r>
+              <a:rPr lang="en-US" altLang="ja-JP" b="1" dirty="0"/>
+              <a:t>y</a:t>
+            </a:r>
+            <a:endParaRPr kumimoji="1" lang="ja-JP" altLang="en-US" b="1" dirty="0"/>
+          </a:p>
+        </p:txBody>
+      </p:sp>
+      <p:sp>
+        <p:nvSpPr>
+          <p:cNvPr id="287" name="矢印: 下 286">
+            <a:extLst>
+              <a:ext uri="{FF2B5EF4-FFF2-40B4-BE49-F238E27FC236}">
+                <a16:creationId xmlns:a16="http://schemas.microsoft.com/office/drawing/2014/main" id="{59DF1F11-F9E8-7FFC-CFCE-ECB62A883268}"/>
+              </a:ext>
+            </a:extLst>
+          </p:cNvPr>
+          <p:cNvSpPr/>
+          <p:nvPr/>
+        </p:nvSpPr>
+        <p:spPr>
+          <a:xfrm rot="10800000">
+            <a:off x="570957" y="6236462"/>
+            <a:ext cx="261599" cy="229215"/>
+          </a:xfrm>
+          <a:prstGeom prst="downArrow">
+            <a:avLst/>
+          </a:prstGeom>
+          <a:solidFill>
+            <a:schemeClr val="accent6">
+              <a:lumMod val="60000"/>
+              <a:lumOff val="40000"/>
+            </a:schemeClr>
+          </a:solidFill>
+          <a:ln>
+            <a:solidFill>
+              <a:schemeClr val="accent6">
+                <a:lumMod val="75000"/>
+              </a:schemeClr>
+            </a:solidFill>
+          </a:ln>
+        </p:spPr>
+        <p:style>
+          <a:lnRef idx="2">
+            <a:schemeClr val="accent1">
+              <a:shade val="15000"/>
+            </a:schemeClr>
+          </a:lnRef>
+          <a:fillRef idx="1">
+            <a:schemeClr val="accent1"/>
+          </a:fillRef>
+          <a:effectRef idx="0">
+            <a:schemeClr val="accent1"/>
+          </a:effectRef>
+          <a:fontRef idx="minor">
+            <a:schemeClr val="lt1"/>
+          </a:fontRef>
+        </p:style>
+        <p:txBody>
+          <a:bodyPr rtlCol="0" anchor="ctr"/>
+          <a:lstStyle/>
+          <a:p>
+            <a:pPr algn="ctr"/>
+            <a:endParaRPr kumimoji="1" lang="ja-JP" altLang="en-US"/>
+          </a:p>
+        </p:txBody>
+      </p:sp>
+      <p:sp>
+        <p:nvSpPr>
+          <p:cNvPr id="288" name="テキスト ボックス 287">
+            <a:extLst>
+              <a:ext uri="{FF2B5EF4-FFF2-40B4-BE49-F238E27FC236}">
+                <a16:creationId xmlns:a16="http://schemas.microsoft.com/office/drawing/2014/main" id="{C7CA835A-46DB-7B6A-5CC1-595B55E169EB}"/>
+              </a:ext>
+            </a:extLst>
+          </p:cNvPr>
+          <p:cNvSpPr txBox="1"/>
+          <p:nvPr/>
+        </p:nvSpPr>
+        <p:spPr>
+          <a:xfrm>
+            <a:off x="378061" y="6455773"/>
+            <a:ext cx="646331" cy="276999"/>
+          </a:xfrm>
+          <a:prstGeom prst="rect">
+            <a:avLst/>
+          </a:prstGeom>
+          <a:noFill/>
+        </p:spPr>
+        <p:txBody>
+          <a:bodyPr wrap="none" rtlCol="0">
+            <a:spAutoFit/>
+          </a:bodyPr>
+          <a:lstStyle/>
+          <a:p>
+            <a:r>
+              <a:rPr kumimoji="1" lang="ja-JP" altLang="en-US" sz="1200" dirty="0">
                 <a:highlight>
-                  <a:srgbClr val="8FAADC"/>
+                  <a:srgbClr val="00FF00"/>
                 </a:highlight>
-              </a:endParaRPr>
-            </a:p>
-          </p:txBody>
-        </p:sp>
-        <p:cxnSp>
-          <p:nvCxnSpPr>
-            <p:cNvPr id="64" name="直線矢印コネクタ 63">
-              <a:extLst>
-                <a:ext uri="{FF2B5EF4-FFF2-40B4-BE49-F238E27FC236}">
-                  <a16:creationId xmlns:a16="http://schemas.microsoft.com/office/drawing/2014/main" id="{99C81A06-036C-0BE7-A1AD-2055C107F808}"/>
-                </a:ext>
-              </a:extLst>
-            </p:cNvPr>
-            <p:cNvCxnSpPr>
-              <a:cxnSpLocks/>
-              <a:stCxn id="57" idx="2"/>
-            </p:cNvCxnSpPr>
-            <p:nvPr/>
-          </p:nvCxnSpPr>
-          <p:spPr>
-            <a:xfrm flipV="1">
-              <a:off x="1542545" y="955090"/>
-              <a:ext cx="454655" cy="1099307"/>
-            </a:xfrm>
-            <a:prstGeom prst="straightConnector1">
-              <a:avLst/>
-            </a:prstGeom>
-            <a:ln w="28575">
+              </a:rPr>
+              <a:t>カメラ</a:t>
+            </a:r>
+          </a:p>
+        </p:txBody>
+      </p:sp>
+      <p:sp>
+        <p:nvSpPr>
+          <p:cNvPr id="289" name="楕円 288">
+            <a:extLst>
+              <a:ext uri="{FF2B5EF4-FFF2-40B4-BE49-F238E27FC236}">
+                <a16:creationId xmlns:a16="http://schemas.microsoft.com/office/drawing/2014/main" id="{9F3C3256-5034-77E3-7E18-47E0A9520003}"/>
+              </a:ext>
+            </a:extLst>
+          </p:cNvPr>
+          <p:cNvSpPr/>
+          <p:nvPr/>
+        </p:nvSpPr>
+        <p:spPr>
+          <a:xfrm>
+            <a:off x="668487" y="4861766"/>
+            <a:ext cx="66531" cy="69146"/>
+          </a:xfrm>
+          <a:prstGeom prst="ellipse">
+            <a:avLst/>
+          </a:prstGeom>
+          <a:solidFill>
+            <a:schemeClr val="tx1"/>
+          </a:solidFill>
+          <a:ln>
+            <a:solidFill>
+              <a:schemeClr val="bg1">
+                <a:lumMod val="65000"/>
+              </a:schemeClr>
+            </a:solidFill>
+          </a:ln>
+        </p:spPr>
+        <p:style>
+          <a:lnRef idx="2">
+            <a:schemeClr val="accent1">
+              <a:shade val="15000"/>
+            </a:schemeClr>
+          </a:lnRef>
+          <a:fillRef idx="1">
+            <a:schemeClr val="accent1"/>
+          </a:fillRef>
+          <a:effectRef idx="0">
+            <a:schemeClr val="accent1"/>
+          </a:effectRef>
+          <a:fontRef idx="minor">
+            <a:schemeClr val="lt1"/>
+          </a:fontRef>
+        </p:style>
+        <p:txBody>
+          <a:bodyPr rtlCol="0" anchor="ctr"/>
+          <a:lstStyle/>
+          <a:p>
+            <a:pPr algn="ctr"/>
+            <a:endParaRPr kumimoji="1" lang="ja-JP" altLang="en-US">
               <a:solidFill>
-                <a:schemeClr val="accent4">
-                  <a:lumMod val="60000"/>
-                  <a:lumOff val="40000"/>
-                </a:schemeClr>
+                <a:schemeClr val="tx1"/>
               </a:solidFill>
-              <a:tailEnd type="triangle"/>
-            </a:ln>
-          </p:spPr>
-          <p:style>
-            <a:lnRef idx="1">
-              <a:schemeClr val="accent1"/>
-            </a:lnRef>
-            <a:fillRef idx="0">
-              <a:schemeClr val="accent1"/>
-            </a:fillRef>
-            <a:effectRef idx="0">
-              <a:schemeClr val="accent1"/>
-            </a:effectRef>
-            <a:fontRef idx="minor">
+            </a:endParaRPr>
+          </a:p>
+        </p:txBody>
+      </p:sp>
+      <p:cxnSp>
+        <p:nvCxnSpPr>
+          <p:cNvPr id="290" name="直線矢印コネクタ 289">
+            <a:extLst>
+              <a:ext uri="{FF2B5EF4-FFF2-40B4-BE49-F238E27FC236}">
+                <a16:creationId xmlns:a16="http://schemas.microsoft.com/office/drawing/2014/main" id="{75E7A955-3375-0E9D-3B03-342843B08FCE}"/>
+              </a:ext>
+            </a:extLst>
+          </p:cNvPr>
+          <p:cNvCxnSpPr>
+            <a:cxnSpLocks/>
+          </p:cNvCxnSpPr>
+          <p:nvPr/>
+        </p:nvCxnSpPr>
+        <p:spPr>
+          <a:xfrm>
+            <a:off x="497474" y="4904472"/>
+            <a:ext cx="0" cy="1316333"/>
+          </a:xfrm>
+          <a:prstGeom prst="straightConnector1">
+            <a:avLst/>
+          </a:prstGeom>
+          <a:ln>
+            <a:solidFill>
               <a:schemeClr val="tx1"/>
-            </a:fontRef>
-          </p:style>
-        </p:cxnSp>
-        <p:sp>
-          <p:nvSpPr>
-            <p:cNvPr id="181" name="テキスト ボックス 180">
-              <a:extLst>
-                <a:ext uri="{FF2B5EF4-FFF2-40B4-BE49-F238E27FC236}">
-                  <a16:creationId xmlns:a16="http://schemas.microsoft.com/office/drawing/2014/main" id="{D50351CF-FC15-6467-F5AF-4B4D51A6D085}"/>
-                </a:ext>
-              </a:extLst>
-            </p:cNvPr>
-            <p:cNvSpPr txBox="1"/>
-            <p:nvPr/>
-          </p:nvSpPr>
-          <p:spPr>
-            <a:xfrm>
-              <a:off x="1506723" y="751928"/>
-              <a:ext cx="319318" cy="369332"/>
-            </a:xfrm>
-            <a:prstGeom prst="rect">
-              <a:avLst/>
-            </a:prstGeom>
+            </a:solidFill>
+            <a:headEnd type="triangle"/>
+            <a:tailEnd type="triangle"/>
+          </a:ln>
+        </p:spPr>
+        <p:style>
+          <a:lnRef idx="1">
+            <a:schemeClr val="accent1"/>
+          </a:lnRef>
+          <a:fillRef idx="0">
+            <a:schemeClr val="accent1"/>
+          </a:fillRef>
+          <a:effectRef idx="0">
+            <a:schemeClr val="accent1"/>
+          </a:effectRef>
+          <a:fontRef idx="minor">
+            <a:schemeClr val="tx1"/>
+          </a:fontRef>
+        </p:style>
+      </p:cxnSp>
+      <p:sp>
+        <p:nvSpPr>
+          <p:cNvPr id="291" name="テキスト ボックス 290">
+            <a:extLst>
+              <a:ext uri="{FF2B5EF4-FFF2-40B4-BE49-F238E27FC236}">
+                <a16:creationId xmlns:a16="http://schemas.microsoft.com/office/drawing/2014/main" id="{F22F796D-23BF-0A2E-B71D-CFC89E694926}"/>
+              </a:ext>
+            </a:extLst>
+          </p:cNvPr>
+          <p:cNvSpPr txBox="1"/>
+          <p:nvPr/>
+        </p:nvSpPr>
+        <p:spPr>
+          <a:xfrm>
+            <a:off x="263840" y="5377972"/>
+            <a:ext cx="319318" cy="369332"/>
+          </a:xfrm>
+          <a:prstGeom prst="rect">
+            <a:avLst/>
+          </a:prstGeom>
+          <a:noFill/>
+        </p:spPr>
+        <p:txBody>
+          <a:bodyPr wrap="none" rtlCol="0">
+            <a:spAutoFit/>
+          </a:bodyPr>
+          <a:lstStyle/>
+          <a:p>
+            <a:r>
+              <a:rPr lang="en-US" altLang="ja-JP" dirty="0"/>
+              <a:t>h</a:t>
+            </a:r>
+            <a:endParaRPr kumimoji="1" lang="ja-JP" altLang="en-US" dirty="0"/>
+          </a:p>
+        </p:txBody>
+      </p:sp>
+      <p:cxnSp>
+        <p:nvCxnSpPr>
+          <p:cNvPr id="292" name="直線矢印コネクタ 291">
+            <a:extLst>
+              <a:ext uri="{FF2B5EF4-FFF2-40B4-BE49-F238E27FC236}">
+                <a16:creationId xmlns:a16="http://schemas.microsoft.com/office/drawing/2014/main" id="{58C2E249-75A1-B65A-BF59-19A3EAE1E5E2}"/>
+              </a:ext>
+            </a:extLst>
+          </p:cNvPr>
+          <p:cNvCxnSpPr>
+            <a:cxnSpLocks/>
+            <a:stCxn id="287" idx="2"/>
+            <a:endCxn id="293" idx="4"/>
+          </p:cNvCxnSpPr>
+          <p:nvPr/>
+        </p:nvCxnSpPr>
+        <p:spPr>
+          <a:xfrm flipV="1">
+            <a:off x="701756" y="5023062"/>
+            <a:ext cx="438782" cy="1213400"/>
+          </a:xfrm>
+          <a:prstGeom prst="straightConnector1">
+            <a:avLst/>
+          </a:prstGeom>
+          <a:ln w="28575">
+            <a:solidFill>
+              <a:schemeClr val="accent4">
+                <a:lumMod val="60000"/>
+                <a:lumOff val="40000"/>
+              </a:schemeClr>
+            </a:solidFill>
+            <a:tailEnd type="triangle"/>
+          </a:ln>
+        </p:spPr>
+        <p:style>
+          <a:lnRef idx="1">
+            <a:schemeClr val="accent1"/>
+          </a:lnRef>
+          <a:fillRef idx="0">
+            <a:schemeClr val="accent1"/>
+          </a:fillRef>
+          <a:effectRef idx="0">
+            <a:schemeClr val="accent1"/>
+          </a:effectRef>
+          <a:fontRef idx="minor">
+            <a:schemeClr val="tx1"/>
+          </a:fontRef>
+        </p:style>
+      </p:cxnSp>
+      <p:sp>
+        <p:nvSpPr>
+          <p:cNvPr id="293" name="楕円 292">
+            <a:extLst>
+              <a:ext uri="{FF2B5EF4-FFF2-40B4-BE49-F238E27FC236}">
+                <a16:creationId xmlns:a16="http://schemas.microsoft.com/office/drawing/2014/main" id="{3FEFE413-E9CB-CCA8-6907-7AE98E0205F2}"/>
+              </a:ext>
+            </a:extLst>
+          </p:cNvPr>
+          <p:cNvSpPr/>
+          <p:nvPr/>
+        </p:nvSpPr>
+        <p:spPr>
+          <a:xfrm>
+            <a:off x="1113770" y="4969131"/>
+            <a:ext cx="53535" cy="53931"/>
+          </a:xfrm>
+          <a:prstGeom prst="ellipse">
+            <a:avLst/>
+          </a:prstGeom>
+          <a:solidFill>
+            <a:srgbClr val="7030A0"/>
+          </a:solidFill>
+          <a:ln>
             <a:noFill/>
-          </p:spPr>
-          <p:txBody>
-            <a:bodyPr wrap="none" rtlCol="0">
-              <a:spAutoFit/>
-            </a:bodyPr>
-            <a:lstStyle/>
-            <a:p>
-              <a:r>
-                <a:rPr lang="en-US" altLang="ja-JP" dirty="0"/>
-                <a:t>b</a:t>
-              </a:r>
-              <a:endParaRPr kumimoji="1" lang="ja-JP" altLang="en-US" dirty="0"/>
-            </a:p>
-          </p:txBody>
-        </p:sp>
-        <p:sp>
-          <p:nvSpPr>
-            <p:cNvPr id="194" name="フリーフォーム: 図形 193">
-              <a:extLst>
-                <a:ext uri="{FF2B5EF4-FFF2-40B4-BE49-F238E27FC236}">
-                  <a16:creationId xmlns:a16="http://schemas.microsoft.com/office/drawing/2014/main" id="{D0A84184-451E-C0EA-D52B-BC0675955306}"/>
-                </a:ext>
-              </a:extLst>
-            </p:cNvPr>
-            <p:cNvSpPr/>
-            <p:nvPr/>
-          </p:nvSpPr>
-          <p:spPr>
-            <a:xfrm rot="21540000" flipH="1">
-              <a:off x="876609" y="714416"/>
-              <a:ext cx="657225" cy="340518"/>
-            </a:xfrm>
-            <a:custGeom>
-              <a:avLst/>
-              <a:gdLst>
-                <a:gd name="csX0" fmla="*/ 657225 w 657225"/>
-                <a:gd name="csY0" fmla="*/ 0 h 340518"/>
-                <a:gd name="csX1" fmla="*/ 452438 w 657225"/>
-                <a:gd name="csY1" fmla="*/ 228600 h 340518"/>
-                <a:gd name="csX2" fmla="*/ 0 w 657225"/>
-                <a:gd name="csY2" fmla="*/ 340518 h 340518"/>
-              </a:gdLst>
-              <a:ahLst/>
-              <a:cxnLst>
-                <a:cxn ang="0">
-                  <a:pos x="csX0" y="csY0"/>
-                </a:cxn>
-                <a:cxn ang="0">
-                  <a:pos x="csX1" y="csY1"/>
-                </a:cxn>
-                <a:cxn ang="0">
-                  <a:pos x="csX2" y="csY2"/>
-                </a:cxn>
-              </a:cxnLst>
-              <a:rect l="l" t="t" r="r" b="b"/>
-              <a:pathLst>
-                <a:path w="657225" h="340518">
-                  <a:moveTo>
-                    <a:pt x="657225" y="0"/>
-                  </a:moveTo>
-                  <a:cubicBezTo>
-                    <a:pt x="609600" y="85923"/>
-                    <a:pt x="561976" y="171847"/>
-                    <a:pt x="452438" y="228600"/>
-                  </a:cubicBezTo>
-                  <a:cubicBezTo>
-                    <a:pt x="342900" y="285353"/>
-                    <a:pt x="171450" y="312935"/>
-                    <a:pt x="0" y="340518"/>
-                  </a:cubicBezTo>
-                </a:path>
-              </a:pathLst>
-            </a:custGeom>
+          </a:ln>
+        </p:spPr>
+        <p:style>
+          <a:lnRef idx="2">
+            <a:schemeClr val="accent1">
+              <a:shade val="15000"/>
+            </a:schemeClr>
+          </a:lnRef>
+          <a:fillRef idx="1">
+            <a:schemeClr val="accent1"/>
+          </a:fillRef>
+          <a:effectRef idx="0">
+            <a:schemeClr val="accent1"/>
+          </a:effectRef>
+          <a:fontRef idx="minor">
+            <a:schemeClr val="lt1"/>
+          </a:fontRef>
+        </p:style>
+        <p:txBody>
+          <a:bodyPr rtlCol="0" anchor="ctr"/>
+          <a:lstStyle/>
+          <a:p>
+            <a:pPr algn="ctr"/>
+            <a:endParaRPr kumimoji="1" lang="ja-JP" altLang="en-US" dirty="0">
+              <a:solidFill>
+                <a:schemeClr val="tx1"/>
+              </a:solidFill>
+            </a:endParaRPr>
+          </a:p>
+        </p:txBody>
+      </p:sp>
+      <p:sp>
+        <p:nvSpPr>
+          <p:cNvPr id="295" name="正方形/長方形 294">
+            <a:extLst>
+              <a:ext uri="{FF2B5EF4-FFF2-40B4-BE49-F238E27FC236}">
+                <a16:creationId xmlns:a16="http://schemas.microsoft.com/office/drawing/2014/main" id="{71501ED6-6FA0-96A7-131B-A346AF69AC19}"/>
+              </a:ext>
+            </a:extLst>
+          </p:cNvPr>
+          <p:cNvSpPr/>
+          <p:nvPr/>
+        </p:nvSpPr>
+        <p:spPr>
+          <a:xfrm>
+            <a:off x="748755" y="5145332"/>
+            <a:ext cx="168146" cy="82550"/>
+          </a:xfrm>
+          <a:prstGeom prst="rect">
+            <a:avLst/>
+          </a:prstGeom>
+          <a:solidFill>
+            <a:schemeClr val="bg1"/>
+          </a:solidFill>
+          <a:ln>
             <a:noFill/>
-            <a:ln w="19050">
+          </a:ln>
+        </p:spPr>
+        <p:style>
+          <a:lnRef idx="2">
+            <a:schemeClr val="accent1">
+              <a:shade val="15000"/>
+            </a:schemeClr>
+          </a:lnRef>
+          <a:fillRef idx="1">
+            <a:schemeClr val="accent1"/>
+          </a:fillRef>
+          <a:effectRef idx="0">
+            <a:schemeClr val="accent1"/>
+          </a:effectRef>
+          <a:fontRef idx="minor">
+            <a:schemeClr val="lt1"/>
+          </a:fontRef>
+        </p:style>
+        <p:txBody>
+          <a:bodyPr rtlCol="0" anchor="ctr"/>
+          <a:lstStyle/>
+          <a:p>
+            <a:pPr algn="ctr"/>
+            <a:endParaRPr kumimoji="1" lang="ja-JP" altLang="en-US"/>
+          </a:p>
+        </p:txBody>
+      </p:sp>
+      <p:sp>
+        <p:nvSpPr>
+          <p:cNvPr id="297" name="楕円 296">
+            <a:extLst>
+              <a:ext uri="{FF2B5EF4-FFF2-40B4-BE49-F238E27FC236}">
+                <a16:creationId xmlns:a16="http://schemas.microsoft.com/office/drawing/2014/main" id="{679DB717-2DD7-9FA8-2B11-DE44BFD8963E}"/>
+              </a:ext>
+            </a:extLst>
+          </p:cNvPr>
+          <p:cNvSpPr/>
+          <p:nvPr/>
+        </p:nvSpPr>
+        <p:spPr>
+          <a:xfrm>
+            <a:off x="674235" y="4861326"/>
+            <a:ext cx="66531" cy="69146"/>
+          </a:xfrm>
+          <a:prstGeom prst="ellipse">
+            <a:avLst/>
+          </a:prstGeom>
+          <a:solidFill>
+            <a:schemeClr val="tx1"/>
+          </a:solidFill>
+          <a:ln>
+            <a:solidFill>
+              <a:schemeClr val="bg1">
+                <a:lumMod val="65000"/>
+              </a:schemeClr>
+            </a:solidFill>
+          </a:ln>
+        </p:spPr>
+        <p:style>
+          <a:lnRef idx="2">
+            <a:schemeClr val="accent1">
+              <a:shade val="15000"/>
+            </a:schemeClr>
+          </a:lnRef>
+          <a:fillRef idx="1">
+            <a:schemeClr val="accent1"/>
+          </a:fillRef>
+          <a:effectRef idx="0">
+            <a:schemeClr val="accent1"/>
+          </a:effectRef>
+          <a:fontRef idx="minor">
+            <a:schemeClr val="lt1"/>
+          </a:fontRef>
+        </p:style>
+        <p:txBody>
+          <a:bodyPr rtlCol="0" anchor="ctr"/>
+          <a:lstStyle/>
+          <a:p>
+            <a:pPr algn="ctr"/>
+            <a:endParaRPr kumimoji="1" lang="ja-JP" altLang="en-US">
               <a:solidFill>
-                <a:schemeClr val="accent1">
-                  <a:lumMod val="60000"/>
-                  <a:lumOff val="40000"/>
-                </a:schemeClr>
+                <a:schemeClr val="tx1"/>
               </a:solidFill>
-            </a:ln>
-          </p:spPr>
-          <p:style>
-            <a:lnRef idx="2">
+            </a:endParaRPr>
+          </a:p>
+        </p:txBody>
+      </p:sp>
+      <p:sp>
+        <p:nvSpPr>
+          <p:cNvPr id="305" name="正方形/長方形 304">
+            <a:extLst>
+              <a:ext uri="{FF2B5EF4-FFF2-40B4-BE49-F238E27FC236}">
+                <a16:creationId xmlns:a16="http://schemas.microsoft.com/office/drawing/2014/main" id="{D5A90184-77C4-FEEE-0CBE-403A4555D1D4}"/>
+              </a:ext>
+            </a:extLst>
+          </p:cNvPr>
+          <p:cNvSpPr/>
+          <p:nvPr/>
+        </p:nvSpPr>
+        <p:spPr>
+          <a:xfrm>
+            <a:off x="4804894" y="5185505"/>
+            <a:ext cx="168146" cy="82550"/>
+          </a:xfrm>
+          <a:prstGeom prst="rect">
+            <a:avLst/>
+          </a:prstGeom>
+          <a:solidFill>
+            <a:schemeClr val="bg1"/>
+          </a:solidFill>
+          <a:ln>
+            <a:noFill/>
+          </a:ln>
+        </p:spPr>
+        <p:style>
+          <a:lnRef idx="2">
+            <a:schemeClr val="accent1">
+              <a:shade val="15000"/>
+            </a:schemeClr>
+          </a:lnRef>
+          <a:fillRef idx="1">
+            <a:schemeClr val="accent1"/>
+          </a:fillRef>
+          <a:effectRef idx="0">
+            <a:schemeClr val="accent1"/>
+          </a:effectRef>
+          <a:fontRef idx="minor">
+            <a:schemeClr val="lt1"/>
+          </a:fontRef>
+        </p:style>
+        <p:txBody>
+          <a:bodyPr rtlCol="0" anchor="ctr"/>
+          <a:lstStyle/>
+          <a:p>
+            <a:pPr algn="ctr"/>
+            <a:endParaRPr kumimoji="1" lang="ja-JP" altLang="en-US"/>
+          </a:p>
+        </p:txBody>
+      </p:sp>
+      <p:cxnSp>
+        <p:nvCxnSpPr>
+          <p:cNvPr id="306" name="直線コネクタ 305">
+            <a:extLst>
+              <a:ext uri="{FF2B5EF4-FFF2-40B4-BE49-F238E27FC236}">
+                <a16:creationId xmlns:a16="http://schemas.microsoft.com/office/drawing/2014/main" id="{9B452E6F-19A5-878B-FC4A-7183B3D9D86B}"/>
+              </a:ext>
+            </a:extLst>
+          </p:cNvPr>
+          <p:cNvCxnSpPr>
+            <a:cxnSpLocks/>
+            <a:endCxn id="309" idx="2"/>
+          </p:cNvCxnSpPr>
+          <p:nvPr/>
+        </p:nvCxnSpPr>
+        <p:spPr>
+          <a:xfrm>
+            <a:off x="4217738" y="6276193"/>
+            <a:ext cx="512636" cy="1"/>
+          </a:xfrm>
+          <a:prstGeom prst="line">
+            <a:avLst/>
+          </a:prstGeom>
+          <a:ln w="38100">
+            <a:solidFill>
+              <a:schemeClr val="tx1"/>
+            </a:solidFill>
+          </a:ln>
+        </p:spPr>
+        <p:style>
+          <a:lnRef idx="1">
+            <a:schemeClr val="accent1"/>
+          </a:lnRef>
+          <a:fillRef idx="0">
+            <a:schemeClr val="accent1"/>
+          </a:fillRef>
+          <a:effectRef idx="0">
+            <a:schemeClr val="accent1"/>
+          </a:effectRef>
+          <a:fontRef idx="minor">
+            <a:schemeClr val="tx1"/>
+          </a:fontRef>
+        </p:style>
+      </p:cxnSp>
+      <p:cxnSp>
+        <p:nvCxnSpPr>
+          <p:cNvPr id="307" name="直線矢印コネクタ 306">
+            <a:extLst>
+              <a:ext uri="{FF2B5EF4-FFF2-40B4-BE49-F238E27FC236}">
+                <a16:creationId xmlns:a16="http://schemas.microsoft.com/office/drawing/2014/main" id="{8F422CBC-C400-33EE-9A07-0A62CFFCB355}"/>
+              </a:ext>
+            </a:extLst>
+          </p:cNvPr>
+          <p:cNvCxnSpPr>
+            <a:cxnSpLocks/>
+          </p:cNvCxnSpPr>
+          <p:nvPr/>
+        </p:nvCxnSpPr>
+        <p:spPr>
+          <a:xfrm>
+            <a:off x="4763651" y="6276196"/>
+            <a:ext cx="3255493" cy="0"/>
+          </a:xfrm>
+          <a:prstGeom prst="straightConnector1">
+            <a:avLst/>
+          </a:prstGeom>
+          <a:ln w="38100">
+            <a:solidFill>
+              <a:schemeClr val="tx1"/>
+            </a:solidFill>
+            <a:tailEnd type="triangle"/>
+          </a:ln>
+        </p:spPr>
+        <p:style>
+          <a:lnRef idx="1">
+            <a:schemeClr val="accent1"/>
+          </a:lnRef>
+          <a:fillRef idx="0">
+            <a:schemeClr val="accent1"/>
+          </a:fillRef>
+          <a:effectRef idx="0">
+            <a:schemeClr val="accent1"/>
+          </a:effectRef>
+          <a:fontRef idx="minor">
+            <a:schemeClr val="tx1"/>
+          </a:fontRef>
+        </p:style>
+      </p:cxnSp>
+      <p:cxnSp>
+        <p:nvCxnSpPr>
+          <p:cNvPr id="308" name="直線矢印コネクタ 307">
+            <a:extLst>
+              <a:ext uri="{FF2B5EF4-FFF2-40B4-BE49-F238E27FC236}">
+                <a16:creationId xmlns:a16="http://schemas.microsoft.com/office/drawing/2014/main" id="{EA391B53-220F-BDBF-9B19-67864ADB2855}"/>
+              </a:ext>
+            </a:extLst>
+          </p:cNvPr>
+          <p:cNvCxnSpPr>
+            <a:cxnSpLocks/>
+            <a:stCxn id="312" idx="0"/>
+          </p:cNvCxnSpPr>
+          <p:nvPr/>
+        </p:nvCxnSpPr>
+        <p:spPr>
+          <a:xfrm flipV="1">
+            <a:off x="4763643" y="4348798"/>
+            <a:ext cx="8" cy="2156612"/>
+          </a:xfrm>
+          <a:prstGeom prst="straightConnector1">
+            <a:avLst/>
+          </a:prstGeom>
+          <a:ln w="38100">
+            <a:solidFill>
+              <a:schemeClr val="tx1"/>
+            </a:solidFill>
+            <a:tailEnd type="triangle"/>
+          </a:ln>
+        </p:spPr>
+        <p:style>
+          <a:lnRef idx="1">
+            <a:schemeClr val="accent1"/>
+          </a:lnRef>
+          <a:fillRef idx="0">
+            <a:schemeClr val="accent1"/>
+          </a:fillRef>
+          <a:effectRef idx="0">
+            <a:schemeClr val="accent1"/>
+          </a:effectRef>
+          <a:fontRef idx="minor">
+            <a:schemeClr val="tx1"/>
+          </a:fontRef>
+        </p:style>
+      </p:cxnSp>
+      <p:sp>
+        <p:nvSpPr>
+          <p:cNvPr id="309" name="楕円 308">
+            <a:extLst>
+              <a:ext uri="{FF2B5EF4-FFF2-40B4-BE49-F238E27FC236}">
+                <a16:creationId xmlns:a16="http://schemas.microsoft.com/office/drawing/2014/main" id="{9E28D1B0-8015-F569-50AE-E465A4383083}"/>
+              </a:ext>
+            </a:extLst>
+          </p:cNvPr>
+          <p:cNvSpPr/>
+          <p:nvPr/>
+        </p:nvSpPr>
+        <p:spPr>
+          <a:xfrm>
+            <a:off x="4730374" y="6241964"/>
+            <a:ext cx="66531" cy="68459"/>
+          </a:xfrm>
+          <a:prstGeom prst="ellipse">
+            <a:avLst/>
+          </a:prstGeom>
+          <a:solidFill>
+            <a:schemeClr val="tx1"/>
+          </a:solidFill>
+          <a:ln>
+            <a:solidFill>
+              <a:schemeClr val="bg1">
+                <a:lumMod val="65000"/>
+              </a:schemeClr>
+            </a:solidFill>
+          </a:ln>
+        </p:spPr>
+        <p:style>
+          <a:lnRef idx="2">
+            <a:schemeClr val="accent1">
+              <a:shade val="15000"/>
+            </a:schemeClr>
+          </a:lnRef>
+          <a:fillRef idx="1">
+            <a:schemeClr val="accent1"/>
+          </a:fillRef>
+          <a:effectRef idx="0">
+            <a:schemeClr val="accent1"/>
+          </a:effectRef>
+          <a:fontRef idx="minor">
+            <a:schemeClr val="lt1"/>
+          </a:fontRef>
+        </p:style>
+        <p:txBody>
+          <a:bodyPr rtlCol="0" anchor="ctr"/>
+          <a:lstStyle/>
+          <a:p>
+            <a:pPr algn="ctr"/>
+            <a:endParaRPr kumimoji="1" lang="ja-JP" altLang="en-US" dirty="0">
+              <a:solidFill>
+                <a:schemeClr val="tx1"/>
+              </a:solidFill>
+            </a:endParaRPr>
+          </a:p>
+        </p:txBody>
+      </p:sp>
+      <p:sp>
+        <p:nvSpPr>
+          <p:cNvPr id="310" name="テキスト ボックス 309">
+            <a:extLst>
+              <a:ext uri="{FF2B5EF4-FFF2-40B4-BE49-F238E27FC236}">
+                <a16:creationId xmlns:a16="http://schemas.microsoft.com/office/drawing/2014/main" id="{4C9AFD6B-4F9B-2567-1A61-0F5B1F910C20}"/>
+              </a:ext>
+            </a:extLst>
+          </p:cNvPr>
+          <p:cNvSpPr txBox="1"/>
+          <p:nvPr/>
+        </p:nvSpPr>
+        <p:spPr>
+          <a:xfrm>
+            <a:off x="7874622" y="6229063"/>
+            <a:ext cx="308098" cy="369332"/>
+          </a:xfrm>
+          <a:prstGeom prst="rect">
+            <a:avLst/>
+          </a:prstGeom>
+          <a:noFill/>
+        </p:spPr>
+        <p:txBody>
+          <a:bodyPr wrap="none" rtlCol="0">
+            <a:spAutoFit/>
+          </a:bodyPr>
+          <a:lstStyle/>
+          <a:p>
+            <a:r>
+              <a:rPr kumimoji="1" lang="en-US" altLang="ja-JP" b="1" dirty="0"/>
+              <a:t>x</a:t>
+            </a:r>
+            <a:endParaRPr kumimoji="1" lang="ja-JP" altLang="en-US" b="1" dirty="0"/>
+          </a:p>
+        </p:txBody>
+      </p:sp>
+      <p:sp>
+        <p:nvSpPr>
+          <p:cNvPr id="311" name="テキスト ボックス 310">
+            <a:extLst>
+              <a:ext uri="{FF2B5EF4-FFF2-40B4-BE49-F238E27FC236}">
+                <a16:creationId xmlns:a16="http://schemas.microsoft.com/office/drawing/2014/main" id="{4B744B0A-5103-44C3-1968-BC12BA7BB25E}"/>
+              </a:ext>
+            </a:extLst>
+          </p:cNvPr>
+          <p:cNvSpPr txBox="1"/>
+          <p:nvPr/>
+        </p:nvSpPr>
+        <p:spPr>
+          <a:xfrm>
+            <a:off x="4455552" y="4206908"/>
+            <a:ext cx="308098" cy="369332"/>
+          </a:xfrm>
+          <a:prstGeom prst="rect">
+            <a:avLst/>
+          </a:prstGeom>
+          <a:noFill/>
+        </p:spPr>
+        <p:txBody>
+          <a:bodyPr wrap="none" rtlCol="0">
+            <a:spAutoFit/>
+          </a:bodyPr>
+          <a:lstStyle/>
+          <a:p>
+            <a:r>
+              <a:rPr lang="en-US" altLang="ja-JP" b="1" dirty="0"/>
+              <a:t>y</a:t>
+            </a:r>
+            <a:endParaRPr kumimoji="1" lang="ja-JP" altLang="en-US" b="1" dirty="0"/>
+          </a:p>
+        </p:txBody>
+      </p:sp>
+      <p:sp>
+        <p:nvSpPr>
+          <p:cNvPr id="312" name="矢印: 下 311">
+            <a:extLst>
+              <a:ext uri="{FF2B5EF4-FFF2-40B4-BE49-F238E27FC236}">
+                <a16:creationId xmlns:a16="http://schemas.microsoft.com/office/drawing/2014/main" id="{449B8662-19A4-A4E6-DD46-E87EC4F25B95}"/>
+              </a:ext>
+            </a:extLst>
+          </p:cNvPr>
+          <p:cNvSpPr/>
+          <p:nvPr/>
+        </p:nvSpPr>
+        <p:spPr>
+          <a:xfrm rot="10800000">
+            <a:off x="4632844" y="6276195"/>
+            <a:ext cx="261599" cy="229215"/>
+          </a:xfrm>
+          <a:prstGeom prst="downArrow">
+            <a:avLst/>
+          </a:prstGeom>
+          <a:solidFill>
+            <a:schemeClr val="accent6">
+              <a:lumMod val="60000"/>
+              <a:lumOff val="40000"/>
+            </a:schemeClr>
+          </a:solidFill>
+          <a:ln>
+            <a:solidFill>
+              <a:schemeClr val="accent6">
+                <a:lumMod val="75000"/>
+              </a:schemeClr>
+            </a:solidFill>
+          </a:ln>
+        </p:spPr>
+        <p:style>
+          <a:lnRef idx="2">
+            <a:schemeClr val="accent1">
+              <a:shade val="15000"/>
+            </a:schemeClr>
+          </a:lnRef>
+          <a:fillRef idx="1">
+            <a:schemeClr val="accent1"/>
+          </a:fillRef>
+          <a:effectRef idx="0">
+            <a:schemeClr val="accent1"/>
+          </a:effectRef>
+          <a:fontRef idx="minor">
+            <a:schemeClr val="lt1"/>
+          </a:fontRef>
+        </p:style>
+        <p:txBody>
+          <a:bodyPr rtlCol="0" anchor="ctr"/>
+          <a:lstStyle/>
+          <a:p>
+            <a:pPr algn="ctr"/>
+            <a:endParaRPr kumimoji="1" lang="ja-JP" altLang="en-US"/>
+          </a:p>
+        </p:txBody>
+      </p:sp>
+      <p:sp>
+        <p:nvSpPr>
+          <p:cNvPr id="313" name="テキスト ボックス 312">
+            <a:extLst>
+              <a:ext uri="{FF2B5EF4-FFF2-40B4-BE49-F238E27FC236}">
+                <a16:creationId xmlns:a16="http://schemas.microsoft.com/office/drawing/2014/main" id="{BA79C37B-47B3-2443-1C98-DE481273B3F9}"/>
+              </a:ext>
+            </a:extLst>
+          </p:cNvPr>
+          <p:cNvSpPr txBox="1"/>
+          <p:nvPr/>
+        </p:nvSpPr>
+        <p:spPr>
+          <a:xfrm>
+            <a:off x="4439948" y="6495506"/>
+            <a:ext cx="646331" cy="276999"/>
+          </a:xfrm>
+          <a:prstGeom prst="rect">
+            <a:avLst/>
+          </a:prstGeom>
+          <a:noFill/>
+        </p:spPr>
+        <p:txBody>
+          <a:bodyPr wrap="none" rtlCol="0">
+            <a:spAutoFit/>
+          </a:bodyPr>
+          <a:lstStyle/>
+          <a:p>
+            <a:r>
+              <a:rPr kumimoji="1" lang="ja-JP" altLang="en-US" sz="1200" dirty="0">
+                <a:highlight>
+                  <a:srgbClr val="00FF00"/>
+                </a:highlight>
+              </a:rPr>
+              <a:t>カメラ</a:t>
+            </a:r>
+          </a:p>
+        </p:txBody>
+      </p:sp>
+      <p:sp>
+        <p:nvSpPr>
+          <p:cNvPr id="314" name="楕円 313">
+            <a:extLst>
+              <a:ext uri="{FF2B5EF4-FFF2-40B4-BE49-F238E27FC236}">
+                <a16:creationId xmlns:a16="http://schemas.microsoft.com/office/drawing/2014/main" id="{2CB7A3F9-06D2-470E-6AAA-836BA04145DA}"/>
+              </a:ext>
+            </a:extLst>
+          </p:cNvPr>
+          <p:cNvSpPr/>
+          <p:nvPr/>
+        </p:nvSpPr>
+        <p:spPr>
+          <a:xfrm>
+            <a:off x="4730374" y="4901499"/>
+            <a:ext cx="66531" cy="69146"/>
+          </a:xfrm>
+          <a:prstGeom prst="ellipse">
+            <a:avLst/>
+          </a:prstGeom>
+          <a:solidFill>
+            <a:schemeClr val="tx1"/>
+          </a:solidFill>
+          <a:ln>
+            <a:solidFill>
+              <a:schemeClr val="bg1">
+                <a:lumMod val="65000"/>
+              </a:schemeClr>
+            </a:solidFill>
+          </a:ln>
+        </p:spPr>
+        <p:style>
+          <a:lnRef idx="2">
+            <a:schemeClr val="accent1">
+              <a:shade val="15000"/>
+            </a:schemeClr>
+          </a:lnRef>
+          <a:fillRef idx="1">
+            <a:schemeClr val="accent1"/>
+          </a:fillRef>
+          <a:effectRef idx="0">
+            <a:schemeClr val="accent1"/>
+          </a:effectRef>
+          <a:fontRef idx="minor">
+            <a:schemeClr val="lt1"/>
+          </a:fontRef>
+        </p:style>
+        <p:txBody>
+          <a:bodyPr rtlCol="0" anchor="ctr"/>
+          <a:lstStyle/>
+          <a:p>
+            <a:pPr algn="ctr"/>
+            <a:endParaRPr kumimoji="1" lang="ja-JP" altLang="en-US">
+              <a:solidFill>
+                <a:schemeClr val="tx1"/>
+              </a:solidFill>
+            </a:endParaRPr>
+          </a:p>
+        </p:txBody>
+      </p:sp>
+      <p:cxnSp>
+        <p:nvCxnSpPr>
+          <p:cNvPr id="315" name="直線矢印コネクタ 314">
+            <a:extLst>
+              <a:ext uri="{FF2B5EF4-FFF2-40B4-BE49-F238E27FC236}">
+                <a16:creationId xmlns:a16="http://schemas.microsoft.com/office/drawing/2014/main" id="{2D738188-5BEC-F58D-588E-322373816120}"/>
+              </a:ext>
+            </a:extLst>
+          </p:cNvPr>
+          <p:cNvCxnSpPr>
+            <a:cxnSpLocks/>
+          </p:cNvCxnSpPr>
+          <p:nvPr/>
+        </p:nvCxnSpPr>
+        <p:spPr>
+          <a:xfrm>
+            <a:off x="4559361" y="4944205"/>
+            <a:ext cx="0" cy="1316333"/>
+          </a:xfrm>
+          <a:prstGeom prst="straightConnector1">
+            <a:avLst/>
+          </a:prstGeom>
+          <a:ln>
+            <a:solidFill>
+              <a:schemeClr val="tx1"/>
+            </a:solidFill>
+            <a:headEnd type="triangle"/>
+            <a:tailEnd type="triangle"/>
+          </a:ln>
+        </p:spPr>
+        <p:style>
+          <a:lnRef idx="1">
+            <a:schemeClr val="accent1"/>
+          </a:lnRef>
+          <a:fillRef idx="0">
+            <a:schemeClr val="accent1"/>
+          </a:fillRef>
+          <a:effectRef idx="0">
+            <a:schemeClr val="accent1"/>
+          </a:effectRef>
+          <a:fontRef idx="minor">
+            <a:schemeClr val="tx1"/>
+          </a:fontRef>
+        </p:style>
+      </p:cxnSp>
+      <p:sp>
+        <p:nvSpPr>
+          <p:cNvPr id="316" name="テキスト ボックス 315">
+            <a:extLst>
+              <a:ext uri="{FF2B5EF4-FFF2-40B4-BE49-F238E27FC236}">
+                <a16:creationId xmlns:a16="http://schemas.microsoft.com/office/drawing/2014/main" id="{81677804-D8B8-FF69-1178-6561C9476CCB}"/>
+              </a:ext>
+            </a:extLst>
+          </p:cNvPr>
+          <p:cNvSpPr txBox="1"/>
+          <p:nvPr/>
+        </p:nvSpPr>
+        <p:spPr>
+          <a:xfrm>
+            <a:off x="4325727" y="5417705"/>
+            <a:ext cx="319318" cy="369332"/>
+          </a:xfrm>
+          <a:prstGeom prst="rect">
+            <a:avLst/>
+          </a:prstGeom>
+          <a:noFill/>
+        </p:spPr>
+        <p:txBody>
+          <a:bodyPr wrap="none" rtlCol="0">
+            <a:spAutoFit/>
+          </a:bodyPr>
+          <a:lstStyle/>
+          <a:p>
+            <a:r>
+              <a:rPr lang="en-US" altLang="ja-JP" dirty="0"/>
+              <a:t>h</a:t>
+            </a:r>
+            <a:endParaRPr kumimoji="1" lang="ja-JP" altLang="en-US" dirty="0"/>
+          </a:p>
+        </p:txBody>
+      </p:sp>
+      <p:cxnSp>
+        <p:nvCxnSpPr>
+          <p:cNvPr id="319" name="直線コネクタ 318">
+            <a:extLst>
+              <a:ext uri="{FF2B5EF4-FFF2-40B4-BE49-F238E27FC236}">
+                <a16:creationId xmlns:a16="http://schemas.microsoft.com/office/drawing/2014/main" id="{7B4EE279-B6D5-5F37-59BD-00BFB4CD2BF8}"/>
+              </a:ext>
+            </a:extLst>
+          </p:cNvPr>
+          <p:cNvCxnSpPr>
+            <a:cxnSpLocks/>
+            <a:endCxn id="322" idx="6"/>
+          </p:cNvCxnSpPr>
+          <p:nvPr/>
+        </p:nvCxnSpPr>
+        <p:spPr>
+          <a:xfrm flipH="1" flipV="1">
+            <a:off x="4802653" y="4935632"/>
+            <a:ext cx="638141" cy="3567"/>
+          </a:xfrm>
+          <a:prstGeom prst="line">
+            <a:avLst/>
+          </a:prstGeom>
+          <a:ln w="19050">
+            <a:solidFill>
+              <a:srgbClr val="8FAADC"/>
+            </a:solidFill>
+          </a:ln>
+        </p:spPr>
+        <p:style>
+          <a:lnRef idx="1">
+            <a:schemeClr val="accent1"/>
+          </a:lnRef>
+          <a:fillRef idx="0">
+            <a:schemeClr val="accent1"/>
+          </a:fillRef>
+          <a:effectRef idx="0">
+            <a:schemeClr val="accent1"/>
+          </a:effectRef>
+          <a:fontRef idx="minor">
+            <a:schemeClr val="tx1"/>
+          </a:fontRef>
+        </p:style>
+      </p:cxnSp>
+      <p:sp>
+        <p:nvSpPr>
+          <p:cNvPr id="320" name="正方形/長方形 319">
+            <a:extLst>
+              <a:ext uri="{FF2B5EF4-FFF2-40B4-BE49-F238E27FC236}">
+                <a16:creationId xmlns:a16="http://schemas.microsoft.com/office/drawing/2014/main" id="{77A00418-7D08-40D9-5495-2D6E9888E4F2}"/>
+              </a:ext>
+            </a:extLst>
+          </p:cNvPr>
+          <p:cNvSpPr/>
+          <p:nvPr/>
+        </p:nvSpPr>
+        <p:spPr>
+          <a:xfrm>
+            <a:off x="4810642" y="5185065"/>
+            <a:ext cx="168146" cy="82550"/>
+          </a:xfrm>
+          <a:prstGeom prst="rect">
+            <a:avLst/>
+          </a:prstGeom>
+          <a:solidFill>
+            <a:schemeClr val="bg1"/>
+          </a:solidFill>
+          <a:ln>
+            <a:noFill/>
+          </a:ln>
+        </p:spPr>
+        <p:style>
+          <a:lnRef idx="2">
+            <a:schemeClr val="accent1">
+              <a:shade val="15000"/>
+            </a:schemeClr>
+          </a:lnRef>
+          <a:fillRef idx="1">
+            <a:schemeClr val="accent1"/>
+          </a:fillRef>
+          <a:effectRef idx="0">
+            <a:schemeClr val="accent1"/>
+          </a:effectRef>
+          <a:fontRef idx="minor">
+            <a:schemeClr val="lt1"/>
+          </a:fontRef>
+        </p:style>
+        <p:txBody>
+          <a:bodyPr rtlCol="0" anchor="ctr"/>
+          <a:lstStyle/>
+          <a:p>
+            <a:pPr algn="ctr"/>
+            <a:endParaRPr kumimoji="1" lang="ja-JP" altLang="en-US"/>
+          </a:p>
+        </p:txBody>
+      </p:sp>
+      <p:cxnSp>
+        <p:nvCxnSpPr>
+          <p:cNvPr id="321" name="直線矢印コネクタ 320">
+            <a:extLst>
+              <a:ext uri="{FF2B5EF4-FFF2-40B4-BE49-F238E27FC236}">
+                <a16:creationId xmlns:a16="http://schemas.microsoft.com/office/drawing/2014/main" id="{FDA37671-68BF-069E-67B8-2E980784B40F}"/>
+              </a:ext>
+            </a:extLst>
+          </p:cNvPr>
+          <p:cNvCxnSpPr>
+            <a:cxnSpLocks/>
+          </p:cNvCxnSpPr>
+          <p:nvPr/>
+        </p:nvCxnSpPr>
+        <p:spPr>
+          <a:xfrm>
+            <a:off x="4764128" y="4934406"/>
+            <a:ext cx="2816746" cy="578"/>
+          </a:xfrm>
+          <a:prstGeom prst="straightConnector1">
+            <a:avLst/>
+          </a:prstGeom>
+          <a:ln w="28575">
+            <a:solidFill>
+              <a:schemeClr val="accent4">
+                <a:lumMod val="60000"/>
+                <a:lumOff val="40000"/>
+              </a:schemeClr>
+            </a:solidFill>
+            <a:tailEnd type="triangle"/>
+          </a:ln>
+        </p:spPr>
+        <p:style>
+          <a:lnRef idx="1">
+            <a:schemeClr val="accent1"/>
+          </a:lnRef>
+          <a:fillRef idx="0">
+            <a:schemeClr val="accent1"/>
+          </a:fillRef>
+          <a:effectRef idx="0">
+            <a:schemeClr val="accent1"/>
+          </a:effectRef>
+          <a:fontRef idx="minor">
+            <a:schemeClr val="tx1"/>
+          </a:fontRef>
+        </p:style>
+      </p:cxnSp>
+      <p:sp>
+        <p:nvSpPr>
+          <p:cNvPr id="322" name="楕円 321">
+            <a:extLst>
+              <a:ext uri="{FF2B5EF4-FFF2-40B4-BE49-F238E27FC236}">
+                <a16:creationId xmlns:a16="http://schemas.microsoft.com/office/drawing/2014/main" id="{70F471CF-F49E-B22F-0206-8A5CEFEFE5A2}"/>
+              </a:ext>
+            </a:extLst>
+          </p:cNvPr>
+          <p:cNvSpPr/>
+          <p:nvPr/>
+        </p:nvSpPr>
+        <p:spPr>
+          <a:xfrm>
+            <a:off x="4736122" y="4901059"/>
+            <a:ext cx="66531" cy="69146"/>
+          </a:xfrm>
+          <a:prstGeom prst="ellipse">
+            <a:avLst/>
+          </a:prstGeom>
+          <a:solidFill>
+            <a:schemeClr val="tx1"/>
+          </a:solidFill>
+          <a:ln>
+            <a:solidFill>
+              <a:schemeClr val="bg1">
+                <a:lumMod val="65000"/>
+              </a:schemeClr>
+            </a:solidFill>
+          </a:ln>
+        </p:spPr>
+        <p:style>
+          <a:lnRef idx="2">
+            <a:schemeClr val="accent1">
+              <a:shade val="15000"/>
+            </a:schemeClr>
+          </a:lnRef>
+          <a:fillRef idx="1">
+            <a:schemeClr val="accent1"/>
+          </a:fillRef>
+          <a:effectRef idx="0">
+            <a:schemeClr val="accent1"/>
+          </a:effectRef>
+          <a:fontRef idx="minor">
+            <a:schemeClr val="lt1"/>
+          </a:fontRef>
+        </p:style>
+        <p:txBody>
+          <a:bodyPr rtlCol="0" anchor="ctr"/>
+          <a:lstStyle/>
+          <a:p>
+            <a:pPr algn="ctr"/>
+            <a:endParaRPr kumimoji="1" lang="ja-JP" altLang="en-US">
+              <a:solidFill>
+                <a:schemeClr val="tx1"/>
+              </a:solidFill>
+            </a:endParaRPr>
+          </a:p>
+        </p:txBody>
+      </p:sp>
+      <p:cxnSp>
+        <p:nvCxnSpPr>
+          <p:cNvPr id="323" name="直線コネクタ 322">
+            <a:extLst>
+              <a:ext uri="{FF2B5EF4-FFF2-40B4-BE49-F238E27FC236}">
+                <a16:creationId xmlns:a16="http://schemas.microsoft.com/office/drawing/2014/main" id="{AFCBC582-9A23-C488-320E-4417D7C332B0}"/>
+              </a:ext>
+            </a:extLst>
+          </p:cNvPr>
+          <p:cNvCxnSpPr>
+            <a:cxnSpLocks/>
+          </p:cNvCxnSpPr>
+          <p:nvPr/>
+        </p:nvCxnSpPr>
+        <p:spPr>
+          <a:xfrm flipV="1">
+            <a:off x="5052887" y="4711938"/>
+            <a:ext cx="740129" cy="493641"/>
+          </a:xfrm>
+          <a:prstGeom prst="line">
+            <a:avLst/>
+          </a:prstGeom>
+          <a:ln w="19050">
+            <a:solidFill>
+              <a:srgbClr val="FF0000"/>
+            </a:solidFill>
+          </a:ln>
+        </p:spPr>
+        <p:style>
+          <a:lnRef idx="1">
+            <a:schemeClr val="accent1"/>
+          </a:lnRef>
+          <a:fillRef idx="0">
+            <a:schemeClr val="accent1"/>
+          </a:fillRef>
+          <a:effectRef idx="0">
+            <a:schemeClr val="accent1"/>
+          </a:effectRef>
+          <a:fontRef idx="minor">
+            <a:schemeClr val="tx1"/>
+          </a:fontRef>
+        </p:style>
+      </p:cxnSp>
+      <p:sp>
+        <p:nvSpPr>
+          <p:cNvPr id="324" name="テキスト ボックス 323">
+            <a:extLst>
+              <a:ext uri="{FF2B5EF4-FFF2-40B4-BE49-F238E27FC236}">
+                <a16:creationId xmlns:a16="http://schemas.microsoft.com/office/drawing/2014/main" id="{07FD34E6-6866-48D2-37DB-E12282345E2A}"/>
+              </a:ext>
+            </a:extLst>
+          </p:cNvPr>
+          <p:cNvSpPr txBox="1"/>
+          <p:nvPr/>
+        </p:nvSpPr>
+        <p:spPr>
+          <a:xfrm>
+            <a:off x="4968994" y="4595113"/>
+            <a:ext cx="268022" cy="369332"/>
+          </a:xfrm>
+          <a:prstGeom prst="rect">
+            <a:avLst/>
+          </a:prstGeom>
+          <a:noFill/>
+        </p:spPr>
+        <p:txBody>
+          <a:bodyPr wrap="none" rtlCol="0">
+            <a:spAutoFit/>
+          </a:bodyPr>
+          <a:lstStyle/>
+          <a:p>
+            <a:r>
+              <a:rPr kumimoji="1" lang="en-US" altLang="ja-JP" dirty="0"/>
+              <a:t>r</a:t>
+            </a:r>
+            <a:endParaRPr kumimoji="1" lang="ja-JP" altLang="en-US" dirty="0"/>
+          </a:p>
+        </p:txBody>
+      </p:sp>
+      <p:cxnSp>
+        <p:nvCxnSpPr>
+          <p:cNvPr id="325" name="直線矢印コネクタ 324">
+            <a:extLst>
+              <a:ext uri="{FF2B5EF4-FFF2-40B4-BE49-F238E27FC236}">
+                <a16:creationId xmlns:a16="http://schemas.microsoft.com/office/drawing/2014/main" id="{39B805DC-E10D-2DDE-31A0-FD2A53464E22}"/>
+              </a:ext>
+            </a:extLst>
+          </p:cNvPr>
+          <p:cNvCxnSpPr>
+            <a:cxnSpLocks/>
+          </p:cNvCxnSpPr>
+          <p:nvPr/>
+        </p:nvCxnSpPr>
+        <p:spPr>
+          <a:xfrm>
+            <a:off x="4769319" y="4875307"/>
+            <a:ext cx="672958" cy="4513"/>
+          </a:xfrm>
+          <a:prstGeom prst="straightConnector1">
+            <a:avLst/>
+          </a:prstGeom>
+          <a:ln>
+            <a:solidFill>
+              <a:schemeClr val="tx1"/>
+            </a:solidFill>
+            <a:headEnd type="triangle"/>
+            <a:tailEnd type="triangle"/>
+          </a:ln>
+        </p:spPr>
+        <p:style>
+          <a:lnRef idx="1">
+            <a:schemeClr val="accent1"/>
+          </a:lnRef>
+          <a:fillRef idx="0">
+            <a:schemeClr val="accent1"/>
+          </a:fillRef>
+          <a:effectRef idx="0">
+            <a:schemeClr val="accent1"/>
+          </a:effectRef>
+          <a:fontRef idx="minor">
+            <a:schemeClr val="tx1"/>
+          </a:fontRef>
+        </p:style>
+      </p:cxnSp>
+      <p:cxnSp>
+        <p:nvCxnSpPr>
+          <p:cNvPr id="326" name="直線矢印コネクタ 325">
+            <a:extLst>
+              <a:ext uri="{FF2B5EF4-FFF2-40B4-BE49-F238E27FC236}">
+                <a16:creationId xmlns:a16="http://schemas.microsoft.com/office/drawing/2014/main" id="{8CB7EE8D-6443-D73D-03B0-1AB424A2D70B}"/>
+              </a:ext>
+            </a:extLst>
+          </p:cNvPr>
+          <p:cNvCxnSpPr>
+            <a:cxnSpLocks/>
+            <a:endCxn id="327" idx="4"/>
+          </p:cNvCxnSpPr>
+          <p:nvPr/>
+        </p:nvCxnSpPr>
+        <p:spPr>
+          <a:xfrm flipV="1">
+            <a:off x="4769391" y="4965217"/>
+            <a:ext cx="681670" cy="1310538"/>
+          </a:xfrm>
+          <a:prstGeom prst="straightConnector1">
+            <a:avLst/>
+          </a:prstGeom>
+          <a:ln w="28575">
+            <a:solidFill>
+              <a:schemeClr val="accent4">
+                <a:lumMod val="60000"/>
+                <a:lumOff val="40000"/>
+              </a:schemeClr>
+            </a:solidFill>
+            <a:tailEnd type="triangle"/>
+          </a:ln>
+        </p:spPr>
+        <p:style>
+          <a:lnRef idx="1">
+            <a:schemeClr val="accent1"/>
+          </a:lnRef>
+          <a:fillRef idx="0">
+            <a:schemeClr val="accent1"/>
+          </a:fillRef>
+          <a:effectRef idx="0">
+            <a:schemeClr val="accent1"/>
+          </a:effectRef>
+          <a:fontRef idx="minor">
+            <a:schemeClr val="tx1"/>
+          </a:fontRef>
+        </p:style>
+      </p:cxnSp>
+      <p:sp>
+        <p:nvSpPr>
+          <p:cNvPr id="327" name="楕円 326">
+            <a:extLst>
+              <a:ext uri="{FF2B5EF4-FFF2-40B4-BE49-F238E27FC236}">
+                <a16:creationId xmlns:a16="http://schemas.microsoft.com/office/drawing/2014/main" id="{7ED71AF7-55C1-907A-3ECB-0ABFEC14F784}"/>
+              </a:ext>
+            </a:extLst>
+          </p:cNvPr>
+          <p:cNvSpPr/>
+          <p:nvPr/>
+        </p:nvSpPr>
+        <p:spPr>
+          <a:xfrm>
+            <a:off x="5424293" y="4911286"/>
+            <a:ext cx="53535" cy="53931"/>
+          </a:xfrm>
+          <a:prstGeom prst="ellipse">
+            <a:avLst/>
+          </a:prstGeom>
+          <a:solidFill>
+            <a:srgbClr val="7030A0"/>
+          </a:solidFill>
+          <a:ln>
+            <a:noFill/>
+          </a:ln>
+        </p:spPr>
+        <p:style>
+          <a:lnRef idx="2">
+            <a:schemeClr val="accent1">
+              <a:shade val="15000"/>
+            </a:schemeClr>
+          </a:lnRef>
+          <a:fillRef idx="1">
+            <a:schemeClr val="accent1"/>
+          </a:fillRef>
+          <a:effectRef idx="0">
+            <a:schemeClr val="accent1"/>
+          </a:effectRef>
+          <a:fontRef idx="minor">
+            <a:schemeClr val="lt1"/>
+          </a:fontRef>
+        </p:style>
+        <p:txBody>
+          <a:bodyPr rtlCol="0" anchor="ctr"/>
+          <a:lstStyle/>
+          <a:p>
+            <a:pPr algn="ctr"/>
+            <a:endParaRPr kumimoji="1" lang="ja-JP" altLang="en-US" dirty="0">
+              <a:solidFill>
+                <a:schemeClr val="tx1"/>
+              </a:solidFill>
+            </a:endParaRPr>
+          </a:p>
+        </p:txBody>
+      </p:sp>
+      <p:cxnSp>
+        <p:nvCxnSpPr>
+          <p:cNvPr id="337" name="直線コネクタ 336">
+            <a:extLst>
+              <a:ext uri="{FF2B5EF4-FFF2-40B4-BE49-F238E27FC236}">
+                <a16:creationId xmlns:a16="http://schemas.microsoft.com/office/drawing/2014/main" id="{2822B3EE-3CA6-97F8-623F-3EE24631DC1B}"/>
+              </a:ext>
+            </a:extLst>
+          </p:cNvPr>
+          <p:cNvCxnSpPr>
+            <a:cxnSpLocks/>
+            <a:stCxn id="345" idx="0"/>
+            <a:endCxn id="343" idx="2"/>
+          </p:cNvCxnSpPr>
+          <p:nvPr/>
+        </p:nvCxnSpPr>
+        <p:spPr>
+          <a:xfrm flipV="1">
+            <a:off x="938095" y="3082631"/>
+            <a:ext cx="635588" cy="5903"/>
+          </a:xfrm>
+          <a:prstGeom prst="line">
+            <a:avLst/>
+          </a:prstGeom>
+          <a:ln w="19050">
+            <a:solidFill>
+              <a:srgbClr val="8FAADC"/>
+            </a:solidFill>
+          </a:ln>
+        </p:spPr>
+        <p:style>
+          <a:lnRef idx="1">
+            <a:schemeClr val="accent1"/>
+          </a:lnRef>
+          <a:fillRef idx="0">
+            <a:schemeClr val="accent1"/>
+          </a:fillRef>
+          <a:effectRef idx="0">
+            <a:schemeClr val="accent1"/>
+          </a:effectRef>
+          <a:fontRef idx="minor">
+            <a:schemeClr val="tx1"/>
+          </a:fontRef>
+        </p:style>
+      </p:cxnSp>
+      <p:cxnSp>
+        <p:nvCxnSpPr>
+          <p:cNvPr id="338" name="直線コネクタ 337">
+            <a:extLst>
+              <a:ext uri="{FF2B5EF4-FFF2-40B4-BE49-F238E27FC236}">
+                <a16:creationId xmlns:a16="http://schemas.microsoft.com/office/drawing/2014/main" id="{38218036-D022-4339-E7C0-CCF2988837D2}"/>
+              </a:ext>
+            </a:extLst>
+          </p:cNvPr>
+          <p:cNvCxnSpPr>
+            <a:cxnSpLocks/>
+            <a:endCxn id="343" idx="6"/>
+          </p:cNvCxnSpPr>
+          <p:nvPr/>
+        </p:nvCxnSpPr>
+        <p:spPr>
+          <a:xfrm flipH="1" flipV="1">
+            <a:off x="1640214" y="3082631"/>
+            <a:ext cx="638141" cy="3567"/>
+          </a:xfrm>
+          <a:prstGeom prst="line">
+            <a:avLst/>
+          </a:prstGeom>
+          <a:ln w="19050">
+            <a:solidFill>
+              <a:srgbClr val="8FAADC"/>
+            </a:solidFill>
+          </a:ln>
+        </p:spPr>
+        <p:style>
+          <a:lnRef idx="1">
+            <a:schemeClr val="accent1"/>
+          </a:lnRef>
+          <a:fillRef idx="0">
+            <a:schemeClr val="accent1"/>
+          </a:fillRef>
+          <a:effectRef idx="0">
+            <a:schemeClr val="accent1"/>
+          </a:effectRef>
+          <a:fontRef idx="minor">
+            <a:schemeClr val="tx1"/>
+          </a:fontRef>
+        </p:style>
+      </p:cxnSp>
+      <p:sp>
+        <p:nvSpPr>
+          <p:cNvPr id="340" name="正方形/長方形 339">
+            <a:extLst>
+              <a:ext uri="{FF2B5EF4-FFF2-40B4-BE49-F238E27FC236}">
+                <a16:creationId xmlns:a16="http://schemas.microsoft.com/office/drawing/2014/main" id="{40136C94-03B6-A569-FA5A-B5159868B893}"/>
+              </a:ext>
+            </a:extLst>
+          </p:cNvPr>
+          <p:cNvSpPr/>
+          <p:nvPr/>
+        </p:nvSpPr>
+        <p:spPr>
+          <a:xfrm>
+            <a:off x="1648203" y="3332064"/>
+            <a:ext cx="168146" cy="82550"/>
+          </a:xfrm>
+          <a:prstGeom prst="rect">
+            <a:avLst/>
+          </a:prstGeom>
+          <a:solidFill>
+            <a:schemeClr val="bg1"/>
+          </a:solidFill>
+          <a:ln>
+            <a:noFill/>
+          </a:ln>
+        </p:spPr>
+        <p:style>
+          <a:lnRef idx="2">
+            <a:schemeClr val="accent1">
+              <a:shade val="15000"/>
+            </a:schemeClr>
+          </a:lnRef>
+          <a:fillRef idx="1">
+            <a:schemeClr val="accent1"/>
+          </a:fillRef>
+          <a:effectRef idx="0">
+            <a:schemeClr val="accent1"/>
+          </a:effectRef>
+          <a:fontRef idx="minor">
+            <a:schemeClr val="lt1"/>
+          </a:fontRef>
+        </p:style>
+        <p:txBody>
+          <a:bodyPr rtlCol="0" anchor="ctr"/>
+          <a:lstStyle/>
+          <a:p>
+            <a:pPr algn="ctr"/>
+            <a:endParaRPr kumimoji="1" lang="ja-JP" altLang="en-US"/>
+          </a:p>
+        </p:txBody>
+      </p:sp>
+      <p:sp>
+        <p:nvSpPr>
+          <p:cNvPr id="343" name="楕円 342">
+            <a:extLst>
+              <a:ext uri="{FF2B5EF4-FFF2-40B4-BE49-F238E27FC236}">
+                <a16:creationId xmlns:a16="http://schemas.microsoft.com/office/drawing/2014/main" id="{C9287DDC-4D68-E712-6CBD-6E8C92DA9614}"/>
+              </a:ext>
+            </a:extLst>
+          </p:cNvPr>
+          <p:cNvSpPr/>
+          <p:nvPr/>
+        </p:nvSpPr>
+        <p:spPr>
+          <a:xfrm>
+            <a:off x="1573683" y="3048058"/>
+            <a:ext cx="66531" cy="69146"/>
+          </a:xfrm>
+          <a:prstGeom prst="ellipse">
+            <a:avLst/>
+          </a:prstGeom>
+          <a:solidFill>
+            <a:schemeClr val="tx1"/>
+          </a:solidFill>
+          <a:ln>
+            <a:solidFill>
+              <a:schemeClr val="bg1">
+                <a:lumMod val="65000"/>
+              </a:schemeClr>
+            </a:solidFill>
+          </a:ln>
+        </p:spPr>
+        <p:style>
+          <a:lnRef idx="2">
+            <a:schemeClr val="accent1">
+              <a:shade val="15000"/>
+            </a:schemeClr>
+          </a:lnRef>
+          <a:fillRef idx="1">
+            <a:schemeClr val="accent1"/>
+          </a:fillRef>
+          <a:effectRef idx="0">
+            <a:schemeClr val="accent1"/>
+          </a:effectRef>
+          <a:fontRef idx="minor">
+            <a:schemeClr val="lt1"/>
+          </a:fontRef>
+        </p:style>
+        <p:txBody>
+          <a:bodyPr rtlCol="0" anchor="ctr"/>
+          <a:lstStyle/>
+          <a:p>
+            <a:pPr algn="ctr"/>
+            <a:endParaRPr kumimoji="1" lang="ja-JP" altLang="en-US">
+              <a:solidFill>
+                <a:schemeClr val="tx1"/>
+              </a:solidFill>
+            </a:endParaRPr>
+          </a:p>
+        </p:txBody>
+      </p:sp>
+      <p:sp>
+        <p:nvSpPr>
+          <p:cNvPr id="345" name="フリーフォーム: 図形 344">
+            <a:extLst>
+              <a:ext uri="{FF2B5EF4-FFF2-40B4-BE49-F238E27FC236}">
+                <a16:creationId xmlns:a16="http://schemas.microsoft.com/office/drawing/2014/main" id="{9FB8F475-75B4-7CA1-A780-B67496A2A63E}"/>
+              </a:ext>
+            </a:extLst>
+          </p:cNvPr>
+          <p:cNvSpPr/>
+          <p:nvPr/>
+        </p:nvSpPr>
+        <p:spPr>
+          <a:xfrm rot="21540000" flipH="1">
+            <a:off x="941016" y="3082773"/>
+            <a:ext cx="657225" cy="340518"/>
+          </a:xfrm>
+          <a:custGeom>
+            <a:avLst/>
+            <a:gdLst>
+              <a:gd name="csX0" fmla="*/ 657225 w 657225"/>
+              <a:gd name="csY0" fmla="*/ 0 h 340518"/>
+              <a:gd name="csX1" fmla="*/ 452438 w 657225"/>
+              <a:gd name="csY1" fmla="*/ 228600 h 340518"/>
+              <a:gd name="csX2" fmla="*/ 0 w 657225"/>
+              <a:gd name="csY2" fmla="*/ 340518 h 340518"/>
+            </a:gdLst>
+            <a:ahLst/>
+            <a:cxnLst>
+              <a:cxn ang="0">
+                <a:pos x="csX0" y="csY0"/>
+              </a:cxn>
+              <a:cxn ang="0">
+                <a:pos x="csX1" y="csY1"/>
+              </a:cxn>
+              <a:cxn ang="0">
+                <a:pos x="csX2" y="csY2"/>
+              </a:cxn>
+            </a:cxnLst>
+            <a:rect l="l" t="t" r="r" b="b"/>
+            <a:pathLst>
+              <a:path w="657225" h="340518">
+                <a:moveTo>
+                  <a:pt x="657225" y="0"/>
+                </a:moveTo>
+                <a:cubicBezTo>
+                  <a:pt x="609600" y="85923"/>
+                  <a:pt x="561976" y="171847"/>
+                  <a:pt x="452438" y="228600"/>
+                </a:cubicBezTo>
+                <a:cubicBezTo>
+                  <a:pt x="342900" y="285353"/>
+                  <a:pt x="171450" y="312935"/>
+                  <a:pt x="0" y="340518"/>
+                </a:cubicBezTo>
+              </a:path>
+            </a:pathLst>
+          </a:custGeom>
+          <a:noFill/>
+          <a:ln w="19050">
+            <a:solidFill>
               <a:schemeClr val="accent1">
-                <a:shade val="15000"/>
+                <a:lumMod val="60000"/>
+                <a:lumOff val="40000"/>
               </a:schemeClr>
-            </a:lnRef>
-            <a:fillRef idx="1">
-              <a:schemeClr val="accent1"/>
-            </a:fillRef>
-            <a:effectRef idx="0">
-              <a:schemeClr val="accent1"/>
-            </a:effectRef>
-            <a:fontRef idx="minor">
-              <a:schemeClr val="lt1"/>
-            </a:fontRef>
-          </p:style>
-          <p:txBody>
-            <a:bodyPr rtlCol="0" anchor="ctr"/>
-            <a:lstStyle/>
-            <a:p>
-              <a:pPr algn="ctr"/>
-              <a:endParaRPr kumimoji="1" lang="ja-JP" altLang="en-US" dirty="0"/>
-            </a:p>
-          </p:txBody>
-        </p:sp>
-        <p:sp>
-          <p:nvSpPr>
-            <p:cNvPr id="202" name="フリーフォーム: 図形 201">
-              <a:extLst>
-                <a:ext uri="{FF2B5EF4-FFF2-40B4-BE49-F238E27FC236}">
-                  <a16:creationId xmlns:a16="http://schemas.microsoft.com/office/drawing/2014/main" id="{EED629D2-7114-D10B-8E1D-E1746D42A027}"/>
-                </a:ext>
-              </a:extLst>
-            </p:cNvPr>
-            <p:cNvSpPr/>
-            <p:nvPr/>
-          </p:nvSpPr>
-          <p:spPr>
-            <a:xfrm rot="60000">
-              <a:off x="1555285" y="713026"/>
-              <a:ext cx="657225" cy="340518"/>
-            </a:xfrm>
-            <a:custGeom>
-              <a:avLst/>
-              <a:gdLst>
-                <a:gd name="csX0" fmla="*/ 657225 w 657225"/>
-                <a:gd name="csY0" fmla="*/ 0 h 340518"/>
-                <a:gd name="csX1" fmla="*/ 452438 w 657225"/>
-                <a:gd name="csY1" fmla="*/ 228600 h 340518"/>
-                <a:gd name="csX2" fmla="*/ 0 w 657225"/>
-                <a:gd name="csY2" fmla="*/ 340518 h 340518"/>
-              </a:gdLst>
-              <a:ahLst/>
-              <a:cxnLst>
-                <a:cxn ang="0">
-                  <a:pos x="csX0" y="csY0"/>
-                </a:cxn>
-                <a:cxn ang="0">
-                  <a:pos x="csX1" y="csY1"/>
-                </a:cxn>
-                <a:cxn ang="0">
-                  <a:pos x="csX2" y="csY2"/>
-                </a:cxn>
-              </a:cxnLst>
-              <a:rect l="l" t="t" r="r" b="b"/>
-              <a:pathLst>
-                <a:path w="657225" h="340518">
-                  <a:moveTo>
-                    <a:pt x="657225" y="0"/>
-                  </a:moveTo>
-                  <a:cubicBezTo>
-                    <a:pt x="609600" y="85923"/>
-                    <a:pt x="561976" y="171847"/>
-                    <a:pt x="452438" y="228600"/>
-                  </a:cubicBezTo>
-                  <a:cubicBezTo>
-                    <a:pt x="342900" y="285353"/>
-                    <a:pt x="171450" y="312935"/>
-                    <a:pt x="0" y="340518"/>
-                  </a:cubicBezTo>
-                </a:path>
-              </a:pathLst>
-            </a:custGeom>
+            </a:solidFill>
+          </a:ln>
+        </p:spPr>
+        <p:style>
+          <a:lnRef idx="2">
+            <a:schemeClr val="accent1">
+              <a:shade val="15000"/>
+            </a:schemeClr>
+          </a:lnRef>
+          <a:fillRef idx="1">
+            <a:schemeClr val="accent1"/>
+          </a:fillRef>
+          <a:effectRef idx="0">
+            <a:schemeClr val="accent1"/>
+          </a:effectRef>
+          <a:fontRef idx="minor">
+            <a:schemeClr val="lt1"/>
+          </a:fontRef>
+        </p:style>
+        <p:txBody>
+          <a:bodyPr rtlCol="0" anchor="ctr"/>
+          <a:lstStyle/>
+          <a:p>
+            <a:pPr algn="ctr"/>
+            <a:endParaRPr kumimoji="1" lang="ja-JP" altLang="en-US" dirty="0"/>
+          </a:p>
+        </p:txBody>
+      </p:sp>
+      <p:sp>
+        <p:nvSpPr>
+          <p:cNvPr id="346" name="フリーフォーム: 図形 345">
+            <a:extLst>
+              <a:ext uri="{FF2B5EF4-FFF2-40B4-BE49-F238E27FC236}">
+                <a16:creationId xmlns:a16="http://schemas.microsoft.com/office/drawing/2014/main" id="{C3310B3F-C4D2-267C-F879-78E1B0688474}"/>
+              </a:ext>
+            </a:extLst>
+          </p:cNvPr>
+          <p:cNvSpPr/>
+          <p:nvPr/>
+        </p:nvSpPr>
+        <p:spPr>
+          <a:xfrm rot="60000">
+            <a:off x="1619692" y="3081383"/>
+            <a:ext cx="657225" cy="340518"/>
+          </a:xfrm>
+          <a:custGeom>
+            <a:avLst/>
+            <a:gdLst>
+              <a:gd name="csX0" fmla="*/ 657225 w 657225"/>
+              <a:gd name="csY0" fmla="*/ 0 h 340518"/>
+              <a:gd name="csX1" fmla="*/ 452438 w 657225"/>
+              <a:gd name="csY1" fmla="*/ 228600 h 340518"/>
+              <a:gd name="csX2" fmla="*/ 0 w 657225"/>
+              <a:gd name="csY2" fmla="*/ 340518 h 340518"/>
+            </a:gdLst>
+            <a:ahLst/>
+            <a:cxnLst>
+              <a:cxn ang="0">
+                <a:pos x="csX0" y="csY0"/>
+              </a:cxn>
+              <a:cxn ang="0">
+                <a:pos x="csX1" y="csY1"/>
+              </a:cxn>
+              <a:cxn ang="0">
+                <a:pos x="csX2" y="csY2"/>
+              </a:cxn>
+            </a:cxnLst>
+            <a:rect l="l" t="t" r="r" b="b"/>
+            <a:pathLst>
+              <a:path w="657225" h="340518">
+                <a:moveTo>
+                  <a:pt x="657225" y="0"/>
+                </a:moveTo>
+                <a:cubicBezTo>
+                  <a:pt x="609600" y="85923"/>
+                  <a:pt x="561976" y="171847"/>
+                  <a:pt x="452438" y="228600"/>
+                </a:cubicBezTo>
+                <a:cubicBezTo>
+                  <a:pt x="342900" y="285353"/>
+                  <a:pt x="171450" y="312935"/>
+                  <a:pt x="0" y="340518"/>
+                </a:cubicBezTo>
+              </a:path>
+            </a:pathLst>
+          </a:custGeom>
+          <a:noFill/>
+          <a:ln w="19050">
+            <a:solidFill>
+              <a:schemeClr val="accent1">
+                <a:lumMod val="60000"/>
+                <a:lumOff val="40000"/>
+              </a:schemeClr>
+            </a:solidFill>
+          </a:ln>
+        </p:spPr>
+        <p:style>
+          <a:lnRef idx="2">
+            <a:schemeClr val="accent1">
+              <a:shade val="15000"/>
+            </a:schemeClr>
+          </a:lnRef>
+          <a:fillRef idx="1">
+            <a:schemeClr val="accent1"/>
+          </a:fillRef>
+          <a:effectRef idx="0">
+            <a:schemeClr val="accent1"/>
+          </a:effectRef>
+          <a:fontRef idx="minor">
+            <a:schemeClr val="lt1"/>
+          </a:fontRef>
+        </p:style>
+        <p:txBody>
+          <a:bodyPr rtlCol="0" anchor="ctr"/>
+          <a:lstStyle/>
+          <a:p>
+            <a:pPr algn="ctr"/>
+            <a:endParaRPr kumimoji="1" lang="ja-JP" altLang="en-US" dirty="0"/>
+          </a:p>
+        </p:txBody>
+      </p:sp>
+      <p:sp>
+        <p:nvSpPr>
+          <p:cNvPr id="349" name="楕円 348">
+            <a:extLst>
+              <a:ext uri="{FF2B5EF4-FFF2-40B4-BE49-F238E27FC236}">
+                <a16:creationId xmlns:a16="http://schemas.microsoft.com/office/drawing/2014/main" id="{95BF2F5B-C616-A866-1A5D-781CBC5E0885}"/>
+              </a:ext>
+            </a:extLst>
+          </p:cNvPr>
+          <p:cNvSpPr/>
+          <p:nvPr/>
+        </p:nvSpPr>
+        <p:spPr>
+          <a:xfrm>
+            <a:off x="6105552" y="1951669"/>
+            <a:ext cx="53535" cy="53931"/>
+          </a:xfrm>
+          <a:prstGeom prst="ellipse">
+            <a:avLst/>
+          </a:prstGeom>
+          <a:solidFill>
+            <a:srgbClr val="7030A0"/>
+          </a:solidFill>
+          <a:ln>
             <a:noFill/>
-            <a:ln w="19050">
+          </a:ln>
+        </p:spPr>
+        <p:style>
+          <a:lnRef idx="2">
+            <a:schemeClr val="accent1">
+              <a:shade val="15000"/>
+            </a:schemeClr>
+          </a:lnRef>
+          <a:fillRef idx="1">
+            <a:schemeClr val="accent1"/>
+          </a:fillRef>
+          <a:effectRef idx="0">
+            <a:schemeClr val="accent1"/>
+          </a:effectRef>
+          <a:fontRef idx="minor">
+            <a:schemeClr val="lt1"/>
+          </a:fontRef>
+        </p:style>
+        <p:txBody>
+          <a:bodyPr rtlCol="0" anchor="ctr"/>
+          <a:lstStyle/>
+          <a:p>
+            <a:pPr algn="ctr"/>
+            <a:endParaRPr kumimoji="1" lang="ja-JP" altLang="en-US" dirty="0">
               <a:solidFill>
-                <a:schemeClr val="accent1">
-                  <a:lumMod val="60000"/>
-                  <a:lumOff val="40000"/>
-                </a:schemeClr>
+                <a:schemeClr val="tx1"/>
               </a:solidFill>
-            </a:ln>
-          </p:spPr>
-          <p:style>
-            <a:lnRef idx="2">
-              <a:schemeClr val="accent1">
-                <a:shade val="15000"/>
-              </a:schemeClr>
-            </a:lnRef>
-            <a:fillRef idx="1">
-              <a:schemeClr val="accent1"/>
-            </a:fillRef>
-            <a:effectRef idx="0">
-              <a:schemeClr val="accent1"/>
-            </a:effectRef>
-            <a:fontRef idx="minor">
-              <a:schemeClr val="lt1"/>
-            </a:fontRef>
-          </p:style>
-          <p:txBody>
-            <a:bodyPr rtlCol="0" anchor="ctr"/>
-            <a:lstStyle/>
-            <a:p>
-              <a:pPr algn="ctr"/>
-              <a:endParaRPr kumimoji="1" lang="ja-JP" altLang="en-US" dirty="0"/>
-            </a:p>
-          </p:txBody>
-        </p:sp>
-        <p:cxnSp>
-          <p:nvCxnSpPr>
-            <p:cNvPr id="52" name="直線コネクタ 51">
-              <a:extLst>
-                <a:ext uri="{FF2B5EF4-FFF2-40B4-BE49-F238E27FC236}">
-                  <a16:creationId xmlns:a16="http://schemas.microsoft.com/office/drawing/2014/main" id="{C5AA0556-ACCD-4C97-9E30-290C642F3455}"/>
-                </a:ext>
-              </a:extLst>
-            </p:cNvPr>
-            <p:cNvCxnSpPr>
-              <a:cxnSpLocks/>
-            </p:cNvCxnSpPr>
-            <p:nvPr/>
-          </p:nvCxnSpPr>
-          <p:spPr>
-            <a:xfrm flipV="1">
-              <a:off x="1429616" y="361098"/>
-              <a:ext cx="1929067" cy="832637"/>
-            </a:xfrm>
-            <a:prstGeom prst="line">
-              <a:avLst/>
-            </a:prstGeom>
-            <a:ln w="19050">
-              <a:solidFill>
-                <a:srgbClr val="FF0000"/>
-              </a:solidFill>
-            </a:ln>
-          </p:spPr>
-          <p:style>
-            <a:lnRef idx="1">
-              <a:schemeClr val="accent1"/>
-            </a:lnRef>
-            <a:fillRef idx="0">
-              <a:schemeClr val="accent1"/>
-            </a:fillRef>
-            <a:effectRef idx="0">
-              <a:schemeClr val="accent1"/>
-            </a:effectRef>
-            <a:fontRef idx="minor">
-              <a:schemeClr val="tx1"/>
-            </a:fontRef>
-          </p:style>
-        </p:cxnSp>
-        <p:sp>
-          <p:nvSpPr>
-            <p:cNvPr id="207" name="正方形/長方形 206">
-              <a:extLst>
-                <a:ext uri="{FF2B5EF4-FFF2-40B4-BE49-F238E27FC236}">
-                  <a16:creationId xmlns:a16="http://schemas.microsoft.com/office/drawing/2014/main" id="{22FF457E-2D82-D768-5182-7DDD3EF63A48}"/>
-                </a:ext>
-              </a:extLst>
-            </p:cNvPr>
-            <p:cNvSpPr/>
-            <p:nvPr/>
-          </p:nvSpPr>
-          <p:spPr>
-            <a:xfrm>
-              <a:off x="4226426" y="1466850"/>
-              <a:ext cx="264612" cy="556835"/>
-            </a:xfrm>
-            <a:prstGeom prst="rect">
-              <a:avLst/>
-            </a:prstGeom>
-          </p:spPr>
-          <p:style>
-            <a:lnRef idx="2">
-              <a:schemeClr val="accent1">
-                <a:shade val="15000"/>
-              </a:schemeClr>
-            </a:lnRef>
-            <a:fillRef idx="1">
-              <a:schemeClr val="accent1"/>
-            </a:fillRef>
-            <a:effectRef idx="0">
-              <a:schemeClr val="accent1"/>
-            </a:effectRef>
-            <a:fontRef idx="minor">
-              <a:schemeClr val="lt1"/>
-            </a:fontRef>
-          </p:style>
-          <p:txBody>
-            <a:bodyPr rtlCol="0" anchor="ctr"/>
-            <a:lstStyle/>
-            <a:p>
-              <a:pPr algn="ctr"/>
-              <a:r>
-                <a:rPr lang="ja-JP" altLang="en-US" dirty="0"/>
-                <a:t>物体</a:t>
-              </a:r>
-              <a:endParaRPr kumimoji="1" lang="ja-JP" altLang="en-US" dirty="0"/>
-            </a:p>
-          </p:txBody>
-        </p:sp>
-        <p:cxnSp>
-          <p:nvCxnSpPr>
-            <p:cNvPr id="43" name="直線コネクタ 42">
-              <a:extLst>
-                <a:ext uri="{FF2B5EF4-FFF2-40B4-BE49-F238E27FC236}">
-                  <a16:creationId xmlns:a16="http://schemas.microsoft.com/office/drawing/2014/main" id="{6B65DD0F-9EBE-5FA1-F6C9-85DD33FBBB73}"/>
-                </a:ext>
-              </a:extLst>
-            </p:cNvPr>
-            <p:cNvCxnSpPr>
-              <a:cxnSpLocks/>
-              <a:stCxn id="202" idx="0"/>
-            </p:cNvCxnSpPr>
-            <p:nvPr/>
-          </p:nvCxnSpPr>
-          <p:spPr>
-            <a:xfrm flipV="1">
-              <a:off x="2215431" y="717225"/>
-              <a:ext cx="1204496" cy="1562"/>
-            </a:xfrm>
-            <a:prstGeom prst="line">
-              <a:avLst/>
-            </a:prstGeom>
-            <a:ln w="19050">
-              <a:solidFill>
-                <a:srgbClr val="8FAADC"/>
-              </a:solidFill>
-              <a:prstDash val="sysDot"/>
-            </a:ln>
-          </p:spPr>
-          <p:style>
-            <a:lnRef idx="1">
-              <a:schemeClr val="accent1"/>
-            </a:lnRef>
-            <a:fillRef idx="0">
-              <a:schemeClr val="accent1"/>
-            </a:fillRef>
-            <a:effectRef idx="0">
-              <a:schemeClr val="accent1"/>
-            </a:effectRef>
-            <a:fontRef idx="minor">
-              <a:schemeClr val="tx1"/>
-            </a:fontRef>
-          </p:style>
-        </p:cxnSp>
-        <p:sp>
-          <p:nvSpPr>
-            <p:cNvPr id="47" name="テキスト ボックス 46">
-              <a:extLst>
-                <a:ext uri="{FF2B5EF4-FFF2-40B4-BE49-F238E27FC236}">
-                  <a16:creationId xmlns:a16="http://schemas.microsoft.com/office/drawing/2014/main" id="{F1872CB4-6B3D-2D80-E5BA-8A3F49F9590E}"/>
-                </a:ext>
-              </a:extLst>
-            </p:cNvPr>
-            <p:cNvSpPr txBox="1"/>
-            <p:nvPr/>
-          </p:nvSpPr>
-          <p:spPr>
-            <a:xfrm>
-              <a:off x="2826485" y="436871"/>
-              <a:ext cx="303288" cy="369332"/>
-            </a:xfrm>
-            <a:prstGeom prst="rect">
-              <a:avLst/>
-            </a:prstGeom>
-            <a:noFill/>
-          </p:spPr>
-          <p:txBody>
-            <a:bodyPr wrap="none" rtlCol="0">
-              <a:spAutoFit/>
-            </a:bodyPr>
-            <a:lstStyle/>
-            <a:p>
-              <a:r>
-                <a:rPr kumimoji="1" lang="en-US" altLang="ja-JP" dirty="0"/>
-                <a:t>c</a:t>
-              </a:r>
-              <a:endParaRPr kumimoji="1" lang="ja-JP" altLang="en-US" dirty="0"/>
-            </a:p>
-          </p:txBody>
-        </p:sp>
-      </p:grpSp>
+            </a:endParaRPr>
+          </a:p>
+        </p:txBody>
+      </p:sp>
     </p:spTree>
     <p:extLst>
       <p:ext uri="{BB962C8B-B14F-4D97-AF65-F5344CB8AC3E}">
